--- a/docs/Presentation_Idan_Omri.pptx
+++ b/docs/Presentation_Idan_Omri.pptx
@@ -5,16 +5,16 @@
     <p:sldMasterId id="2147483648" r:id="rId1"/>
   </p:sldMasterIdLst>
   <p:notesMasterIdLst>
-    <p:notesMasterId r:id="rId21"/>
+    <p:notesMasterId r:id="rId20"/>
   </p:notesMasterIdLst>
   <p:sldIdLst>
     <p:sldId id="256" r:id="rId2"/>
     <p:sldId id="257" r:id="rId3"/>
-    <p:sldId id="258" r:id="rId4"/>
-    <p:sldId id="259" r:id="rId5"/>
-    <p:sldId id="260" r:id="rId6"/>
-    <p:sldId id="261" r:id="rId7"/>
-    <p:sldId id="262" r:id="rId8"/>
+    <p:sldId id="259" r:id="rId4"/>
+    <p:sldId id="260" r:id="rId5"/>
+    <p:sldId id="261" r:id="rId6"/>
+    <p:sldId id="262" r:id="rId7"/>
+    <p:sldId id="258" r:id="rId8"/>
     <p:sldId id="263" r:id="rId9"/>
     <p:sldId id="272" r:id="rId10"/>
     <p:sldId id="273" r:id="rId11"/>
@@ -25,8 +25,7 @@
     <p:sldId id="279" r:id="rId16"/>
     <p:sldId id="265" r:id="rId17"/>
     <p:sldId id="268" r:id="rId18"/>
-    <p:sldId id="271" r:id="rId20"/>
-    <p:sldId id="280" r:id="rId19"/>
+    <p:sldId id="271" r:id="rId19"/>
   </p:sldIdLst>
   <p:sldSz cx="12192000" cy="6858000"/>
   <p:notesSz cx="6858000" cy="9144000"/>
@@ -147,7 +146,7 @@
 <file path=ppt/charts/chart1.xml><?xml version="1.0" encoding="utf-8"?>
 <c:chartSpace xmlns:c="http://schemas.openxmlformats.org/drawingml/2006/chart" xmlns:a="http://schemas.openxmlformats.org/drawingml/2006/main" xmlns:r="http://schemas.openxmlformats.org/officeDocument/2006/relationships" xmlns:c16r2="http://schemas.microsoft.com/office/drawing/2015/06/chart">
   <c:date1904 val="0"/>
-  <c:lang val="he-IL"/>
+  <c:lang val="en-US"/>
   <c:roundedCorners val="1"/>
   <c:style val="2"/>
   <c:chart>
@@ -569,7 +568,7 @@
 <file path=ppt/charts/chart2.xml><?xml version="1.0" encoding="utf-8"?>
 <c:chartSpace xmlns:c="http://schemas.openxmlformats.org/drawingml/2006/chart" xmlns:a="http://schemas.openxmlformats.org/drawingml/2006/main" xmlns:r="http://schemas.openxmlformats.org/officeDocument/2006/relationships" xmlns:c16r2="http://schemas.microsoft.com/office/drawing/2015/06/chart">
   <c:date1904 val="0"/>
-  <c:lang val="he-IL"/>
+  <c:lang val="en-US"/>
   <c:roundedCorners val="1"/>
   <c:style val="2"/>
   <c:chart>
@@ -980,7 +979,7 @@
 <file path=ppt/charts/chart3.xml><?xml version="1.0" encoding="utf-8"?>
 <c:chartSpace xmlns:c="http://schemas.openxmlformats.org/drawingml/2006/chart" xmlns:a="http://schemas.openxmlformats.org/drawingml/2006/main" xmlns:r="http://schemas.openxmlformats.org/officeDocument/2006/relationships" xmlns:c16r2="http://schemas.microsoft.com/office/drawing/2015/06/chart">
   <c:date1904 val="0"/>
-  <c:lang val="he-IL"/>
+  <c:lang val="en-US"/>
   <c:roundedCorners val="1"/>
   <c:style val="2"/>
   <c:chart>
@@ -2364,72 +2363,6 @@
 </file>
 
 <file path=ppt/notesSlides/notesSlide18.xml><?xml version="1.0" encoding="utf-8"?>
-<p:notes xmlns:a="http://schemas.openxmlformats.org/drawingml/2006/main" xmlns:p="http://schemas.openxmlformats.org/presentationml/2006/main" xmlns:r="http://schemas.openxmlformats.org/officeDocument/2006/relationships">
-  <p:cSld>
-    <p:spTree>
-      <p:nvGrpSpPr>
-        <p:cNvPr id="1" name=""/>
-        <p:cNvGrpSpPr/>
-        <p:nvPr/>
-      </p:nvGrpSpPr>
-      <p:grpSpPr>
-        <a:xfrm>
-          <a:off x="0" y="0"/>
-          <a:ext cx="0" cy="0"/>
-          <a:chOff x="0" y="0"/>
-          <a:chExt cx="0" cy="0"/>
-        </a:xfrm>
-      </p:grpSpPr>
-      <p:sp>
-        <p:nvSpPr>
-          <p:cNvPr id="3" name="Notes Placeholder 2"/>
-          <p:cNvSpPr>
-            <a:spLocks noGrp="1"/>
-          </p:cNvSpPr>
-          <p:nvPr>
-            <p:ph type="body" sz="quarter" idx="3"/>
-          </p:nvPr>
-        </p:nvSpPr>
-        <p:spPr/>
-        <p:txBody>
-          <a:bodyPr/>
-          <a:lstStyle/>
-          <a:p>
-            <a:r>
-              <a:t>עידן, בערך 40 שניות.</a:t>
-            </a:r>
-          </a:p>
-          <a:p>
-            <a:r>
-              <a:t>שלושה דברים שלמדנו. הראשון, איפה נשארה השגיאה: בנקודות שבהן הדיבור והרעש חזקים בערך באותה מידה. שם המסכה צריכה הנחתה חלקית, ושם גם הפאזה הרועשת הכי רחוקה מהנקייה, וסביר ששם נמצאים העיצורים החלשים, מה שהאוזן שומעת.</a:t>
-            </a:r>
-          </a:p>
-          <a:p>
-            <a:r>
-              <a:t>השני, איך משפרים: לא עם עוד נתונים מאותו סוג, פי 3 גיוון כמעט לא שינה, ההפסד על ה-validation קרוב לאימון. צריך לתת לעיצורים משקל בהפסד, ולטפל בפאזה, עם מסכה מרוכבת.</a:t>
-            </a:r>
-          </a:p>
-          <a:p>
-            <a:r>
-              <a:t>השלישי, יעילות: המודל קטן ורץ פי 22 מהר מזמן אמת. ה-Global, ה-Attention לאורך ציר הזמן, רואה את כל ההקלטה, וזה גם החלק היקר והסיבה שהמודל לא סיבתי. השאלה הפתוחה היא כמה הוא תורם, ואם אפשר בלעדיו מודל לשיחה חיה.</a:t>
-            </a:r>
-          </a:p>
-          <a:p>
-            <a:r>
-              <a:t>מסיימים, תודה, ושאלות.</a:t>
-            </a:r>
-          </a:p>
-        </p:txBody>
-      </p:sp>
-    </p:spTree>
-  </p:cSld>
-  <p:clrMapOvr>
-    <a:masterClrMapping/>
-  </p:clrMapOvr>
-</p:notes>
-</file>
-
-<file path=ppt/notesSlides/notesSlide19.xml><?xml version="1.0" encoding="utf-8"?>
 <p:notes xmlns:a="http://schemas.openxmlformats.org/drawingml/2006/main" xmlns:r="http://schemas.openxmlformats.org/officeDocument/2006/relationships" xmlns:p="http://schemas.openxmlformats.org/presentationml/2006/main">
   <p:cSld>
     <p:spTree>
@@ -2824,7 +2757,7 @@
                 <a:latin typeface="Arial"/>
                 <a:cs typeface="Arial"/>
               </a:rPr>
-              <a:t>VoiceBank-DEMAND [3], המאגר המקובל בתחום, כל הקלטה רועשת מגיעה עם הנקייה שממנה נוצרה.</a:t>
+              <a:t>הרעיון לקוח מ-TSTNN [1], שעובד ישירות על ה-waveform עם Transformer מקומי וגלובלי. אנחנו העברנו אותו למרחב זמן-תדר, כמו ב-Dynamic Noise Embedding [2].</a:t>
             </a:r>
           </a:p>
           <a:p>
@@ -2843,7 +2776,7 @@
                 <a:latin typeface="Arial"/>
                 <a:cs typeface="Arial"/>
               </a:rPr>
-              <a:t>הבדיקה על דוברים ורעשים שלא נראו באימון, כך שזו בדיקת הכללה אמיתית.</a:t>
+              <a:t>למה זמן-תדר, דיבור דליל בספקטרוגרמה, ולכן קל ללמוד מסכה שמחליטה כמה להשאיר מכל נקודה. האלטרנטיבה, לייצר waveform ישירות, קשה יותר ללמידה.</a:t>
             </a:r>
           </a:p>
           <a:p>
@@ -2862,7 +2795,7 @@
                 <a:latin typeface="Arial"/>
                 <a:cs typeface="Arial"/>
               </a:rPr>
-              <a:t>ה-validation הוא 3 דוברים שהוצאנו מסט האימון, כדי שאף דובר לא יופיע גם באימון וגם בבחירת המודל.</a:t>
+              <a:t>עוברים על הזרימה מימין לשמאל, STFT, Encoder, קיבוץ, 4 בלוקי Dual-Path, פירוק, Decoder, מסכה, iSTFT עם הפאזה הרועשת.</a:t>
             </a:r>
           </a:p>
           <a:p>
@@ -2881,26 +2814,7 @@
                 <a:latin typeface="Arial"/>
                 <a:cs typeface="Arial"/>
               </a:rPr>
-              <a:t>למה כמה מדדים, אפשר לשפר אחד בלי השני. PESQ מודד איכות כפי שהאוזן שומעת, STOI ו-ESTOI מובנות, SI-SDR ו-SSNR עיוות של האות.</a:t>
-            </a:r>
-          </a:p>
-          <a:p>
-            <a:pPr marL="292608" indent="-292608" algn="r" rtl="1">
-              <a:spcAft>
-                <a:spcPts val="400"/>
-              </a:spcAft>
-              <a:buFont typeface="Arial"/>
-              <a:buChar char="•"/>
-            </a:pPr>
-            <a:r>
-              <a:rPr lang="he-IL" sz="1400" b="0">
-                <a:solidFill>
-                  <a:srgbClr val="1B242B"/>
-                </a:solidFill>
-                <a:latin typeface="Arial"/>
-                <a:cs typeface="Arial"/>
-              </a:rPr>
-              <a:t>המגבלה, הרעש חובר דיגיטלית, בלי הדהוד ובלי מיקרופון אמיתי.</a:t>
+              <a:t>877 אלף פרמטרים, כמו TSTNN (0.92 מיליון), כך שההשוואה הוגנת.</a:t>
             </a:r>
           </a:p>
         </p:txBody>
@@ -3002,7 +2916,7 @@
                 <a:latin typeface="Arial"/>
                 <a:cs typeface="Arial"/>
               </a:rPr>
-              <a:t>הרעיון לקוח מ-TSTNN [1], שעובד ישירות על ה-waveform עם Transformer מקומי וגלובלי. אנחנו העברנו אותו למרחב זמן-תדר, כמו ב-Dynamic Noise Embedding [2].</a:t>
+              <a:t>STFT עם חלון Hann של 32 ms וקפיצה של 8 ms. למה 32 ms, בחלון כזה הדיבור כמעט סטציונרי, והמרווח בין התדרים (31 Hz) מפריד בין הרמוניות.</a:t>
             </a:r>
           </a:p>
           <a:p>
@@ -3021,7 +2935,7 @@
                 <a:latin typeface="Arial"/>
                 <a:cs typeface="Arial"/>
               </a:rPr>
-              <a:t>למה זמן-תדר, דיבור דליל בספקטרוגרמה, ולכן קל ללמוד מסכה שמחליטה כמה להשאיר מכל נקודה. האלטרנטיבה, לייצר waveform ישירות, קשה יותר ללמידה.</a:t>
+              <a:t>Hann יורד בהדרגה לאפס בקצוות, ולכן כמעט לא מדליף אנרגיה של הרמוניות חזקות לנקודות השקטות. החפיפה של 75 אחוז לא נדרשת לשחזור, ה-iSTFT מדויק בכל חפיפה, אבל כל דגימה נבנית מארבע מסגרות, וכך שינוי חד במסכה בין מסגרות סמוכות מוחלק ולא נשמע כקפיצה.</a:t>
             </a:r>
           </a:p>
           <a:p>
@@ -3040,7 +2954,7 @@
                 <a:latin typeface="Arial"/>
                 <a:cs typeface="Arial"/>
               </a:rPr>
-              <a:t>עוברים על הזרימה מימין לשמאל, STFT, Encoder, קיבוץ, 4 בלוקי Dual-Path, פירוק, Decoder, מסכה, iSTFT עם הפאזה הרועשת.</a:t>
+              <a:t>דחיסה בחזקת 0.3, ההבדל בין הנקודות החזקות לחלשות הוא פי אלפים, ובלי דחיסה הרשת וההפסד רואים רק את ההרמוניות החזקות (באמצע, כמעט הכול שחור). מימין רואים שאחרי הדחיסה גם הפרטים החלשים נראים.</a:t>
             </a:r>
           </a:p>
           <a:p>
@@ -3059,7 +2973,26 @@
                 <a:latin typeface="Arial"/>
                 <a:cs typeface="Arial"/>
               </a:rPr>
-              <a:t>877 אלף פרמטרים, כמו TSTNN (0.92 מיליון), כך שההשוואה הוגנת.</a:t>
+              <a:t>למה לא log, הוא מתפוצץ ליד אפס ונותן משקל גדול לרעש שקט. החזקה 0.3 היא פשרה מקובלת.</a:t>
+            </a:r>
+          </a:p>
+          <a:p>
+            <a:pPr marL="292608" indent="-292608" algn="r" rtl="1">
+              <a:spcAft>
+                <a:spcPts val="400"/>
+              </a:spcAft>
+              <a:buFont typeface="Arial"/>
+              <a:buChar char="•"/>
+            </a:pPr>
+            <a:r>
+              <a:rPr lang="he-IL" sz="1400" b="0">
+                <a:solidFill>
+                  <a:srgbClr val="1B242B"/>
+                </a:solidFill>
+                <a:latin typeface="Arial"/>
+                <a:cs typeface="Arial"/>
+              </a:rPr>
+              <a:t>בסוף תקנון לכל הקלטה (ממוצע וסטיית תקן), כדי שעוצמת ההקלטה לא תשנה את התוצאה.</a:t>
             </a:r>
           </a:p>
         </p:txBody>
@@ -3142,7 +3075,7 @@
                 <a:latin typeface="Arial"/>
                 <a:cs typeface="Arial"/>
               </a:rPr>
-              <a:t>עמרי, בערך דקה.</a:t>
+              <a:t>עמרי, בערך דקה וחצי.</a:t>
             </a:r>
           </a:p>
           <a:p>
@@ -3161,7 +3094,7 @@
                 <a:latin typeface="Arial"/>
                 <a:cs typeface="Arial"/>
               </a:rPr>
-              <a:t>STFT עם חלון Hann של 32 ms וקפיצה של 8 ms. למה 32 ms, בחלון כזה הדיבור כמעט סטציונרי, והמרווח בין התדרים (31 Hz) מפריד בין הרמוניות.</a:t>
+              <a:t>כל בלוק עושה שני שלבים. קודם Attention לאורך התדר בתוך כל מסגרת, לומד הרמוניות ופורמנטים. אחר כך לאורך הזמן בתוך כל פס, לומד מה קבוע (רעש) ומה משתנה (דיבור), ואת ההקשר של ההברות.</a:t>
             </a:r>
           </a:p>
           <a:p>
@@ -3180,7 +3113,7 @@
                 <a:latin typeface="Arial"/>
                 <a:cs typeface="Arial"/>
               </a:rPr>
-              <a:t>Hann יורד בהדרגה לאפס בקצוות, ולכן כמעט לא מדליף אנרגיה של הרמוניות חזקות לנקודות השקטות. החפיפה של 75 אחוז לא נדרשת לשחזור, ה-iSTFT מדויק בכל חפיפה, אבל כל דגימה נבנית מארבע מסגרות, וכך שינוי חד במסכה בין מסגרות סמוכות מוחלק ולא נשמע כקפיצה.</a:t>
+              <a:t>הנוסחה, כל נקודה שואלת (Q) את כל האחרות (K) כמה הן רלוונטיות, ולוקחת ממוצע משוקלל של הערכים שלהן (V). 4 ראשים של 12 ממדים, כל ראש מסתכל על קשר אחר.</a:t>
             </a:r>
           </a:p>
           <a:p>
@@ -3199,7 +3132,7 @@
                 <a:latin typeface="Arial"/>
                 <a:cs typeface="Arial"/>
               </a:rPr>
-              <a:t>דחיסה בחזקת 0.3, ההבדל בין הנקודות החזקות לחלשות הוא פי אלפים, ובלי דחיסה הרשת וההפסד רואים רק את ההרמוניות החזקות (באמצע, כמעט הכול שחור). מימין רואים שאחרי הדחיסה גם הפרטים החלשים נראים.</a:t>
+              <a:t>למה שני צירים ולא Attention על כל המישור, הגרף משמאל. על כל המישור זה 4.2 מיליארד השוואות לשכבה, שני צירים בנפרד 33 מיליון, ואחרי הקיבוץ 4 על 4 רק חצי מיליון. זה מה שמאפשר לאמן על הקלטות שלמות.</a:t>
             </a:r>
           </a:p>
           <a:p>
@@ -3218,26 +3151,7 @@
                 <a:latin typeface="Arial"/>
                 <a:cs typeface="Arial"/>
               </a:rPr>
-              <a:t>למה לא log, הוא מתפוצץ ליד אפס ונותן משקל גדול לרעש שקט. החזקה 0.3 היא פשרה מקובלת.</a:t>
-            </a:r>
-          </a:p>
-          <a:p>
-            <a:pPr marL="292608" indent="-292608" algn="r" rtl="1">
-              <a:spcAft>
-                <a:spcPts val="400"/>
-              </a:spcAft>
-              <a:buFont typeface="Arial"/>
-              <a:buChar char="•"/>
-            </a:pPr>
-            <a:r>
-              <a:rPr lang="he-IL" sz="1400" b="0">
-                <a:solidFill>
-                  <a:srgbClr val="1B242B"/>
-                </a:solidFill>
-                <a:latin typeface="Arial"/>
-                <a:cs typeface="Arial"/>
-              </a:rPr>
-              <a:t>בסוף תקנון לכל הקלטה (ממוצע וסטיית תקן), כדי שעוצמת ההקלטה לא תשנה את התוצאה.</a:t>
+              <a:t>אין positional encoding, ה-BiGRU במקום השכבה הליניארית הראשונה הוא שנותן לרשת את הסדר.</a:t>
             </a:r>
           </a:p>
         </p:txBody>
@@ -3320,7 +3234,7 @@
                 <a:latin typeface="Arial"/>
                 <a:cs typeface="Arial"/>
               </a:rPr>
-              <a:t>עמרי, בערך דקה וחצי.</a:t>
+              <a:t>עמרי, בערך 50 שניות.</a:t>
             </a:r>
           </a:p>
           <a:p>
@@ -3339,7 +3253,7 @@
                 <a:latin typeface="Arial"/>
                 <a:cs typeface="Arial"/>
               </a:rPr>
-              <a:t>כל בלוק עושה שני שלבים. קודם Attention לאורך התדר בתוך כל מסגרת, לומד הרמוניות ופורמנטים. אחר כך לאורך הזמן בתוך כל פס, לומד מה קבוע (רעש) ומה משתנה (דיבור), ואת ההקשר של ההברות.</a:t>
+              <a:t>בסוף ה-Decoder יש ReLU, כך שהמסכה לא שלילית ולא חסומה מלמעלה. Sigmoid היה מגביל ל-1, אבל לפעמים הרעש מבטל חלק מהדיבור וצריך להגביר.</a:t>
             </a:r>
           </a:p>
           <a:p>
@@ -3358,7 +3272,7 @@
                 <a:latin typeface="Arial"/>
                 <a:cs typeface="Arial"/>
               </a:rPr>
-              <a:t>הנוסחה, כל נקודה שואלת (Q) את כל האחרות (K) כמה הן רלוונטיות, ולוקחת ממוצע משוקלל של הערכים שלהן (V). 4 ראשים של 12 ממדים, כל ראש מסתכל על קשר אחר.</a:t>
+              <a:t>המסכה פועלת על ה-magnitude הדחוס, ולכן ההגבר האמיתי הוא M בחזקת 3.33.</a:t>
             </a:r>
           </a:p>
           <a:p>
@@ -3377,7 +3291,7 @@
                 <a:latin typeface="Arial"/>
                 <a:cs typeface="Arial"/>
               </a:rPr>
-              <a:t>למה שני צירים ולא Attention על כל המישור, הגרף משמאל. על כל המישור זה 4.2 מיליארד השוואות לשכבה, שני צירים בנפרד 33 מיליון, ואחרי הקיבוץ 4 על 4 רק חצי מיליון. זה מה שמאפשר לאמן על הקלטות שלמות.</a:t>
+              <a:t>את הפאזה לא משנים, משתמשים בפאזה הרועשת. מכאן התקרה, גם עם magnitude מושלם PESQ מגיע רק ל-3.95. נחזור לזה בתוצאות.</a:t>
             </a:r>
           </a:p>
           <a:p>
@@ -3396,7 +3310,7 @@
                 <a:latin typeface="Arial"/>
                 <a:cs typeface="Arial"/>
               </a:rPr>
-              <a:t>אין positional encoding, ה-BiGRU במקום השכבה הליניארית הראשונה הוא שנותן לרשת את הסדר.</a:t>
+              <a:t>הפרמטרים, 57 אחוז בקונבולוציות, 39 אחוז בליבה, ומתוכם רוב הליבה הוא ה-GRU ולא ה-Attention.</a:t>
             </a:r>
           </a:p>
         </p:txBody>
@@ -3479,7 +3393,7 @@
                 <a:latin typeface="Arial"/>
                 <a:cs typeface="Arial"/>
               </a:rPr>
-              <a:t>עמרי, בערך 50 שניות.</a:t>
+              <a:t>עמרי, בערך דקה.</a:t>
             </a:r>
           </a:p>
           <a:p>
@@ -3498,7 +3412,7 @@
                 <a:latin typeface="Arial"/>
                 <a:cs typeface="Arial"/>
               </a:rPr>
-              <a:t>בסוף ה-Decoder יש ReLU, כך שהמסכה לא שלילית ולא חסומה מלמעלה. Sigmoid היה מגביל ל-1, אבל לפעמים הרעש מבטל חלק מהדיבור וצריך להגביר.</a:t>
+              <a:t>VoiceBank-DEMAND [3], המאגר המקובל בתחום, כל הקלטה רועשת מגיעה עם הנקייה שממנה נוצרה.</a:t>
             </a:r>
           </a:p>
           <a:p>
@@ -3517,7 +3431,7 @@
                 <a:latin typeface="Arial"/>
                 <a:cs typeface="Arial"/>
               </a:rPr>
-              <a:t>המסכה פועלת על ה-magnitude הדחוס, ולכן ההגבר האמיתי הוא M בחזקת 3.33.</a:t>
+              <a:t>הבדיקה על דוברים ורעשים שלא נראו באימון, כך שזו בדיקת הכללה אמיתית.</a:t>
             </a:r>
           </a:p>
           <a:p>
@@ -3536,7 +3450,7 @@
                 <a:latin typeface="Arial"/>
                 <a:cs typeface="Arial"/>
               </a:rPr>
-              <a:t>את הפאזה לא משנים, משתמשים בפאזה הרועשת. מכאן התקרה, גם עם magnitude מושלם PESQ מגיע רק ל-3.95. נחזור לזה בתוצאות.</a:t>
+              <a:t>ה-validation הוא 3 דוברים שהוצאנו מסט האימון, כדי שאף דובר לא יופיע גם באימון וגם בבחירת המודל.</a:t>
             </a:r>
           </a:p>
           <a:p>
@@ -3555,7 +3469,26 @@
                 <a:latin typeface="Arial"/>
                 <a:cs typeface="Arial"/>
               </a:rPr>
-              <a:t>הפרמטרים, 57 אחוז בקונבולוציות, 39 אחוז בליבה, ומתוכם רוב הליבה הוא ה-GRU ולא ה-Attention.</a:t>
+              <a:t>למה כמה מדדים, אפשר לשפר אחד בלי השני. PESQ מודד איכות כפי שהאוזן שומעת, STOI ו-ESTOI מובנות, SI-SDR ו-SSNR עיוות של האות.</a:t>
+            </a:r>
+          </a:p>
+          <a:p>
+            <a:pPr marL="292608" indent="-292608" algn="r" rtl="1">
+              <a:spcAft>
+                <a:spcPts val="400"/>
+              </a:spcAft>
+              <a:buFont typeface="Arial"/>
+              <a:buChar char="•"/>
+            </a:pPr>
+            <a:r>
+              <a:rPr lang="he-IL" sz="1400" b="0">
+                <a:solidFill>
+                  <a:srgbClr val="1B242B"/>
+                </a:solidFill>
+                <a:latin typeface="Arial"/>
+                <a:cs typeface="Arial"/>
+              </a:rPr>
+              <a:t>המגבלה, הרעש חובר דיגיטלית, בלי הדהוד ובלי מיקרופון אמיתי.</a:t>
             </a:r>
           </a:p>
         </p:txBody>
@@ -4003,7 +3936,7 @@
           <a:p>
             <a:fld id="{5BCAD085-E8A6-8845-BD4E-CB4CCA059FC4}" type="datetimeFigureOut">
               <a:rPr lang="en-US" smtClean="0"/>
-              <a:t>10/13/2026</a:t>
+              <a:t>10/15/26</a:t>
             </a:fld>
             <a:endParaRPr lang="en-US"/>
           </a:p>
@@ -4171,7 +4104,7 @@
           <a:p>
             <a:fld id="{5BCAD085-E8A6-8845-BD4E-CB4CCA059FC4}" type="datetimeFigureOut">
               <a:rPr lang="en-US" smtClean="0"/>
-              <a:t>10/13/2026</a:t>
+              <a:t>10/15/26</a:t>
             </a:fld>
             <a:endParaRPr lang="en-US"/>
           </a:p>
@@ -4349,7 +4282,7 @@
           <a:p>
             <a:fld id="{5BCAD085-E8A6-8845-BD4E-CB4CCA059FC4}" type="datetimeFigureOut">
               <a:rPr lang="en-US" smtClean="0"/>
-              <a:t>10/13/2026</a:t>
+              <a:t>10/15/26</a:t>
             </a:fld>
             <a:endParaRPr lang="en-US"/>
           </a:p>
@@ -4517,7 +4450,7 @@
           <a:p>
             <a:fld id="{5BCAD085-E8A6-8845-BD4E-CB4CCA059FC4}" type="datetimeFigureOut">
               <a:rPr lang="en-US" smtClean="0"/>
-              <a:t>10/13/2026</a:t>
+              <a:t>10/15/26</a:t>
             </a:fld>
             <a:endParaRPr lang="en-US"/>
           </a:p>
@@ -4762,7 +4695,7 @@
           <a:p>
             <a:fld id="{5BCAD085-E8A6-8845-BD4E-CB4CCA059FC4}" type="datetimeFigureOut">
               <a:rPr lang="en-US" smtClean="0"/>
-              <a:t>10/13/2026</a:t>
+              <a:t>10/15/26</a:t>
             </a:fld>
             <a:endParaRPr lang="en-US"/>
           </a:p>
@@ -5047,7 +4980,7 @@
           <a:p>
             <a:fld id="{5BCAD085-E8A6-8845-BD4E-CB4CCA059FC4}" type="datetimeFigureOut">
               <a:rPr lang="en-US" smtClean="0"/>
-              <a:t>10/13/2026</a:t>
+              <a:t>10/15/26</a:t>
             </a:fld>
             <a:endParaRPr lang="en-US"/>
           </a:p>
@@ -5466,7 +5399,7 @@
           <a:p>
             <a:fld id="{5BCAD085-E8A6-8845-BD4E-CB4CCA059FC4}" type="datetimeFigureOut">
               <a:rPr lang="en-US" smtClean="0"/>
-              <a:t>10/13/2026</a:t>
+              <a:t>10/15/26</a:t>
             </a:fld>
             <a:endParaRPr lang="en-US"/>
           </a:p>
@@ -5583,7 +5516,7 @@
           <a:p>
             <a:fld id="{5BCAD085-E8A6-8845-BD4E-CB4CCA059FC4}" type="datetimeFigureOut">
               <a:rPr lang="en-US" smtClean="0"/>
-              <a:t>10/13/2026</a:t>
+              <a:t>10/15/26</a:t>
             </a:fld>
             <a:endParaRPr lang="en-US"/>
           </a:p>
@@ -5678,7 +5611,7 @@
           <a:p>
             <a:fld id="{5BCAD085-E8A6-8845-BD4E-CB4CCA059FC4}" type="datetimeFigureOut">
               <a:rPr lang="en-US" smtClean="0"/>
-              <a:t>10/13/2026</a:t>
+              <a:t>10/15/26</a:t>
             </a:fld>
             <a:endParaRPr lang="en-US"/>
           </a:p>
@@ -5953,7 +5886,7 @@
           <a:p>
             <a:fld id="{5BCAD085-E8A6-8845-BD4E-CB4CCA059FC4}" type="datetimeFigureOut">
               <a:rPr lang="en-US" smtClean="0"/>
-              <a:t>10/13/2026</a:t>
+              <a:t>10/15/26</a:t>
             </a:fld>
             <a:endParaRPr lang="en-US"/>
           </a:p>
@@ -6205,7 +6138,7 @@
           <a:p>
             <a:fld id="{5BCAD085-E8A6-8845-BD4E-CB4CCA059FC4}" type="datetimeFigureOut">
               <a:rPr lang="en-US" smtClean="0"/>
-              <a:t>10/13/2026</a:t>
+              <a:t>10/15/26</a:t>
             </a:fld>
             <a:endParaRPr lang="en-US"/>
           </a:p>
@@ -6416,7 +6349,7 @@
           <a:p>
             <a:fld id="{5BCAD085-E8A6-8845-BD4E-CB4CCA059FC4}" type="datetimeFigureOut">
               <a:rPr lang="en-US" smtClean="0"/>
-              <a:t>10/13/2026</a:t>
+              <a:t>10/15/26</a:t>
             </a:fld>
             <a:endParaRPr lang="en-US"/>
           </a:p>
@@ -7619,17 +7552,7 @@
                 <a:latin typeface="Arial"/>
                 <a:cs typeface="Arial"/>
               </a:rPr>
-              <a:t>‎</a:t>
-            </a:r>
-            <a:r>
-              <a:rPr lang="he-IL" sz="1400" b="0" dirty="0">
-                <a:solidFill>
-                  <a:srgbClr val="1B242B"/>
-                </a:solidFill>
-                <a:latin typeface="Arial"/>
-                <a:cs typeface="Arial"/>
-              </a:rPr>
-              <a:t> על כל הקלטות האימון</a:t>
+              <a:t>‎ על כל הקלטות האימון</a:t>
             </a:r>
           </a:p>
         </p:txBody>
@@ -7790,17 +7713,7 @@
                 <a:latin typeface="Arial"/>
                 <a:cs typeface="Arial"/>
               </a:rPr>
-              <a:t>‎</a:t>
-            </a:r>
-            <a:r>
-              <a:rPr lang="he-IL" sz="1400" b="0" dirty="0">
-                <a:solidFill>
-                  <a:srgbClr val="1B242B"/>
-                </a:solidFill>
-                <a:latin typeface="Arial"/>
-                <a:cs typeface="Arial"/>
-              </a:rPr>
-              <a:t> על 200 קבצים של 3 דוברים שלא נראו באימון</a:t>
+              <a:t>‎ על 200 קבצים של 3 דוברים שלא נראו באימון</a:t>
             </a:r>
           </a:p>
         </p:txBody>
@@ -7961,7 +7874,17 @@
                 <a:latin typeface="Arial"/>
                 <a:cs typeface="Arial"/>
               </a:rPr>
-              <a:t>‎</a:t>
+              <a:t>‎ עם ה-</a:t>
+            </a:r>
+            <a:r>
+              <a:rPr lang="en-US" sz="1400" b="0" dirty="0">
+                <a:solidFill>
+                  <a:srgbClr val="1B242B"/>
+                </a:solidFill>
+                <a:latin typeface="Arial"/>
+                <a:cs typeface="Arial"/>
+              </a:rPr>
+              <a:t>PESQ</a:t>
             </a:r>
             <a:r>
               <a:rPr lang="he-IL" sz="1400" b="0" dirty="0">
@@ -7971,37 +7894,7 @@
                 <a:latin typeface="Arial"/>
                 <a:cs typeface="Arial"/>
               </a:rPr>
-              <a:t> עם ה-</a:t>
-            </a:r>
-            <a:r>
-              <a:rPr lang="en-US" sz="1400" b="0" dirty="0">
-                <a:solidFill>
-                  <a:srgbClr val="1B242B"/>
-                </a:solidFill>
-                <a:latin typeface="Arial"/>
-                <a:cs typeface="Arial"/>
-              </a:rPr>
-              <a:t>PESQ</a:t>
-            </a:r>
-            <a:r>
-              <a:rPr lang="he-IL" sz="1400" b="0" dirty="0">
-                <a:solidFill>
-                  <a:srgbClr val="1B242B"/>
-                </a:solidFill>
-                <a:latin typeface="Arial"/>
-                <a:cs typeface="Arial"/>
-              </a:rPr>
-              <a:t>‎</a:t>
-            </a:r>
-            <a:r>
-              <a:rPr lang="he-IL" sz="1400" b="0" dirty="0">
-                <a:solidFill>
-                  <a:srgbClr val="1B242B"/>
-                </a:solidFill>
-                <a:latin typeface="Arial"/>
-                <a:cs typeface="Arial"/>
-              </a:rPr>
-              <a:t> הגבוה ביותר, לא האחרון</a:t>
+              <a:t>‎ הגבוה ביותר, לא האחרון</a:t>
             </a:r>
           </a:p>
         </p:txBody>
@@ -8162,17 +8055,7 @@
                 <a:latin typeface="Arial"/>
                 <a:cs typeface="Arial"/>
               </a:rPr>
-              <a:t>‎</a:t>
-            </a:r>
-            <a:r>
-              <a:rPr lang="he-IL" sz="1400" b="0" dirty="0">
-                <a:solidFill>
-                  <a:srgbClr val="1B242B"/>
-                </a:solidFill>
-                <a:latin typeface="Arial"/>
-                <a:cs typeface="Arial"/>
-              </a:rPr>
-              <a:t>? קצב הלמידה יורד פי 2</a:t>
+              <a:t>‎? קצב הלמידה יורד פי 2</a:t>
             </a:r>
           </a:p>
         </p:txBody>
@@ -8472,17 +8355,7 @@
                 <a:latin typeface="Arial"/>
                 <a:cs typeface="Arial"/>
               </a:rPr>
-              <a:t>‎</a:t>
-            </a:r>
-            <a:r>
-              <a:rPr lang="he-IL" sz="1400" b="0" dirty="0">
-                <a:solidFill>
-                  <a:srgbClr val="1B242B"/>
-                </a:solidFill>
-                <a:latin typeface="Arial"/>
-                <a:cs typeface="Arial"/>
-              </a:rPr>
-              <a:t> שנבחר</a:t>
+              <a:t>‎ שנבחר</a:t>
             </a:r>
           </a:p>
         </p:txBody>
@@ -8666,17 +8539,7 @@
                 <a:latin typeface="Arial"/>
                 <a:cs typeface="Arial"/>
               </a:rPr>
-              <a:t>‎</a:t>
-            </a:r>
-            <a:r>
-              <a:rPr lang="he-IL" sz="1900" b="1" dirty="0">
-                <a:solidFill>
-                  <a:srgbClr val="7030A0"/>
-                </a:solidFill>
-                <a:latin typeface="Arial"/>
-                <a:cs typeface="Arial"/>
-              </a:rPr>
-              <a:t>: איך כל משקולת זזה</a:t>
+              <a:t>‎: איך כל משקולת זזה</a:t>
             </a:r>
           </a:p>
         </p:txBody>
@@ -8738,17 +8601,7 @@
                 <a:latin typeface="Arial"/>
                 <a:cs typeface="Arial"/>
               </a:rPr>
-              <a:t>‎</a:t>
-            </a:r>
-            <a:r>
-              <a:rPr lang="he-IL" sz="1400" b="0" dirty="0">
-                <a:solidFill>
-                  <a:srgbClr val="1B242B"/>
-                </a:solidFill>
-                <a:latin typeface="Arial"/>
-                <a:cs typeface="Arial"/>
-              </a:rPr>
-              <a:t> אחד</a:t>
+              <a:t>‎ אחד</a:t>
             </a:r>
           </a:p>
           <a:p>
@@ -8806,17 +8659,7 @@
                 <a:latin typeface="Arial"/>
                 <a:cs typeface="Arial"/>
               </a:rPr>
-              <a:t>‎</a:t>
-            </a:r>
-            <a:r>
-              <a:rPr lang="he-IL" sz="1400" b="0" dirty="0">
-                <a:solidFill>
-                  <a:srgbClr val="1B242B"/>
-                </a:solidFill>
-                <a:latin typeface="Arial"/>
-                <a:cs typeface="Arial"/>
-              </a:rPr>
-              <a:t> של 0.01 מקטין משקולות, בנפרד מהגרדיאנט</a:t>
+              <a:t>‎ של 0.01 מקטין משקולות, בנפרד מהגרדיאנט</a:t>
             </a:r>
           </a:p>
           <a:p>
@@ -8855,17 +8698,7 @@
                 <a:latin typeface="Arial"/>
                 <a:cs typeface="Arial"/>
               </a:rPr>
-              <a:t>‎</a:t>
-            </a:r>
-            <a:r>
-              <a:rPr lang="he-IL" sz="1400" b="0" dirty="0">
-                <a:solidFill>
-                  <a:srgbClr val="1B242B"/>
-                </a:solidFill>
-                <a:latin typeface="Arial"/>
-                <a:cs typeface="Arial"/>
-              </a:rPr>
-              <a:t> וה-</a:t>
+              <a:t>‎ וה-</a:t>
             </a:r>
             <a:r>
               <a:rPr lang="en-US" sz="1400" b="0" dirty="0">
@@ -9222,17 +9055,7 @@
                 <a:latin typeface="Arial"/>
                 <a:cs typeface="Arial"/>
               </a:rPr>
-              <a:t>‎</a:t>
-            </a:r>
-            <a:r>
-              <a:rPr lang="he-IL" sz="1300" b="0" dirty="0">
-                <a:solidFill>
-                  <a:srgbClr val="1B242B"/>
-                </a:solidFill>
-                <a:latin typeface="Arial"/>
-                <a:cs typeface="Arial"/>
-              </a:rPr>
-              <a:t> וקצב הלמידה, כך שהאימון ממשיך ולא מתחיל מחדש</a:t>
+              <a:t>‎ וקצב הלמידה, כך שהאימון ממשיך ולא מתחיל מחדש</a:t>
             </a:r>
           </a:p>
         </p:txBody>
@@ -9656,7 +9479,17 @@
                 <a:latin typeface="Arial"/>
                 <a:cs typeface="Arial"/>
               </a:rPr>
-              <a:t>‏</a:t>
+              <a:t>‏16 </a:t>
+            </a:r>
+            <a:r>
+              <a:rPr lang="en-US" sz="1400" b="0" dirty="0">
+                <a:solidFill>
+                  <a:srgbClr val="1B242B"/>
+                </a:solidFill>
+                <a:latin typeface="Arial"/>
+                <a:cs typeface="Arial"/>
+              </a:rPr>
+              <a:t>epochs</a:t>
             </a:r>
             <a:r>
               <a:rPr lang="he-IL" sz="1400" b="0" dirty="0">
@@ -9666,37 +9499,7 @@
                 <a:latin typeface="Arial"/>
                 <a:cs typeface="Arial"/>
               </a:rPr>
-              <a:t>16 </a:t>
-            </a:r>
-            <a:r>
-              <a:rPr lang="en-US" sz="1400" b="0" dirty="0">
-                <a:solidFill>
-                  <a:srgbClr val="1B242B"/>
-                </a:solidFill>
-                <a:latin typeface="Arial"/>
-                <a:cs typeface="Arial"/>
-              </a:rPr>
-              <a:t>epochs</a:t>
-            </a:r>
-            <a:r>
-              <a:rPr lang="he-IL" sz="1400" b="0" dirty="0">
-                <a:solidFill>
-                  <a:srgbClr val="1B242B"/>
-                </a:solidFill>
-                <a:latin typeface="Arial"/>
-                <a:cs typeface="Arial"/>
-              </a:rPr>
-              <a:t>‎</a:t>
-            </a:r>
-            <a:r>
-              <a:rPr lang="he-IL" sz="1400" b="0" dirty="0">
-                <a:solidFill>
-                  <a:srgbClr val="1B242B"/>
-                </a:solidFill>
-                <a:latin typeface="Arial"/>
-                <a:cs typeface="Arial"/>
-              </a:rPr>
-              <a:t>, כ-10.6 שעות</a:t>
+              <a:t>‎, כ-10.6 שעות</a:t>
             </a:r>
           </a:p>
           <a:p>
@@ -10055,17 +9858,7 @@
                 <a:latin typeface="Arial"/>
                 <a:cs typeface="Arial"/>
               </a:rPr>
-              <a:t>‎</a:t>
-            </a:r>
-            <a:r>
-              <a:rPr lang="he-IL" sz="1400" b="0" dirty="0">
-                <a:solidFill>
-                  <a:srgbClr val="1B242B"/>
-                </a:solidFill>
-                <a:latin typeface="Arial"/>
-                <a:cs typeface="Arial"/>
-              </a:rPr>
-              <a:t> על אותם נתונים</a:t>
+              <a:t>‎ על אותם נתונים</a:t>
             </a:r>
           </a:p>
         </p:txBody>
@@ -10657,7 +10450,17 @@
                 <a:latin typeface="Arial"/>
                 <a:cs typeface="Arial"/>
               </a:rPr>
-              <a:t>‎</a:t>
+              <a:t>‎ במקום </a:t>
+            </a:r>
+            <a:r>
+              <a:rPr lang="en-US" sz="1400" b="0" dirty="0">
+                <a:solidFill>
+                  <a:srgbClr val="1B242B"/>
+                </a:solidFill>
+                <a:latin typeface="Arial"/>
+                <a:cs typeface="Arial"/>
+              </a:rPr>
+              <a:t>MSE</a:t>
             </a:r>
             <a:r>
               <a:rPr lang="he-IL" sz="1400" b="0" dirty="0">
@@ -10667,37 +10470,7 @@
                 <a:latin typeface="Arial"/>
                 <a:cs typeface="Arial"/>
               </a:rPr>
-              <a:t> במקום </a:t>
-            </a:r>
-            <a:r>
-              <a:rPr lang="en-US" sz="1400" b="0" dirty="0">
-                <a:solidFill>
-                  <a:srgbClr val="1B242B"/>
-                </a:solidFill>
-                <a:latin typeface="Arial"/>
-                <a:cs typeface="Arial"/>
-              </a:rPr>
-              <a:t>MSE</a:t>
-            </a:r>
-            <a:r>
-              <a:rPr lang="he-IL" sz="1400" b="0" dirty="0">
-                <a:solidFill>
-                  <a:srgbClr val="1B242B"/>
-                </a:solidFill>
-                <a:latin typeface="Arial"/>
-                <a:cs typeface="Arial"/>
-              </a:rPr>
-              <a:t>‎</a:t>
-            </a:r>
-            <a:r>
-              <a:rPr lang="he-IL" sz="1400" b="0" dirty="0">
-                <a:solidFill>
-                  <a:srgbClr val="1B242B"/>
-                </a:solidFill>
-                <a:latin typeface="Arial"/>
-                <a:cs typeface="Arial"/>
-              </a:rPr>
-              <a:t> בשני איברי ההפסד</a:t>
+              <a:t>‎ בשני איברי ההפסד</a:t>
             </a:r>
           </a:p>
         </p:txBody>
@@ -11415,7 +11188,17 @@
                 <a:latin typeface="Arial"/>
                 <a:cs typeface="Arial"/>
               </a:rPr>
-              <a:t>‏</a:t>
+              <a:t>‏8 </a:t>
+            </a:r>
+            <a:r>
+              <a:rPr lang="en-US" sz="1300" b="0" dirty="0">
+                <a:solidFill>
+                  <a:srgbClr val="1B242B"/>
+                </a:solidFill>
+                <a:latin typeface="Arial"/>
+                <a:cs typeface="Arial"/>
+              </a:rPr>
+              <a:t>epochs (17</a:t>
             </a:r>
             <a:r>
               <a:rPr lang="he-IL" sz="1300" b="0" dirty="0">
@@ -11425,7 +11208,7 @@
                 <a:latin typeface="Arial"/>
                 <a:cs typeface="Arial"/>
               </a:rPr>
-              <a:t>8 </a:t>
+              <a:t>‎ עד 24), ובכל </a:t>
             </a:r>
             <a:r>
               <a:rPr lang="en-US" sz="1300" b="0" dirty="0">
@@ -11435,7 +11218,7 @@
                 <a:latin typeface="Arial"/>
                 <a:cs typeface="Arial"/>
               </a:rPr>
-              <a:t>epochs (17</a:t>
+              <a:t>epoch 10,225</a:t>
             </a:r>
             <a:r>
               <a:rPr lang="he-IL" sz="1300" b="0" dirty="0">
@@ -11445,47 +11228,7 @@
                 <a:latin typeface="Arial"/>
                 <a:cs typeface="Arial"/>
               </a:rPr>
-              <a:t>‎</a:t>
-            </a:r>
-            <a:r>
-              <a:rPr lang="he-IL" sz="1300" b="0" dirty="0">
-                <a:solidFill>
-                  <a:srgbClr val="1B242B"/>
-                </a:solidFill>
-                <a:latin typeface="Arial"/>
-                <a:cs typeface="Arial"/>
-              </a:rPr>
-              <a:t> עד 24), ובכל </a:t>
-            </a:r>
-            <a:r>
-              <a:rPr lang="en-US" sz="1300" b="0" dirty="0">
-                <a:solidFill>
-                  <a:srgbClr val="1B242B"/>
-                </a:solidFill>
-                <a:latin typeface="Arial"/>
-                <a:cs typeface="Arial"/>
-              </a:rPr>
-              <a:t>epoch 10,225</a:t>
-            </a:r>
-            <a:r>
-              <a:rPr lang="he-IL" sz="1300" b="0" dirty="0">
-                <a:solidFill>
-                  <a:srgbClr val="1B242B"/>
-                </a:solidFill>
-                <a:latin typeface="Arial"/>
-                <a:cs typeface="Arial"/>
-              </a:rPr>
-              <a:t>‎</a:t>
-            </a:r>
-            <a:r>
-              <a:rPr lang="he-IL" sz="1300" b="0" dirty="0">
-                <a:solidFill>
-                  <a:srgbClr val="1B242B"/>
-                </a:solidFill>
-                <a:latin typeface="Arial"/>
-                <a:cs typeface="Arial"/>
-              </a:rPr>
-              <a:t> הקלטות. עם הנתונים הנוספים מגרילים אותן מתוך 33,300</a:t>
+              <a:t>‎ הקלטות. עם הנתונים הנוספים מגרילים אותן מתוך 33,300</a:t>
             </a:r>
           </a:p>
         </p:txBody>
@@ -11995,7 +11738,17 @@
                 <a:latin typeface="Arial"/>
                 <a:cs typeface="Arial"/>
               </a:rPr>
-              <a:t>‎</a:t>
+              <a:t>‎ עוד עלה ב-</a:t>
+            </a:r>
+            <a:r>
+              <a:rPr lang="en-US" sz="1400" b="0" dirty="0">
+                <a:solidFill>
+                  <a:srgbClr val="1B242B"/>
+                </a:solidFill>
+                <a:latin typeface="Arial"/>
+                <a:cs typeface="Arial"/>
+              </a:rPr>
+              <a:t>epochs 14–15</a:t>
             </a:r>
             <a:r>
               <a:rPr lang="he-IL" sz="1400" b="0" dirty="0">
@@ -12005,37 +11758,7 @@
                 <a:latin typeface="Arial"/>
                 <a:cs typeface="Arial"/>
               </a:rPr>
-              <a:t> עוד עלה ב-</a:t>
-            </a:r>
-            <a:r>
-              <a:rPr lang="en-US" sz="1400" b="0" dirty="0">
-                <a:solidFill>
-                  <a:srgbClr val="1B242B"/>
-                </a:solidFill>
-                <a:latin typeface="Arial"/>
-                <a:cs typeface="Arial"/>
-              </a:rPr>
-              <a:t>epochs 14–15</a:t>
-            </a:r>
-            <a:r>
-              <a:rPr lang="he-IL" sz="1400" b="0" dirty="0">
-                <a:solidFill>
-                  <a:srgbClr val="1B242B"/>
-                </a:solidFill>
-                <a:latin typeface="Arial"/>
-                <a:cs typeface="Arial"/>
-              </a:rPr>
-              <a:t>‎</a:t>
-            </a:r>
-            <a:r>
-              <a:rPr lang="he-IL" sz="1400" b="0" dirty="0">
-                <a:solidFill>
-                  <a:srgbClr val="1B242B"/>
-                </a:solidFill>
-                <a:latin typeface="Arial"/>
-                <a:cs typeface="Arial"/>
-              </a:rPr>
-              <a:t>, אולי פשוט היה חסר זמן אימון</a:t>
+              <a:t>‎, אולי פשוט היה חסר זמן אימון</a:t>
             </a:r>
           </a:p>
         </p:txBody>
@@ -12223,17 +11946,7 @@
                 <a:latin typeface="Arial"/>
                 <a:cs typeface="Arial"/>
               </a:rPr>
-              <a:t>‎</a:t>
-            </a:r>
-            <a:r>
-              <a:rPr lang="he-IL" sz="1300" b="0" dirty="0">
-                <a:solidFill>
-                  <a:srgbClr val="1B242B"/>
-                </a:solidFill>
-                <a:latin typeface="Arial"/>
-                <a:cs typeface="Arial"/>
-              </a:rPr>
-              <a:t>, כמו ה-</a:t>
+              <a:t>‎, כמו ה-</a:t>
             </a:r>
             <a:r>
               <a:rPr lang="en-US" sz="1300" b="0" dirty="0">
@@ -12302,17 +12015,7 @@
                 <a:latin typeface="Arial"/>
                 <a:cs typeface="Arial"/>
               </a:rPr>
-              <a:t>‎</a:t>
-            </a:r>
-            <a:r>
-              <a:rPr lang="he-IL" sz="1300" b="0" dirty="0">
-                <a:solidFill>
-                  <a:srgbClr val="1B242B"/>
-                </a:solidFill>
-                <a:latin typeface="Arial"/>
-                <a:cs typeface="Arial"/>
-              </a:rPr>
-              <a:t> עד 24, כ-5.4 שעות על </a:t>
+              <a:t>‎ עד 24, כ-5.4 שעות על </a:t>
             </a:r>
             <a:r>
               <a:rPr lang="en-US" sz="1300" b="0" dirty="0">
@@ -12442,7 +12145,17 @@
                 <a:latin typeface="Arial"/>
                 <a:cs typeface="Arial"/>
               </a:rPr>
-              <a:t>‎</a:t>
+              <a:t>‎ על ה-</a:t>
+            </a:r>
+            <a:r>
+              <a:rPr lang="en-US" sz="1500" b="1" dirty="0">
+                <a:solidFill>
+                  <a:srgbClr val="1B242B"/>
+                </a:solidFill>
+                <a:latin typeface="Arial"/>
+                <a:cs typeface="Arial"/>
+              </a:rPr>
+              <a:t>validation</a:t>
             </a:r>
             <a:r>
               <a:rPr lang="he-IL" sz="1500" b="1" dirty="0">
@@ -12452,37 +12165,7 @@
                 <a:latin typeface="Arial"/>
                 <a:cs typeface="Arial"/>
               </a:rPr>
-              <a:t> על ה-</a:t>
-            </a:r>
-            <a:r>
-              <a:rPr lang="en-US" sz="1500" b="1" dirty="0">
-                <a:solidFill>
-                  <a:srgbClr val="1B242B"/>
-                </a:solidFill>
-                <a:latin typeface="Arial"/>
-                <a:cs typeface="Arial"/>
-              </a:rPr>
-              <a:t>validation</a:t>
-            </a:r>
-            <a:r>
-              <a:rPr lang="he-IL" sz="1500" b="1" dirty="0">
-                <a:solidFill>
-                  <a:srgbClr val="1B242B"/>
-                </a:solidFill>
-                <a:latin typeface="Arial"/>
-                <a:cs typeface="Arial"/>
-              </a:rPr>
-              <a:t>‎</a:t>
-            </a:r>
-            <a:r>
-              <a:rPr lang="he-IL" sz="1500" b="1" dirty="0">
-                <a:solidFill>
-                  <a:srgbClr val="1B242B"/>
-                </a:solidFill>
-                <a:latin typeface="Arial"/>
-                <a:cs typeface="Arial"/>
-              </a:rPr>
-              <a:t> לפי </a:t>
+              <a:t>‎ לפי </a:t>
             </a:r>
             <a:r>
               <a:rPr lang="en-US" sz="1500" b="1" dirty="0">
@@ -12753,17 +12436,7 @@
                 <a:latin typeface="Arial"/>
                 <a:cs typeface="Arial"/>
               </a:rPr>
-              <a:t>‎</a:t>
-            </a:r>
-            <a:r>
-              <a:rPr lang="he-IL" sz="1200" b="0" dirty="0">
-                <a:solidFill>
-                  <a:srgbClr val="5A636A"/>
-                </a:solidFill>
-                <a:latin typeface="Arial"/>
-                <a:cs typeface="Arial"/>
-              </a:rPr>
-              <a:t> שנבחר</a:t>
+              <a:t>‎ שנבחר</a:t>
             </a:r>
           </a:p>
         </p:txBody>
@@ -13196,7 +12869,17 @@
                 <a:latin typeface="Arial"/>
                 <a:cs typeface="Arial"/>
               </a:rPr>
-              <a:t>‎</a:t>
+              <a:t>‎ עלה ב-‎0.10 </a:t>
+            </a:r>
+            <a:r>
+              <a:rPr lang="en-US" sz="1200" b="0" dirty="0">
+                <a:solidFill>
+                  <a:srgbClr val="1B242B"/>
+                </a:solidFill>
+                <a:latin typeface="Arial"/>
+                <a:cs typeface="Arial"/>
+              </a:rPr>
+              <a:t>dB]</a:t>
             </a:r>
             <a:r>
               <a:rPr lang="he-IL" sz="1200" b="0" dirty="0">
@@ -13206,7 +12889,7 @@
                 <a:latin typeface="Arial"/>
                 <a:cs typeface="Arial"/>
               </a:rPr>
-              <a:t> עלה ב-‎0.10 [</a:t>
+              <a:t>‏</a:t>
             </a:r>
             <a:r>
               <a:rPr lang="en-US" sz="1200" b="0" dirty="0">
@@ -13216,17 +12899,7 @@
                 <a:latin typeface="Arial"/>
                 <a:cs typeface="Arial"/>
               </a:rPr>
-              <a:t>dB]</a:t>
-            </a:r>
-            <a:r>
-              <a:rPr lang="he-IL" sz="1200" b="0" dirty="0">
-                <a:solidFill>
-                  <a:srgbClr val="1B242B"/>
-                </a:solidFill>
-                <a:latin typeface="Arial"/>
-                <a:cs typeface="Arial"/>
-              </a:rPr>
-              <a:t>‏</a:t>
+              <a:t>[</a:t>
             </a:r>
             <a:r>
               <a:rPr lang="he-IL" sz="1200" b="0" dirty="0">
@@ -13363,7 +13036,17 @@
                 <a:latin typeface="Arial"/>
                 <a:cs typeface="Arial"/>
               </a:rPr>
-              <a:t>‎</a:t>
+              <a:t>‎ אבל פחות טוב בבדיקה: הבדל של 0.01 ב-</a:t>
+            </a:r>
+            <a:r>
+              <a:rPr lang="en-US" sz="1500" b="0" dirty="0">
+                <a:solidFill>
+                  <a:srgbClr val="1B242B"/>
+                </a:solidFill>
+                <a:latin typeface="Arial"/>
+                <a:cs typeface="Arial"/>
+              </a:rPr>
+              <a:t>PESQ</a:t>
             </a:r>
             <a:r>
               <a:rPr lang="he-IL" sz="1500" b="0" dirty="0">
@@ -13373,37 +13056,7 @@
                 <a:latin typeface="Arial"/>
                 <a:cs typeface="Arial"/>
               </a:rPr>
-              <a:t> אבל פחות טוב בבדיקה: הבדל של 0.01 ב-</a:t>
-            </a:r>
-            <a:r>
-              <a:rPr lang="en-US" sz="1500" b="0" dirty="0">
-                <a:solidFill>
-                  <a:srgbClr val="1B242B"/>
-                </a:solidFill>
-                <a:latin typeface="Arial"/>
-                <a:cs typeface="Arial"/>
-              </a:rPr>
-              <a:t>PESQ</a:t>
-            </a:r>
-            <a:r>
-              <a:rPr lang="he-IL" sz="1500" b="0" dirty="0">
-                <a:solidFill>
-                  <a:srgbClr val="1B242B"/>
-                </a:solidFill>
-                <a:latin typeface="Arial"/>
-                <a:cs typeface="Arial"/>
-              </a:rPr>
-              <a:t>‎</a:t>
-            </a:r>
-            <a:r>
-              <a:rPr lang="he-IL" sz="1500" b="0" dirty="0">
-                <a:solidFill>
-                  <a:srgbClr val="1B242B"/>
-                </a:solidFill>
-                <a:latin typeface="Arial"/>
-                <a:cs typeface="Arial"/>
-              </a:rPr>
-              <a:t> הוא רעש</a:t>
+              <a:t>‎ הוא רעש</a:t>
             </a:r>
           </a:p>
         </p:txBody>
@@ -14081,17 +13734,7 @@
                 <a:latin typeface="Arial"/>
                 <a:cs typeface="Arial"/>
               </a:rPr>
-              <a:t>‎</a:t>
-            </a:r>
-            <a:r>
-              <a:rPr lang="he-IL" sz="1300" b="1" dirty="0">
-                <a:solidFill>
-                  <a:srgbClr val="1B242B"/>
-                </a:solidFill>
-                <a:latin typeface="Arial"/>
-                <a:cs typeface="Arial"/>
-              </a:rPr>
-              <a:t>: </a:t>
+              <a:t>‎: </a:t>
             </a:r>
             <a:r>
               <a:rPr lang="he-IL" sz="1300" b="0" dirty="0">
@@ -14140,17 +13783,7 @@
                 <a:latin typeface="Arial"/>
                 <a:cs typeface="Arial"/>
               </a:rPr>
-              <a:t>‎</a:t>
-            </a:r>
-            <a:r>
-              <a:rPr lang="he-IL" sz="1300" b="0" dirty="0">
-                <a:solidFill>
-                  <a:srgbClr val="1B242B"/>
-                </a:solidFill>
-                <a:latin typeface="Arial"/>
-                <a:cs typeface="Arial"/>
-              </a:rPr>
-              <a:t>, כמו בגרסה 1</a:t>
+              <a:t>‎, כמו בגרסה 1</a:t>
             </a:r>
           </a:p>
           <a:p>
@@ -14199,17 +13832,7 @@
                 <a:latin typeface="Arial"/>
                 <a:cs typeface="Arial"/>
               </a:rPr>
-              <a:t>‎</a:t>
-            </a:r>
-            <a:r>
-              <a:rPr lang="he-IL" sz="1300" b="0" dirty="0">
-                <a:solidFill>
-                  <a:srgbClr val="1B242B"/>
-                </a:solidFill>
-                <a:latin typeface="Arial"/>
-                <a:cs typeface="Arial"/>
-              </a:rPr>
-              <a:t> עד 24, כ-5.3 שעות על </a:t>
+              <a:t>‎ עד 24, כ-5.3 שעות על </a:t>
             </a:r>
             <a:r>
               <a:rPr lang="en-US" sz="1300" b="0" dirty="0">
@@ -14290,7 +13913,17 @@
                 <a:latin typeface="Arial"/>
                 <a:cs typeface="Arial"/>
               </a:rPr>
-              <a:t>‎</a:t>
+              <a:t>‎ על ה-</a:t>
+            </a:r>
+            <a:r>
+              <a:rPr lang="en-US" sz="1500" b="1" dirty="0">
+                <a:solidFill>
+                  <a:srgbClr val="1B242B"/>
+                </a:solidFill>
+                <a:latin typeface="Arial"/>
+                <a:cs typeface="Arial"/>
+              </a:rPr>
+              <a:t>validation</a:t>
             </a:r>
             <a:r>
               <a:rPr lang="he-IL" sz="1500" b="1" dirty="0">
@@ -14300,37 +13933,7 @@
                 <a:latin typeface="Arial"/>
                 <a:cs typeface="Arial"/>
               </a:rPr>
-              <a:t> על ה-</a:t>
-            </a:r>
-            <a:r>
-              <a:rPr lang="en-US" sz="1500" b="1" dirty="0">
-                <a:solidFill>
-                  <a:srgbClr val="1B242B"/>
-                </a:solidFill>
-                <a:latin typeface="Arial"/>
-                <a:cs typeface="Arial"/>
-              </a:rPr>
-              <a:t>validation</a:t>
-            </a:r>
-            <a:r>
-              <a:rPr lang="he-IL" sz="1500" b="1" dirty="0">
-                <a:solidFill>
-                  <a:srgbClr val="1B242B"/>
-                </a:solidFill>
-                <a:latin typeface="Arial"/>
-                <a:cs typeface="Arial"/>
-              </a:rPr>
-              <a:t>‎</a:t>
-            </a:r>
-            <a:r>
-              <a:rPr lang="he-IL" sz="1500" b="1" dirty="0">
-                <a:solidFill>
-                  <a:srgbClr val="1B242B"/>
-                </a:solidFill>
-                <a:latin typeface="Arial"/>
-                <a:cs typeface="Arial"/>
-              </a:rPr>
-              <a:t>: נתונים נוספים מול המשך אימון</a:t>
+              <a:t>‎: נתונים נוספים מול המשך אימון</a:t>
             </a:r>
           </a:p>
         </p:txBody>
@@ -14581,17 +14184,7 @@
                 <a:latin typeface="Arial"/>
                 <a:cs typeface="Arial"/>
               </a:rPr>
-              <a:t>‎</a:t>
-            </a:r>
-            <a:r>
-              <a:rPr lang="he-IL" sz="1200" b="0" dirty="0">
-                <a:solidFill>
-                  <a:srgbClr val="5A636A"/>
-                </a:solidFill>
-                <a:latin typeface="Arial"/>
-                <a:cs typeface="Arial"/>
-              </a:rPr>
-              <a:t> שנבחר</a:t>
+              <a:t>‎ שנבחר</a:t>
             </a:r>
           </a:p>
         </p:txBody>
@@ -15024,7 +14617,17 @@
                 <a:latin typeface="Arial"/>
                 <a:cs typeface="Arial"/>
               </a:rPr>
-              <a:t>‎</a:t>
+              <a:t>‎ עלה ב-‎0.03 [</a:t>
+            </a:r>
+            <a:r>
+              <a:rPr lang="en-US" sz="1200" b="0" dirty="0">
+                <a:solidFill>
+                  <a:srgbClr val="1B242B"/>
+                </a:solidFill>
+                <a:latin typeface="Arial"/>
+                <a:cs typeface="Arial"/>
+              </a:rPr>
+              <a:t>dB]</a:t>
             </a:r>
             <a:r>
               <a:rPr lang="he-IL" sz="1200" b="0" dirty="0">
@@ -15034,37 +14637,7 @@
                 <a:latin typeface="Arial"/>
                 <a:cs typeface="Arial"/>
               </a:rPr>
-              <a:t> עלה ב-‎0.03 [</a:t>
-            </a:r>
-            <a:r>
-              <a:rPr lang="en-US" sz="1200" b="0" dirty="0">
-                <a:solidFill>
-                  <a:srgbClr val="1B242B"/>
-                </a:solidFill>
-                <a:latin typeface="Arial"/>
-                <a:cs typeface="Arial"/>
-              </a:rPr>
-              <a:t>dB]</a:t>
-            </a:r>
-            <a:r>
-              <a:rPr lang="he-IL" sz="1200" b="0" dirty="0">
-                <a:solidFill>
-                  <a:srgbClr val="1B242B"/>
-                </a:solidFill>
-                <a:latin typeface="Arial"/>
-                <a:cs typeface="Arial"/>
-              </a:rPr>
-              <a:t>‏</a:t>
-            </a:r>
-            <a:r>
-              <a:rPr lang="he-IL" sz="1200" b="0" dirty="0">
-                <a:solidFill>
-                  <a:srgbClr val="1B242B"/>
-                </a:solidFill>
-                <a:latin typeface="Arial"/>
-                <a:cs typeface="Arial"/>
-              </a:rPr>
-              <a:t> בלבד</a:t>
+              <a:t>‏ בלבד</a:t>
             </a:r>
           </a:p>
         </p:txBody>
@@ -15191,17 +14764,7 @@
                 <a:latin typeface="Arial"/>
                 <a:cs typeface="Arial"/>
               </a:rPr>
-              <a:t>‎</a:t>
-            </a:r>
-            <a:r>
-              <a:rPr lang="he-IL" sz="1500" b="0" dirty="0">
-                <a:solidFill>
-                  <a:srgbClr val="1B242B"/>
-                </a:solidFill>
-                <a:latin typeface="Arial"/>
-                <a:cs typeface="Arial"/>
-              </a:rPr>
-              <a:t> ולא את </a:t>
+              <a:t>‎ ולא את </a:t>
             </a:r>
             <a:r>
               <a:rPr lang="en-US" sz="1500" b="0" dirty="0">
@@ -15919,17 +15482,7 @@
                 <a:latin typeface="Arial"/>
                 <a:cs typeface="Arial"/>
               </a:rPr>
-              <a:t>‎</a:t>
-            </a:r>
-            <a:r>
-              <a:rPr lang="he-IL" sz="1300" b="0" dirty="0">
-                <a:solidFill>
-                  <a:srgbClr val="1B242B"/>
-                </a:solidFill>
-                <a:latin typeface="Arial"/>
-                <a:cs typeface="Arial"/>
-              </a:rPr>
-              <a:t>, ערך מוחלט במקום ריבוע, בשני האיברים</a:t>
+              <a:t>‎, ערך מוחלט במקום ריבוע, בשני האיברים</a:t>
             </a:r>
           </a:p>
           <a:p>
@@ -15978,17 +15531,7 @@
                 <a:latin typeface="Arial"/>
                 <a:cs typeface="Arial"/>
               </a:rPr>
-              <a:t>‎</a:t>
-            </a:r>
-            <a:r>
-              <a:rPr lang="he-IL" sz="1300" b="0" dirty="0">
-                <a:solidFill>
-                  <a:srgbClr val="1B242B"/>
-                </a:solidFill>
-                <a:latin typeface="Arial"/>
-                <a:cs typeface="Arial"/>
-              </a:rPr>
-              <a:t> עד 24, כ-5.8 שעות על </a:t>
+              <a:t>‎ עד 24, כ-5.8 שעות על </a:t>
             </a:r>
             <a:r>
               <a:rPr lang="en-US" sz="1300" b="0" dirty="0">
@@ -16069,7 +15612,17 @@
                 <a:latin typeface="Arial"/>
                 <a:cs typeface="Arial"/>
               </a:rPr>
-              <a:t>‎</a:t>
+              <a:t>‎ על ה-</a:t>
+            </a:r>
+            <a:r>
+              <a:rPr lang="en-US" sz="1500" b="1" dirty="0">
+                <a:solidFill>
+                  <a:srgbClr val="1B242B"/>
+                </a:solidFill>
+                <a:latin typeface="Arial"/>
+                <a:cs typeface="Arial"/>
+              </a:rPr>
+              <a:t>validation: L1</a:t>
             </a:r>
             <a:r>
               <a:rPr lang="he-IL" sz="1500" b="1" dirty="0">
@@ -16079,7 +15632,7 @@
                 <a:latin typeface="Arial"/>
                 <a:cs typeface="Arial"/>
               </a:rPr>
-              <a:t> על ה-</a:t>
+              <a:t>‎ מול </a:t>
             </a:r>
             <a:r>
               <a:rPr lang="en-US" sz="1500" b="1" dirty="0">
@@ -16089,7 +15642,7 @@
                 <a:latin typeface="Arial"/>
                 <a:cs typeface="Arial"/>
               </a:rPr>
-              <a:t>validation: L1</a:t>
+              <a:t>MSE</a:t>
             </a:r>
             <a:r>
               <a:rPr lang="he-IL" sz="1500" b="1" dirty="0">
@@ -16099,47 +15652,7 @@
                 <a:latin typeface="Arial"/>
                 <a:cs typeface="Arial"/>
               </a:rPr>
-              <a:t>‎</a:t>
-            </a:r>
-            <a:r>
-              <a:rPr lang="he-IL" sz="1500" b="1" dirty="0">
-                <a:solidFill>
-                  <a:srgbClr val="1B242B"/>
-                </a:solidFill>
-                <a:latin typeface="Arial"/>
-                <a:cs typeface="Arial"/>
-              </a:rPr>
-              <a:t> מול </a:t>
-            </a:r>
-            <a:r>
-              <a:rPr lang="en-US" sz="1500" b="1" dirty="0">
-                <a:solidFill>
-                  <a:srgbClr val="1B242B"/>
-                </a:solidFill>
-                <a:latin typeface="Arial"/>
-                <a:cs typeface="Arial"/>
-              </a:rPr>
-              <a:t>MSE</a:t>
-            </a:r>
-            <a:r>
-              <a:rPr lang="he-IL" sz="1500" b="1" dirty="0">
-                <a:solidFill>
-                  <a:srgbClr val="1B242B"/>
-                </a:solidFill>
-                <a:latin typeface="Arial"/>
-                <a:cs typeface="Arial"/>
-              </a:rPr>
-              <a:t>‎</a:t>
-            </a:r>
-            <a:r>
-              <a:rPr lang="he-IL" sz="1500" b="1" dirty="0">
-                <a:solidFill>
-                  <a:srgbClr val="1B242B"/>
-                </a:solidFill>
-                <a:latin typeface="Arial"/>
-                <a:cs typeface="Arial"/>
-              </a:rPr>
-              <a:t> על אותם נתונים</a:t>
+              <a:t>‎ על אותם נתונים</a:t>
             </a:r>
           </a:p>
         </p:txBody>
@@ -16218,17 +15731,7 @@
                 <a:latin typeface="Arial"/>
                 <a:cs typeface="Arial"/>
               </a:rPr>
-              <a:t>‎</a:t>
-            </a:r>
-            <a:r>
-              <a:rPr lang="he-IL" sz="1300" b="0" dirty="0">
-                <a:solidFill>
-                  <a:srgbClr val="1B242B"/>
-                </a:solidFill>
-                <a:latin typeface="Arial"/>
-                <a:cs typeface="Arial"/>
-              </a:rPr>
-              <a:t>, גרסה 2</a:t>
+              <a:t>‎, גרסה 2</a:t>
             </a:r>
           </a:p>
         </p:txBody>
@@ -16334,17 +15837,7 @@
                 <a:latin typeface="Arial"/>
                 <a:cs typeface="Arial"/>
               </a:rPr>
-              <a:t>‎</a:t>
-            </a:r>
-            <a:r>
-              <a:rPr lang="he-IL" sz="1300" b="0" dirty="0">
-                <a:solidFill>
-                  <a:srgbClr val="1B242B"/>
-                </a:solidFill>
-                <a:latin typeface="Arial"/>
-                <a:cs typeface="Arial"/>
-              </a:rPr>
-              <a:t>, גרסה 3</a:t>
+              <a:t>‎, גרסה 3</a:t>
             </a:r>
           </a:p>
         </p:txBody>
@@ -16450,17 +15943,7 @@
                 <a:latin typeface="Arial"/>
                 <a:cs typeface="Arial"/>
               </a:rPr>
-              <a:t>‎</a:t>
-            </a:r>
-            <a:r>
-              <a:rPr lang="he-IL" sz="1200" b="0" dirty="0">
-                <a:solidFill>
-                  <a:srgbClr val="5A636A"/>
-                </a:solidFill>
-                <a:latin typeface="Arial"/>
-                <a:cs typeface="Arial"/>
-              </a:rPr>
-              <a:t> שנבחר</a:t>
+              <a:t>‎ שנבחר</a:t>
             </a:r>
           </a:p>
         </p:txBody>
@@ -16893,7 +16376,17 @@
                 <a:latin typeface="Arial"/>
                 <a:cs typeface="Arial"/>
               </a:rPr>
-              <a:t>‎</a:t>
+              <a:t>‎ עלה ב-‎0.23 [</a:t>
+            </a:r>
+            <a:r>
+              <a:rPr lang="en-US" sz="1200" b="0" dirty="0">
+                <a:solidFill>
+                  <a:srgbClr val="1B242B"/>
+                </a:solidFill>
+                <a:latin typeface="Arial"/>
+                <a:cs typeface="Arial"/>
+              </a:rPr>
+              <a:t>dB]</a:t>
             </a:r>
             <a:r>
               <a:rPr lang="he-IL" sz="1200" b="0" dirty="0">
@@ -16903,37 +16396,7 @@
                 <a:latin typeface="Arial"/>
                 <a:cs typeface="Arial"/>
               </a:rPr>
-              <a:t> עלה ב-‎0.23 [</a:t>
-            </a:r>
-            <a:r>
-              <a:rPr lang="en-US" sz="1200" b="0" dirty="0">
-                <a:solidFill>
-                  <a:srgbClr val="1B242B"/>
-                </a:solidFill>
-                <a:latin typeface="Arial"/>
-                <a:cs typeface="Arial"/>
-              </a:rPr>
-              <a:t>dB]</a:t>
-            </a:r>
-            <a:r>
-              <a:rPr lang="he-IL" sz="1200" b="0" dirty="0">
-                <a:solidFill>
-                  <a:srgbClr val="1B242B"/>
-                </a:solidFill>
-                <a:latin typeface="Arial"/>
-                <a:cs typeface="Arial"/>
-              </a:rPr>
-              <a:t>‏</a:t>
-            </a:r>
-            <a:r>
-              <a:rPr lang="he-IL" sz="1200" b="0" dirty="0">
-                <a:solidFill>
-                  <a:srgbClr val="1B242B"/>
-                </a:solidFill>
-                <a:latin typeface="Arial"/>
-                <a:cs typeface="Arial"/>
-              </a:rPr>
-              <a:t>, ב-82% מהקבצים</a:t>
+              <a:t>‏, ב-82% מהקבצים</a:t>
             </a:r>
           </a:p>
         </p:txBody>
@@ -17050,7 +16513,17 @@
                 <a:latin typeface="Arial"/>
                 <a:cs typeface="Arial"/>
               </a:rPr>
-              <a:t>‎</a:t>
+              <a:t>‎ מביא את השיפור ב-</a:t>
+            </a:r>
+            <a:r>
+              <a:rPr lang="en-US" sz="1500" b="0" dirty="0">
+                <a:solidFill>
+                  <a:srgbClr val="1B242B"/>
+                </a:solidFill>
+                <a:latin typeface="Arial"/>
+                <a:cs typeface="Arial"/>
+              </a:rPr>
+              <a:t>SI-SDR</a:t>
             </a:r>
             <a:r>
               <a:rPr lang="he-IL" sz="1500" b="0" dirty="0">
@@ -17060,7 +16533,7 @@
                 <a:latin typeface="Arial"/>
                 <a:cs typeface="Arial"/>
               </a:rPr>
-              <a:t> מביא את השיפור ב-</a:t>
+              <a:t>‎, וה-</a:t>
             </a:r>
             <a:r>
               <a:rPr lang="en-US" sz="1500" b="0" dirty="0">
@@ -17070,7 +16543,7 @@
                 <a:latin typeface="Arial"/>
                 <a:cs typeface="Arial"/>
               </a:rPr>
-              <a:t>SI-SDR</a:t>
+              <a:t>PESQ</a:t>
             </a:r>
             <a:r>
               <a:rPr lang="he-IL" sz="1500" b="0" dirty="0">
@@ -17080,47 +16553,7 @@
                 <a:latin typeface="Arial"/>
                 <a:cs typeface="Arial"/>
               </a:rPr>
-              <a:t>‎</a:t>
-            </a:r>
-            <a:r>
-              <a:rPr lang="he-IL" sz="1500" b="0" dirty="0">
-                <a:solidFill>
-                  <a:srgbClr val="1B242B"/>
-                </a:solidFill>
-                <a:latin typeface="Arial"/>
-                <a:cs typeface="Arial"/>
-              </a:rPr>
-              <a:t>, וה-</a:t>
-            </a:r>
-            <a:r>
-              <a:rPr lang="en-US" sz="1500" b="0" dirty="0">
-                <a:solidFill>
-                  <a:srgbClr val="1B242B"/>
-                </a:solidFill>
-                <a:latin typeface="Arial"/>
-                <a:cs typeface="Arial"/>
-              </a:rPr>
-              <a:t>PESQ</a:t>
-            </a:r>
-            <a:r>
-              <a:rPr lang="he-IL" sz="1500" b="0" dirty="0">
-                <a:solidFill>
-                  <a:srgbClr val="1B242B"/>
-                </a:solidFill>
-                <a:latin typeface="Arial"/>
-                <a:cs typeface="Arial"/>
-              </a:rPr>
-              <a:t>‎</a:t>
-            </a:r>
-            <a:r>
-              <a:rPr lang="he-IL" sz="1500" b="0" dirty="0">
-                <a:solidFill>
-                  <a:srgbClr val="1B242B"/>
-                </a:solidFill>
-                <a:latin typeface="Arial"/>
-                <a:cs typeface="Arial"/>
-              </a:rPr>
-              <a:t> כמעט לא זז</a:t>
+              <a:t>‎ כמעט לא זז</a:t>
             </a:r>
           </a:p>
         </p:txBody>
@@ -17251,17 +16684,7 @@
                 <a:latin typeface="Arial"/>
                 <a:cs typeface="Arial"/>
               </a:rPr>
-              <a:t>‎</a:t>
-            </a:r>
-            <a:r>
-              <a:rPr lang="he-IL" sz="3200" b="1" dirty="0">
-                <a:solidFill>
-                  <a:srgbClr val="1F4E79"/>
-                </a:solidFill>
-                <a:latin typeface="Arial"/>
-                <a:cs typeface="Arial"/>
-              </a:rPr>
-              <a:t> מול </a:t>
+              <a:t>‎ מול </a:t>
             </a:r>
             <a:r>
               <a:rPr lang="en-US" sz="3200" b="1" dirty="0">
@@ -17503,7 +16926,9 @@
         <p:txBody>
           <a:bodyPr rtlCol="0" anchor="ctr"/>
           <a:lstStyle/>
-          <a:p/>
+          <a:p>
+            <a:endParaRPr/>
+          </a:p>
         </p:txBody>
       </p:sp>
       <p:pic>
@@ -17515,7 +16940,7 @@
           <p:nvPr/>
         </p:nvPicPr>
         <p:blipFill>
-          <a:blip r:embed="rId4"/>
+          <a:blip r:embed="rId3"/>
           <a:stretch>
             <a:fillRect/>
           </a:stretch>
@@ -17573,7 +16998,9 @@
         <p:txBody>
           <a:bodyPr rtlCol="0" anchor="ctr"/>
           <a:lstStyle/>
-          <a:p/>
+          <a:p>
+            <a:endParaRPr/>
+          </a:p>
         </p:txBody>
       </p:sp>
       <p:sp>
@@ -17593,7 +17020,7 @@
           <a:noFill/>
         </p:spPr>
         <p:txBody>
-          <a:bodyPr wrap="square" lIns="45720" rIns="45720" tIns="27432" bIns="27432" anchor="ctr" rtlCol="0">
+          <a:bodyPr wrap="square" lIns="45720" tIns="27432" rIns="45720" bIns="27432" rtlCol="0" anchor="ctr">
             <a:spAutoFit/>
           </a:bodyPr>
           <a:lstStyle/>
@@ -17604,7 +17031,7 @@
               </a:spcAft>
             </a:pPr>
             <a:r>
-              <a:rPr sz="1700" b="1" lang="he-IL">
+              <a:rPr lang="he-IL" sz="1700" b="1">
                 <a:solidFill>
                   <a:srgbClr val="1F4E79"/>
                 </a:solidFill>
@@ -17621,7 +17048,7 @@
               </a:spcAft>
             </a:pPr>
             <a:r>
-              <a:rPr sz="1400" b="0" lang="he-IL">
+              <a:rPr lang="he-IL" sz="1400" b="0">
                 <a:solidFill>
                   <a:srgbClr val="1B242B"/>
                 </a:solidFill>
@@ -17676,7 +17103,9 @@
         <p:txBody>
           <a:bodyPr rtlCol="0" anchor="ctr"/>
           <a:lstStyle/>
-          <a:p/>
+          <a:p>
+            <a:endParaRPr/>
+          </a:p>
         </p:txBody>
       </p:sp>
       <p:sp>
@@ -17696,7 +17125,7 @@
           <a:noFill/>
         </p:spPr>
         <p:txBody>
-          <a:bodyPr wrap="square" lIns="45720" rIns="45720" tIns="27432" bIns="27432" anchor="ctr" rtlCol="0">
+          <a:bodyPr wrap="square" lIns="45720" tIns="27432" rIns="45720" bIns="27432" rtlCol="0" anchor="ctr">
             <a:spAutoFit/>
           </a:bodyPr>
           <a:lstStyle/>
@@ -17707,7 +17136,7 @@
               </a:spcAft>
             </a:pPr>
             <a:r>
-              <a:rPr sz="1800" b="1" lang="he-IL">
+              <a:rPr lang="he-IL" sz="1800" b="1">
                 <a:solidFill>
                   <a:srgbClr val="C55A11"/>
                 </a:solidFill>
@@ -17717,7 +17146,7 @@
               <a:t>‏</a:t>
             </a:r>
             <a:r>
-              <a:rPr sz="1800" b="1" lang="en-US">
+              <a:rPr lang="en-US" sz="1800" b="1">
                 <a:solidFill>
                   <a:srgbClr val="C55A11"/>
                 </a:solidFill>
@@ -17727,24 +17156,14 @@
               <a:t>L1</a:t>
             </a:r>
             <a:r>
-              <a:rPr sz="1800" b="1" lang="he-IL">
+              <a:rPr lang="he-IL" sz="1800" b="1">
                 <a:solidFill>
                   <a:srgbClr val="C55A11"/>
                 </a:solidFill>
                 <a:latin typeface="Arial"/>
                 <a:cs typeface="Arial"/>
               </a:rPr>
-              <a:t>‎</a:t>
-            </a:r>
-            <a:r>
-              <a:rPr sz="1800" b="1" lang="he-IL">
-                <a:solidFill>
-                  <a:srgbClr val="C55A11"/>
-                </a:solidFill>
-                <a:latin typeface="Arial"/>
-                <a:cs typeface="Arial"/>
-              </a:rPr>
-              <a:t>: החלטי</a:t>
+              <a:t>‎: החלטי</a:t>
             </a:r>
           </a:p>
           <a:p>
@@ -17754,7 +17173,7 @@
               </a:spcAft>
             </a:pPr>
             <a:r>
-              <a:rPr sz="1500" b="0" lang="he-IL">
+              <a:rPr lang="he-IL" sz="1500" b="0">
                 <a:solidFill>
                   <a:srgbClr val="1B242B"/>
                 </a:solidFill>
@@ -17809,7 +17228,9 @@
         <p:txBody>
           <a:bodyPr rtlCol="0" anchor="ctr"/>
           <a:lstStyle/>
-          <a:p/>
+          <a:p>
+            <a:endParaRPr/>
+          </a:p>
         </p:txBody>
       </p:sp>
       <p:sp>
@@ -17829,7 +17250,7 @@
           <a:noFill/>
         </p:spPr>
         <p:txBody>
-          <a:bodyPr wrap="square" lIns="45720" rIns="45720" tIns="27432" bIns="27432" anchor="ctr" rtlCol="0">
+          <a:bodyPr wrap="square" lIns="45720" tIns="27432" rIns="45720" bIns="27432" rtlCol="0" anchor="ctr">
             <a:spAutoFit/>
           </a:bodyPr>
           <a:lstStyle/>
@@ -17840,7 +17261,7 @@
               </a:spcAft>
             </a:pPr>
             <a:r>
-              <a:rPr sz="1800" b="1" lang="he-IL">
+              <a:rPr lang="he-IL" sz="1800" b="1">
                 <a:solidFill>
                   <a:srgbClr val="595959"/>
                 </a:solidFill>
@@ -17850,7 +17271,7 @@
               <a:t>‏</a:t>
             </a:r>
             <a:r>
-              <a:rPr sz="1800" b="1" lang="en-US">
+              <a:rPr lang="en-US" sz="1800" b="1">
                 <a:solidFill>
                   <a:srgbClr val="595959"/>
                 </a:solidFill>
@@ -17860,24 +17281,14 @@
               <a:t>MSE</a:t>
             </a:r>
             <a:r>
-              <a:rPr sz="1800" b="1" lang="he-IL">
+              <a:rPr lang="he-IL" sz="1800" b="1">
                 <a:solidFill>
                   <a:srgbClr val="595959"/>
                 </a:solidFill>
                 <a:latin typeface="Arial"/>
                 <a:cs typeface="Arial"/>
               </a:rPr>
-              <a:t>‎</a:t>
-            </a:r>
-            <a:r>
-              <a:rPr sz="1800" b="1" lang="he-IL">
-                <a:solidFill>
-                  <a:srgbClr val="595959"/>
-                </a:solidFill>
-                <a:latin typeface="Arial"/>
-                <a:cs typeface="Arial"/>
-              </a:rPr>
-              <a:t>: זהיר</a:t>
+              <a:t>‎: זהיר</a:t>
             </a:r>
           </a:p>
           <a:p>
@@ -17887,7 +17298,7 @@
               </a:spcAft>
             </a:pPr>
             <a:r>
-              <a:rPr sz="1500" b="0" lang="he-IL">
+              <a:rPr lang="he-IL" sz="1500" b="0">
                 <a:solidFill>
                   <a:srgbClr val="1B242B"/>
                 </a:solidFill>
@@ -17942,7 +17353,9 @@
         <p:txBody>
           <a:bodyPr rtlCol="0" anchor="ctr"/>
           <a:lstStyle/>
-          <a:p/>
+          <a:p>
+            <a:endParaRPr/>
+          </a:p>
         </p:txBody>
       </p:sp>
       <p:sp>
@@ -17962,7 +17375,7 @@
           <a:noFill/>
         </p:spPr>
         <p:txBody>
-          <a:bodyPr wrap="square" lIns="45720" rIns="45720" tIns="27432" bIns="27432" anchor="ctr" rtlCol="0">
+          <a:bodyPr wrap="square" lIns="45720" tIns="27432" rIns="45720" bIns="27432" rtlCol="0" anchor="ctr">
             <a:spAutoFit/>
           </a:bodyPr>
           <a:lstStyle/>
@@ -17973,7 +17386,7 @@
               </a:spcAft>
             </a:pPr>
             <a:r>
-              <a:rPr sz="1500" b="1" lang="he-IL">
+              <a:rPr lang="he-IL" sz="1500" b="1">
                 <a:solidFill>
                   <a:srgbClr val="1F4E79"/>
                 </a:solidFill>
@@ -17983,7 +17396,7 @@
               <a:t>המסקנה: </a:t>
             </a:r>
             <a:r>
-              <a:rPr sz="1500" b="0" lang="he-IL">
+              <a:rPr lang="he-IL" sz="1500" b="0">
                 <a:solidFill>
                   <a:srgbClr val="1B242B"/>
                 </a:solidFill>
@@ -17993,7 +17406,7 @@
               <a:t>עם </a:t>
             </a:r>
             <a:r>
-              <a:rPr sz="1500" b="0" lang="en-US">
+              <a:rPr lang="en-US" sz="1500" b="0">
                 <a:solidFill>
                   <a:srgbClr val="1B242B"/>
                 </a:solidFill>
@@ -18003,24 +17416,14 @@
               <a:t>L1</a:t>
             </a:r>
             <a:r>
-              <a:rPr sz="1500" b="0" lang="he-IL">
-                <a:solidFill>
-                  <a:srgbClr val="1B242B"/>
-                </a:solidFill>
-                <a:latin typeface="Arial"/>
-                <a:cs typeface="Arial"/>
-              </a:rPr>
-              <a:t>‎</a:t>
-            </a:r>
-            <a:r>
-              <a:rPr sz="1500" b="0" lang="he-IL">
-                <a:solidFill>
-                  <a:srgbClr val="1B242B"/>
-                </a:solidFill>
-                <a:latin typeface="Arial"/>
-                <a:cs typeface="Arial"/>
-              </a:rPr>
-              <a:t> המסכה מכריעה, מוחקת רעש או משאירה דיבור, ולכן האות יוצא קרוב יותר לנקי</a:t>
+              <a:rPr lang="he-IL" sz="1500" b="0">
+                <a:solidFill>
+                  <a:srgbClr val="1B242B"/>
+                </a:solidFill>
+                <a:latin typeface="Arial"/>
+                <a:cs typeface="Arial"/>
+              </a:rPr>
+              <a:t>‎ המסכה מכריעה, מוחקת רעש או משאירה דיבור, ולכן האות יוצא קרוב יותר לנקי</a:t>
             </a:r>
           </a:p>
         </p:txBody>
@@ -18353,7 +17756,9 @@
         <p:txBody>
           <a:bodyPr rtlCol="0" anchor="ctr"/>
           <a:lstStyle/>
-          <a:p/>
+          <a:p>
+            <a:endParaRPr/>
+          </a:p>
         </p:txBody>
       </p:sp>
       <p:pic>
@@ -18365,7 +17770,7 @@
           <p:nvPr/>
         </p:nvPicPr>
         <p:blipFill>
-          <a:blip r:embed="rId5"/>
+          <a:blip r:embed="rId3"/>
           <a:stretch>
             <a:fillRect/>
           </a:stretch>
@@ -18397,7 +17802,7 @@
           <a:noFill/>
         </p:spPr>
         <p:txBody>
-          <a:bodyPr wrap="square" lIns="45720" rIns="45720" tIns="27432" bIns="27432" anchor="ctr" rtlCol="0">
+          <a:bodyPr wrap="square" lIns="45720" tIns="27432" rIns="45720" bIns="27432" rtlCol="0" anchor="ctr">
             <a:spAutoFit/>
           </a:bodyPr>
           <a:lstStyle/>
@@ -18408,7 +17813,7 @@
               </a:spcAft>
             </a:pPr>
             <a:r>
-              <a:rPr sz="1300" b="1" lang="he-IL">
+              <a:rPr lang="he-IL" sz="1300" b="1">
                 <a:solidFill>
                   <a:srgbClr val="1F4E79"/>
                 </a:solidFill>
@@ -18418,7 +17823,7 @@
               <a:t>איכות: </a:t>
             </a:r>
             <a:r>
-              <a:rPr sz="1300" b="0" lang="en-US">
+              <a:rPr lang="en-US" sz="1300" b="0">
                 <a:solidFill>
                   <a:srgbClr val="1B242B"/>
                 </a:solidFill>
@@ -18428,27 +17833,17 @@
               <a:t>PESQ 3.15</a:t>
             </a:r>
             <a:r>
-              <a:rPr sz="1300" b="0" lang="he-IL">
-                <a:solidFill>
-                  <a:srgbClr val="1B242B"/>
-                </a:solidFill>
-                <a:latin typeface="Arial"/>
-                <a:cs typeface="Arial"/>
-              </a:rPr>
-              <a:t>‎</a:t>
-            </a:r>
-            <a:r>
-              <a:rPr sz="1300" b="0" lang="he-IL">
-                <a:solidFill>
-                  <a:srgbClr val="1B242B"/>
-                </a:solidFill>
-                <a:latin typeface="Arial"/>
-                <a:cs typeface="Arial"/>
-              </a:rPr>
-              <a:t>, מעל </a:t>
-            </a:r>
-            <a:r>
-              <a:rPr sz="1300" b="0" lang="en-US">
+              <a:rPr lang="he-IL" sz="1300" b="0">
+                <a:solidFill>
+                  <a:srgbClr val="1B242B"/>
+                </a:solidFill>
+                <a:latin typeface="Arial"/>
+                <a:cs typeface="Arial"/>
+              </a:rPr>
+              <a:t>‎, מעל </a:t>
+            </a:r>
+            <a:r>
+              <a:rPr lang="en-US" sz="1300" b="0">
                 <a:solidFill>
                   <a:srgbClr val="1B242B"/>
                 </a:solidFill>
@@ -18458,24 +17853,14 @@
               <a:t>TSTNN (2.96)</a:t>
             </a:r>
             <a:r>
-              <a:rPr sz="1300" b="0" lang="he-IL">
-                <a:solidFill>
-                  <a:srgbClr val="1B242B"/>
-                </a:solidFill>
-                <a:latin typeface="Arial"/>
-                <a:cs typeface="Arial"/>
-              </a:rPr>
-              <a:t>‎</a:t>
-            </a:r>
-            <a:r>
-              <a:rPr sz="1300" b="0" lang="he-IL">
-                <a:solidFill>
-                  <a:srgbClr val="1B242B"/>
-                </a:solidFill>
-                <a:latin typeface="Arial"/>
-                <a:cs typeface="Arial"/>
-              </a:rPr>
-              <a:t> והרבה מעל המסננים הקלאסיים</a:t>
+              <a:rPr lang="he-IL" sz="1300" b="0">
+                <a:solidFill>
+                  <a:srgbClr val="1B242B"/>
+                </a:solidFill>
+                <a:latin typeface="Arial"/>
+                <a:cs typeface="Arial"/>
+              </a:rPr>
+              <a:t>‎ והרבה מעל המסננים הקלאסיים</a:t>
             </a:r>
           </a:p>
         </p:txBody>
@@ -18523,7 +17908,9 @@
         <p:txBody>
           <a:bodyPr rtlCol="0" anchor="ctr"/>
           <a:lstStyle/>
-          <a:p/>
+          <a:p>
+            <a:endParaRPr/>
+          </a:p>
         </p:txBody>
       </p:sp>
       <p:pic>
@@ -18535,7 +17922,7 @@
           <p:nvPr/>
         </p:nvPicPr>
         <p:blipFill>
-          <a:blip r:embed="rId6"/>
+          <a:blip r:embed="rId4"/>
           <a:stretch>
             <a:fillRect/>
           </a:stretch>
@@ -18558,8 +17945,8 @@
         </p:nvSpPr>
         <p:spPr>
           <a:xfrm>
-            <a:off x="4352544" y="3794760"/>
-            <a:ext cx="3438144" cy="640080"/>
+            <a:off x="4352544" y="3887045"/>
+            <a:ext cx="3438144" cy="455509"/>
           </a:xfrm>
           <a:prstGeom prst="rect">
             <a:avLst/>
@@ -18567,7 +17954,7 @@
           <a:noFill/>
         </p:spPr>
         <p:txBody>
-          <a:bodyPr wrap="square" lIns="45720" rIns="45720" tIns="27432" bIns="27432" anchor="ctr" rtlCol="0">
+          <a:bodyPr wrap="square" lIns="45720" tIns="27432" rIns="45720" bIns="27432" rtlCol="0" anchor="ctr">
             <a:spAutoFit/>
           </a:bodyPr>
           <a:lstStyle/>
@@ -18578,7 +17965,7 @@
               </a:spcAft>
             </a:pPr>
             <a:r>
-              <a:rPr sz="1300" b="1" lang="he-IL">
+              <a:rPr lang="he-IL" sz="1300" b="1" dirty="0">
                 <a:solidFill>
                   <a:srgbClr val="1F4E79"/>
                 </a:solidFill>
@@ -18588,7 +17975,7 @@
               <a:t>עיוות: </a:t>
             </a:r>
             <a:r>
-              <a:rPr sz="1300" b="0" lang="he-IL">
+              <a:rPr lang="he-IL" sz="1300" b="0" dirty="0">
                 <a:solidFill>
                   <a:srgbClr val="1B242B"/>
                 </a:solidFill>
@@ -18598,7 +17985,47 @@
               <a:t>עלייה של ‎10.4 [</a:t>
             </a:r>
             <a:r>
-              <a:rPr sz="1300" b="0" lang="en-US">
+              <a:rPr lang="en-US" sz="1300" b="0" dirty="0">
+                <a:solidFill>
+                  <a:srgbClr val="1B242B"/>
+                </a:solidFill>
+                <a:latin typeface="Arial"/>
+                <a:cs typeface="Arial"/>
+              </a:rPr>
+              <a:t>dB</a:t>
+            </a:r>
+            <a:r>
+              <a:rPr lang="he-IL" sz="1300" b="0" dirty="0">
+                <a:solidFill>
+                  <a:srgbClr val="1B242B"/>
+                </a:solidFill>
+                <a:latin typeface="Arial"/>
+                <a:cs typeface="Arial"/>
+              </a:rPr>
+              <a:t>‏</a:t>
+            </a:r>
+            <a:r>
+              <a:rPr lang="en-US" sz="1300" b="0" dirty="0">
+                <a:solidFill>
+                  <a:srgbClr val="1B242B"/>
+                </a:solidFill>
+                <a:latin typeface="Arial"/>
+                <a:cs typeface="Arial"/>
+              </a:rPr>
+              <a:t>[</a:t>
+            </a:r>
+            <a:r>
+              <a:rPr lang="he-IL" sz="1300" b="0" dirty="0">
+                <a:solidFill>
+                  <a:srgbClr val="1B242B"/>
+                </a:solidFill>
+                <a:latin typeface="Arial"/>
+                <a:cs typeface="Arial"/>
+              </a:rPr>
+              <a:t>, רק ‎1.2 </a:t>
+            </a:r>
+            <a:r>
+              <a:rPr lang="en-US" sz="1300" b="0" dirty="0">
                 <a:solidFill>
                   <a:srgbClr val="1B242B"/>
                 </a:solidFill>
@@ -18608,7 +18035,7 @@
               <a:t>dB]</a:t>
             </a:r>
             <a:r>
-              <a:rPr sz="1300" b="0" lang="he-IL">
+              <a:rPr lang="he-IL" sz="1300" b="0" dirty="0">
                 <a:solidFill>
                   <a:srgbClr val="1B242B"/>
                 </a:solidFill>
@@ -18618,37 +18045,17 @@
               <a:t>‏</a:t>
             </a:r>
             <a:r>
-              <a:rPr sz="1300" b="0" lang="he-IL">
-                <a:solidFill>
-                  <a:srgbClr val="1B242B"/>
-                </a:solidFill>
-                <a:latin typeface="Arial"/>
-                <a:cs typeface="Arial"/>
-              </a:rPr>
-              <a:t>, רק ‎1.2 [</a:t>
-            </a:r>
-            <a:r>
-              <a:rPr sz="1300" b="0" lang="en-US">
-                <a:solidFill>
-                  <a:srgbClr val="1B242B"/>
-                </a:solidFill>
-                <a:latin typeface="Arial"/>
-                <a:cs typeface="Arial"/>
-              </a:rPr>
-              <a:t>dB]</a:t>
-            </a:r>
-            <a:r>
-              <a:rPr sz="1300" b="0" lang="he-IL">
-                <a:solidFill>
-                  <a:srgbClr val="1B242B"/>
-                </a:solidFill>
-                <a:latin typeface="Arial"/>
-                <a:cs typeface="Arial"/>
-              </a:rPr>
-              <a:t>‏</a:t>
-            </a:r>
-            <a:r>
-              <a:rPr sz="1300" b="0" lang="he-IL">
+              <a:rPr lang="en-US" sz="1300" b="0" dirty="0">
+                <a:solidFill>
+                  <a:srgbClr val="1B242B"/>
+                </a:solidFill>
+                <a:latin typeface="Arial"/>
+                <a:cs typeface="Arial"/>
+              </a:rPr>
+              <a:t>[</a:t>
+            </a:r>
+            <a:r>
+              <a:rPr lang="he-IL" sz="1300" b="0" dirty="0">
                 <a:solidFill>
                   <a:srgbClr val="1B242B"/>
                 </a:solidFill>
@@ -18703,7 +18110,9 @@
         <p:txBody>
           <a:bodyPr rtlCol="0" anchor="ctr"/>
           <a:lstStyle/>
-          <a:p/>
+          <a:p>
+            <a:endParaRPr/>
+          </a:p>
         </p:txBody>
       </p:sp>
       <p:pic>
@@ -18715,7 +18124,7 @@
           <p:nvPr/>
         </p:nvPicPr>
         <p:blipFill>
-          <a:blip r:embed="rId7"/>
+          <a:blip r:embed="rId5"/>
           <a:stretch>
             <a:fillRect/>
           </a:stretch>
@@ -18747,7 +18156,7 @@
           <a:noFill/>
         </p:spPr>
         <p:txBody>
-          <a:bodyPr wrap="square" lIns="45720" rIns="45720" tIns="27432" bIns="27432" anchor="ctr" rtlCol="0">
+          <a:bodyPr wrap="square" lIns="45720" tIns="27432" rIns="45720" bIns="27432" rtlCol="0" anchor="ctr">
             <a:spAutoFit/>
           </a:bodyPr>
           <a:lstStyle/>
@@ -18758,7 +18167,7 @@
               </a:spcAft>
             </a:pPr>
             <a:r>
-              <a:rPr sz="1300" b="1" lang="he-IL">
+              <a:rPr lang="he-IL" sz="1300" b="1">
                 <a:solidFill>
                   <a:srgbClr val="1F4E79"/>
                 </a:solidFill>
@@ -18768,7 +18177,7 @@
               <a:t>הפער לתקרה: </a:t>
             </a:r>
             <a:r>
-              <a:rPr sz="1300" b="0" lang="he-IL">
+              <a:rPr lang="he-IL" sz="1300" b="0">
                 <a:solidFill>
                   <a:srgbClr val="1B242B"/>
                 </a:solidFill>
@@ -18778,7 +18187,7 @@
               <a:t>ב-</a:t>
             </a:r>
             <a:r>
-              <a:rPr sz="1300" b="0" lang="en-US">
+              <a:rPr lang="en-US" sz="1300" b="0">
                 <a:solidFill>
                   <a:srgbClr val="1B242B"/>
                 </a:solidFill>
@@ -18788,27 +18197,17 @@
               <a:t>SI-SDR</a:t>
             </a:r>
             <a:r>
-              <a:rPr sz="1300" b="0" lang="he-IL">
-                <a:solidFill>
-                  <a:srgbClr val="1B242B"/>
-                </a:solidFill>
-                <a:latin typeface="Arial"/>
-                <a:cs typeface="Arial"/>
-              </a:rPr>
-              <a:t>‎</a:t>
-            </a:r>
-            <a:r>
-              <a:rPr sz="1300" b="0" lang="he-IL">
-                <a:solidFill>
-                  <a:srgbClr val="1B242B"/>
-                </a:solidFill>
-                <a:latin typeface="Arial"/>
-                <a:cs typeface="Arial"/>
-              </a:rPr>
-              <a:t> סגרנו 89% ממנו, ב-</a:t>
-            </a:r>
-            <a:r>
-              <a:rPr sz="1300" b="0" lang="en-US">
+              <a:rPr lang="he-IL" sz="1300" b="0">
+                <a:solidFill>
+                  <a:srgbClr val="1B242B"/>
+                </a:solidFill>
+                <a:latin typeface="Arial"/>
+                <a:cs typeface="Arial"/>
+              </a:rPr>
+              <a:t>‎ סגרנו 89% ממנו, ב-</a:t>
+            </a:r>
+            <a:r>
+              <a:rPr lang="en-US" sz="1300" b="0">
                 <a:solidFill>
                   <a:srgbClr val="1B242B"/>
                 </a:solidFill>
@@ -18818,24 +18217,14 @@
               <a:t>PESQ</a:t>
             </a:r>
             <a:r>
-              <a:rPr sz="1300" b="0" lang="he-IL">
-                <a:solidFill>
-                  <a:srgbClr val="1B242B"/>
-                </a:solidFill>
-                <a:latin typeface="Arial"/>
-                <a:cs typeface="Arial"/>
-              </a:rPr>
-              <a:t>‎</a:t>
-            </a:r>
-            <a:r>
-              <a:rPr sz="1300" b="0" lang="he-IL">
-                <a:solidFill>
-                  <a:srgbClr val="1B242B"/>
-                </a:solidFill>
-                <a:latin typeface="Arial"/>
-                <a:cs typeface="Arial"/>
-              </a:rPr>
-              <a:t> רק 59%</a:t>
+              <a:rPr lang="he-IL" sz="1300" b="0">
+                <a:solidFill>
+                  <a:srgbClr val="1B242B"/>
+                </a:solidFill>
+                <a:latin typeface="Arial"/>
+                <a:cs typeface="Arial"/>
+              </a:rPr>
+              <a:t>‎ רק 59%</a:t>
             </a:r>
           </a:p>
         </p:txBody>
@@ -18883,7 +18272,9 @@
         <p:txBody>
           <a:bodyPr rtlCol="0" anchor="ctr"/>
           <a:lstStyle/>
-          <a:p/>
+          <a:p>
+            <a:endParaRPr/>
+          </a:p>
         </p:txBody>
       </p:sp>
       <p:sp>
@@ -18903,7 +18294,7 @@
           <a:noFill/>
         </p:spPr>
         <p:txBody>
-          <a:bodyPr wrap="square" lIns="45720" rIns="45720" tIns="27432" bIns="27432" anchor="ctr" rtlCol="0">
+          <a:bodyPr wrap="square" lIns="45720" tIns="27432" rIns="45720" bIns="27432" rtlCol="0" anchor="ctr">
             <a:spAutoFit/>
           </a:bodyPr>
           <a:lstStyle/>
@@ -18914,7 +18305,7 @@
               </a:spcAft>
             </a:pPr>
             <a:r>
-              <a:rPr sz="2200" b="1" lang="he-IL">
+              <a:rPr lang="he-IL" sz="2200" b="1">
                 <a:solidFill>
                   <a:srgbClr val="7030A0"/>
                 </a:solidFill>
@@ -18931,7 +18322,7 @@
               </a:spcAft>
             </a:pPr>
             <a:r>
-              <a:rPr sz="1200" b="0" lang="he-IL">
+              <a:rPr lang="he-IL" sz="1200" b="0">
                 <a:solidFill>
                   <a:srgbClr val="1B242B"/>
                 </a:solidFill>
@@ -18986,7 +18377,9 @@
         <p:txBody>
           <a:bodyPr rtlCol="0" anchor="ctr"/>
           <a:lstStyle/>
-          <a:p/>
+          <a:p>
+            <a:endParaRPr/>
+          </a:p>
         </p:txBody>
       </p:sp>
       <p:sp>
@@ -19006,7 +18399,7 @@
           <a:noFill/>
         </p:spPr>
         <p:txBody>
-          <a:bodyPr wrap="square" lIns="45720" rIns="45720" tIns="27432" bIns="27432" anchor="ctr" rtlCol="0">
+          <a:bodyPr wrap="square" lIns="45720" tIns="27432" rIns="45720" bIns="27432" rtlCol="0" anchor="ctr">
             <a:spAutoFit/>
           </a:bodyPr>
           <a:lstStyle/>
@@ -19017,7 +18410,7 @@
               </a:spcAft>
             </a:pPr>
             <a:r>
-              <a:rPr sz="2200" b="1" lang="he-IL">
+              <a:rPr lang="he-IL" sz="2200" b="1">
                 <a:solidFill>
                   <a:srgbClr val="2E75B6"/>
                 </a:solidFill>
@@ -19034,7 +18427,7 @@
               </a:spcAft>
             </a:pPr>
             <a:r>
-              <a:rPr sz="1200" b="0" lang="he-IL">
+              <a:rPr lang="he-IL" sz="1200" b="0">
                 <a:solidFill>
                   <a:srgbClr val="1B242B"/>
                 </a:solidFill>
@@ -19089,7 +18482,9 @@
         <p:txBody>
           <a:bodyPr rtlCol="0" anchor="ctr"/>
           <a:lstStyle/>
-          <a:p/>
+          <a:p>
+            <a:endParaRPr/>
+          </a:p>
         </p:txBody>
       </p:sp>
       <p:sp>
@@ -19109,7 +18504,7 @@
           <a:noFill/>
         </p:spPr>
         <p:txBody>
-          <a:bodyPr wrap="square" lIns="45720" rIns="45720" tIns="27432" bIns="27432" anchor="ctr" rtlCol="0">
+          <a:bodyPr wrap="square" lIns="45720" tIns="27432" rIns="45720" bIns="27432" rtlCol="0" anchor="ctr">
             <a:spAutoFit/>
           </a:bodyPr>
           <a:lstStyle/>
@@ -19120,7 +18515,7 @@
               </a:spcAft>
             </a:pPr>
             <a:r>
-              <a:rPr sz="2200" b="1" lang="he-IL">
+              <a:rPr lang="he-IL" sz="2200" b="1">
                 <a:solidFill>
                   <a:srgbClr val="C55A11"/>
                 </a:solidFill>
@@ -19137,7 +18532,7 @@
               </a:spcAft>
             </a:pPr>
             <a:r>
-              <a:rPr sz="1200" b="0" lang="he-IL">
+              <a:rPr lang="he-IL" sz="1200" b="0">
                 <a:solidFill>
                   <a:srgbClr val="1B242B"/>
                 </a:solidFill>
@@ -19147,7 +18542,7 @@
               <a:t>‏</a:t>
             </a:r>
             <a:r>
-              <a:rPr sz="1200" b="0" lang="en-US">
+              <a:rPr lang="en-US" sz="1200" b="0">
                 <a:solidFill>
                   <a:srgbClr val="1B242B"/>
                 </a:solidFill>
@@ -19157,27 +18552,17 @@
               <a:t>TSTNN</a:t>
             </a:r>
             <a:r>
-              <a:rPr sz="1200" b="0" lang="he-IL">
-                <a:solidFill>
-                  <a:srgbClr val="1B242B"/>
-                </a:solidFill>
-                <a:latin typeface="Arial"/>
-                <a:cs typeface="Arial"/>
-              </a:rPr>
-              <a:t>‎</a:t>
-            </a:r>
-            <a:r>
-              <a:rPr sz="1200" b="0" lang="he-IL">
-                <a:solidFill>
-                  <a:srgbClr val="1B242B"/>
-                </a:solidFill>
-                <a:latin typeface="Arial"/>
-                <a:cs typeface="Arial"/>
-              </a:rPr>
-              <a:t> מהמאמר, </a:t>
-            </a:r>
-            <a:r>
-              <a:rPr sz="1200" b="0" lang="en-US">
+              <a:rPr lang="he-IL" sz="1200" b="0">
+                <a:solidFill>
+                  <a:srgbClr val="1B242B"/>
+                </a:solidFill>
+                <a:latin typeface="Arial"/>
+                <a:cs typeface="Arial"/>
+              </a:rPr>
+              <a:t>‎ מהמאמר, </a:t>
+            </a:r>
+            <a:r>
+              <a:rPr lang="en-US" sz="1200" b="0">
                 <a:solidFill>
                   <a:srgbClr val="1B242B"/>
                 </a:solidFill>
@@ -19187,7 +18572,7 @@
               <a:t>PESQ</a:t>
             </a:r>
             <a:r>
-              <a:rPr sz="1200" b="0" lang="he-IL">
+              <a:rPr lang="he-IL" sz="1200" b="0">
                 <a:solidFill>
                   <a:srgbClr val="1B242B"/>
                 </a:solidFill>
@@ -19216,7 +18601,7 @@
           <a:noFill/>
         </p:spPr>
         <p:txBody>
-          <a:bodyPr wrap="square" lIns="45720" rIns="45720" tIns="27432" bIns="27432" anchor="ctr" rtlCol="0">
+          <a:bodyPr wrap="square" lIns="45720" tIns="27432" rIns="45720" bIns="27432" rtlCol="0" anchor="ctr">
             <a:spAutoFit/>
           </a:bodyPr>
           <a:lstStyle/>
@@ -19227,7 +18612,7 @@
               </a:spcAft>
             </a:pPr>
             <a:r>
-              <a:rPr sz="1100" b="0" lang="he-IL">
+              <a:rPr lang="he-IL" sz="1100" b="0">
                 <a:solidFill>
                   <a:srgbClr val="5A636A"/>
                 </a:solidFill>
@@ -19237,7 +18622,7 @@
               <a:t>תקרה = ה-</a:t>
             </a:r>
             <a:r>
-              <a:rPr sz="1100" b="0" lang="en-US">
+              <a:rPr lang="en-US" sz="1100" b="0">
                 <a:solidFill>
                   <a:srgbClr val="5A636A"/>
                 </a:solidFill>
@@ -19247,54 +18632,34 @@
               <a:t>magnitude</a:t>
             </a:r>
             <a:r>
-              <a:rPr sz="1100" b="0" lang="he-IL">
+              <a:rPr lang="he-IL" sz="1100" b="0">
                 <a:solidFill>
                   <a:srgbClr val="5A636A"/>
                 </a:solidFill>
                 <a:latin typeface="Arial"/>
                 <a:cs typeface="Arial"/>
               </a:rPr>
-              <a:t>‎</a:t>
-            </a:r>
-            <a:r>
-              <a:rPr sz="1100" b="0" lang="he-IL">
+              <a:t>‎ הנקי עם הפאזה הרועשת, הטוב ביותר שמסכה על </a:t>
+            </a:r>
+            <a:r>
+              <a:rPr lang="en-US" sz="1100" b="0">
                 <a:solidFill>
                   <a:srgbClr val="5A636A"/>
                 </a:solidFill>
                 <a:latin typeface="Arial"/>
                 <a:cs typeface="Arial"/>
               </a:rPr>
-              <a:t> הנקי עם הפאזה הרועשת, הטוב ביותר שמסכה על </a:t>
-            </a:r>
-            <a:r>
-              <a:rPr sz="1100" b="0" lang="en-US">
+              <a:t>magnitude</a:t>
+            </a:r>
+            <a:r>
+              <a:rPr lang="he-IL" sz="1100" b="0">
                 <a:solidFill>
                   <a:srgbClr val="5A636A"/>
                 </a:solidFill>
                 <a:latin typeface="Arial"/>
                 <a:cs typeface="Arial"/>
               </a:rPr>
-              <a:t>magnitude</a:t>
-            </a:r>
-            <a:r>
-              <a:rPr sz="1100" b="0" lang="he-IL">
-                <a:solidFill>
-                  <a:srgbClr val="5A636A"/>
-                </a:solidFill>
-                <a:latin typeface="Arial"/>
-                <a:cs typeface="Arial"/>
-              </a:rPr>
-              <a:t>‎</a:t>
-            </a:r>
-            <a:r>
-              <a:rPr sz="1100" b="0" lang="he-IL">
-                <a:solidFill>
-                  <a:srgbClr val="5A636A"/>
-                </a:solidFill>
-                <a:latin typeface="Arial"/>
-                <a:cs typeface="Arial"/>
-              </a:rPr>
-              <a:t> יכולה להשיג</a:t>
+              <a:t>‎ יכולה להשיג</a:t>
             </a:r>
           </a:p>
         </p:txBody>
@@ -19342,7 +18707,9 @@
         <p:txBody>
           <a:bodyPr rtlCol="0" anchor="ctr"/>
           <a:lstStyle/>
-          <a:p/>
+          <a:p>
+            <a:endParaRPr/>
+          </a:p>
         </p:txBody>
       </p:sp>
       <p:sp>
@@ -19362,7 +18729,7 @@
           <a:noFill/>
         </p:spPr>
         <p:txBody>
-          <a:bodyPr wrap="square" lIns="45720" rIns="45720" tIns="27432" bIns="27432" anchor="ctr" rtlCol="0">
+          <a:bodyPr wrap="square" lIns="45720" tIns="27432" rIns="45720" bIns="27432" rtlCol="0" anchor="ctr">
             <a:spAutoFit/>
           </a:bodyPr>
           <a:lstStyle/>
@@ -19373,7 +18740,7 @@
               </a:spcAft>
             </a:pPr>
             <a:r>
-              <a:rPr sz="1500" b="1" lang="he-IL">
+              <a:rPr lang="he-IL" sz="1500" b="1">
                 <a:solidFill>
                   <a:srgbClr val="1F4E79"/>
                 </a:solidFill>
@@ -19383,7 +18750,7 @@
               <a:t>המסקנה: </a:t>
             </a:r>
             <a:r>
-              <a:rPr sz="1500" b="0" lang="he-IL">
+              <a:rPr lang="he-IL" sz="1500" b="0">
                 <a:solidFill>
                   <a:srgbClr val="1B242B"/>
                 </a:solidFill>
@@ -19393,7 +18760,7 @@
               <a:t>המודל עוקף את </a:t>
             </a:r>
             <a:r>
-              <a:rPr sz="1500" b="0" lang="en-US">
+              <a:rPr lang="en-US" sz="1500" b="0">
                 <a:solidFill>
                   <a:srgbClr val="1B242B"/>
                 </a:solidFill>
@@ -19403,24 +18770,14 @@
               <a:t>TSTNN</a:t>
             </a:r>
             <a:r>
-              <a:rPr sz="1500" b="0" lang="he-IL">
-                <a:solidFill>
-                  <a:srgbClr val="1B242B"/>
-                </a:solidFill>
-                <a:latin typeface="Arial"/>
-                <a:cs typeface="Arial"/>
-              </a:rPr>
-              <a:t>‎</a:t>
-            </a:r>
-            <a:r>
-              <a:rPr sz="1500" b="0" lang="he-IL">
-                <a:solidFill>
-                  <a:srgbClr val="1B242B"/>
-                </a:solidFill>
-                <a:latin typeface="Arial"/>
-                <a:cs typeface="Arial"/>
-              </a:rPr>
-              <a:t> ואת השיטות הקלאסיות, והפער שנשאר לתקרה הוא בעיקר באיכות הנשמעת</a:t>
+              <a:rPr lang="he-IL" sz="1500" b="0">
+                <a:solidFill>
+                  <a:srgbClr val="1B242B"/>
+                </a:solidFill>
+                <a:latin typeface="Arial"/>
+                <a:cs typeface="Arial"/>
+              </a:rPr>
+              <a:t>‎ ואת השיטות הקלאסיות, והפער שנשאר לתקרה הוא בעיקר באיכות הנשמעת</a:t>
             </a:r>
           </a:p>
         </p:txBody>
@@ -19551,17 +18908,7 @@
                 <a:latin typeface="Arial"/>
                 <a:cs typeface="Arial"/>
               </a:rPr>
-              <a:t>‎</a:t>
-            </a:r>
-            <a:r>
-              <a:rPr lang="he-IL" sz="3200" b="1">
-                <a:solidFill>
-                  <a:srgbClr val="1F4E79"/>
-                </a:solidFill>
-                <a:latin typeface="Arial"/>
-                <a:cs typeface="Arial"/>
-              </a:rPr>
-              <a:t> של הקלט</a:t>
+              <a:t>‎ של הקלט</a:t>
             </a:r>
           </a:p>
         </p:txBody>
@@ -19783,7 +19130,9 @@
         <p:txBody>
           <a:bodyPr rtlCol="0" anchor="ctr"/>
           <a:lstStyle/>
-          <a:p/>
+          <a:p>
+            <a:endParaRPr/>
+          </a:p>
         </p:txBody>
       </p:sp>
       <p:pic>
@@ -19795,7 +19144,7 @@
           <p:nvPr/>
         </p:nvPicPr>
         <p:blipFill>
-          <a:blip r:embed="rId4"/>
+          <a:blip r:embed="rId3"/>
           <a:stretch>
             <a:fillRect/>
           </a:stretch>
@@ -19827,7 +19176,7 @@
           <a:noFill/>
         </p:spPr>
         <p:txBody>
-          <a:bodyPr wrap="square" lIns="45720" rIns="45720" tIns="27432" bIns="27432" anchor="ctr" rtlCol="0">
+          <a:bodyPr wrap="square" lIns="45720" tIns="27432" rIns="45720" bIns="27432" rtlCol="0" anchor="ctr">
             <a:spAutoFit/>
           </a:bodyPr>
           <a:lstStyle/>
@@ -19838,7 +19187,7 @@
               </a:spcAft>
             </a:pPr>
             <a:r>
-              <a:rPr sz="1400" b="1" lang="he-IL">
+              <a:rPr lang="he-IL" sz="1400" b="1">
                 <a:solidFill>
                   <a:srgbClr val="1F4E79"/>
                 </a:solidFill>
@@ -19848,7 +19197,7 @@
               <a:t>מובנות: </a:t>
             </a:r>
             <a:r>
-              <a:rPr sz="1400" b="0" lang="he-IL">
+              <a:rPr lang="he-IL" sz="1400" b="0">
                 <a:solidFill>
                   <a:srgbClr val="1B242B"/>
                 </a:solidFill>
@@ -19858,7 +19207,7 @@
               <a:t>מתחת ל-‎2.5 [</a:t>
             </a:r>
             <a:r>
-              <a:rPr sz="1400" b="0" lang="en-US">
+              <a:rPr lang="en-US" sz="1400" b="0">
                 <a:solidFill>
                   <a:srgbClr val="1B242B"/>
                 </a:solidFill>
@@ -19868,27 +19217,17 @@
               <a:t>dB]</a:t>
             </a:r>
             <a:r>
-              <a:rPr sz="1400" b="0" lang="he-IL">
-                <a:solidFill>
-                  <a:srgbClr val="1B242B"/>
-                </a:solidFill>
-                <a:latin typeface="Arial"/>
-                <a:cs typeface="Arial"/>
-              </a:rPr>
-              <a:t>‏</a:t>
-            </a:r>
-            <a:r>
-              <a:rPr sz="1400" b="0" lang="he-IL">
-                <a:solidFill>
-                  <a:srgbClr val="1B242B"/>
-                </a:solidFill>
-                <a:latin typeface="Arial"/>
-                <a:cs typeface="Arial"/>
-              </a:rPr>
-              <a:t> ה-</a:t>
-            </a:r>
-            <a:r>
-              <a:rPr sz="1400" b="0" lang="en-US">
+              <a:rPr lang="he-IL" sz="1400" b="0">
+                <a:solidFill>
+                  <a:srgbClr val="1B242B"/>
+                </a:solidFill>
+                <a:latin typeface="Arial"/>
+                <a:cs typeface="Arial"/>
+              </a:rPr>
+              <a:t>‏ ה-</a:t>
+            </a:r>
+            <a:r>
+              <a:rPr lang="en-US" sz="1400" b="0">
                 <a:solidFill>
                   <a:srgbClr val="1B242B"/>
                 </a:solidFill>
@@ -19898,27 +19237,17 @@
               <a:t>ESTOI</a:t>
             </a:r>
             <a:r>
-              <a:rPr sz="1400" b="0" lang="he-IL">
-                <a:solidFill>
-                  <a:srgbClr val="1B242B"/>
-                </a:solidFill>
-                <a:latin typeface="Arial"/>
-                <a:cs typeface="Arial"/>
-              </a:rPr>
-              <a:t>‎</a:t>
-            </a:r>
-            <a:r>
-              <a:rPr sz="1400" b="0" lang="he-IL">
-                <a:solidFill>
-                  <a:srgbClr val="1B242B"/>
-                </a:solidFill>
-                <a:latin typeface="Arial"/>
-                <a:cs typeface="Arial"/>
-              </a:rPr>
-              <a:t> עולה ב-0.14, ומעל ‎12.5 [</a:t>
-            </a:r>
-            <a:r>
-              <a:rPr sz="1400" b="0" lang="en-US">
+              <a:rPr lang="he-IL" sz="1400" b="0">
+                <a:solidFill>
+                  <a:srgbClr val="1B242B"/>
+                </a:solidFill>
+                <a:latin typeface="Arial"/>
+                <a:cs typeface="Arial"/>
+              </a:rPr>
+              <a:t>‎ עולה ב-0.14, ומעל ‎12.5 [</a:t>
+            </a:r>
+            <a:r>
+              <a:rPr lang="en-US" sz="1400" b="0">
                 <a:solidFill>
                   <a:srgbClr val="1B242B"/>
                 </a:solidFill>
@@ -19928,24 +19257,14 @@
               <a:t>dB]</a:t>
             </a:r>
             <a:r>
-              <a:rPr sz="1400" b="0" lang="he-IL">
-                <a:solidFill>
-                  <a:srgbClr val="1B242B"/>
-                </a:solidFill>
-                <a:latin typeface="Arial"/>
-                <a:cs typeface="Arial"/>
-              </a:rPr>
-              <a:t>‏</a:t>
-            </a:r>
-            <a:r>
-              <a:rPr sz="1400" b="0" lang="he-IL">
-                <a:solidFill>
-                  <a:srgbClr val="1B242B"/>
-                </a:solidFill>
-                <a:latin typeface="Arial"/>
-                <a:cs typeface="Arial"/>
-              </a:rPr>
-              <a:t> רק ב-0.04</a:t>
+              <a:rPr lang="he-IL" sz="1400" b="0">
+                <a:solidFill>
+                  <a:srgbClr val="1B242B"/>
+                </a:solidFill>
+                <a:latin typeface="Arial"/>
+                <a:cs typeface="Arial"/>
+              </a:rPr>
+              <a:t>‏ רק ב-0.04</a:t>
             </a:r>
           </a:p>
         </p:txBody>
@@ -19993,7 +19312,9 @@
         <p:txBody>
           <a:bodyPr rtlCol="0" anchor="ctr"/>
           <a:lstStyle/>
-          <a:p/>
+          <a:p>
+            <a:endParaRPr/>
+          </a:p>
         </p:txBody>
       </p:sp>
       <p:pic>
@@ -20005,7 +19326,7 @@
           <p:nvPr/>
         </p:nvPicPr>
         <p:blipFill>
-          <a:blip r:embed="rId5"/>
+          <a:blip r:embed="rId4"/>
           <a:stretch>
             <a:fillRect/>
           </a:stretch>
@@ -20037,7 +19358,7 @@
           <a:noFill/>
         </p:spPr>
         <p:txBody>
-          <a:bodyPr wrap="square" lIns="45720" rIns="45720" tIns="27432" bIns="27432" anchor="ctr" rtlCol="0">
+          <a:bodyPr wrap="square" lIns="45720" tIns="27432" rIns="45720" bIns="27432" rtlCol="0" anchor="ctr">
             <a:spAutoFit/>
           </a:bodyPr>
           <a:lstStyle/>
@@ -20048,7 +19369,7 @@
               </a:spcAft>
             </a:pPr>
             <a:r>
-              <a:rPr sz="1400" b="1" lang="he-IL">
+              <a:rPr lang="he-IL" sz="1400" b="1">
                 <a:solidFill>
                   <a:srgbClr val="1F4E79"/>
                 </a:solidFill>
@@ -20058,7 +19379,7 @@
               <a:t>איכות: </a:t>
             </a:r>
             <a:r>
-              <a:rPr sz="1400" b="0" lang="he-IL">
+              <a:rPr lang="he-IL" sz="1400" b="0">
                 <a:solidFill>
                   <a:srgbClr val="1B242B"/>
                 </a:solidFill>
@@ -20068,7 +19389,7 @@
               <a:t>השיפור ב-</a:t>
             </a:r>
             <a:r>
-              <a:rPr sz="1400" b="0" lang="en-US">
+              <a:rPr lang="en-US" sz="1400" b="0">
                 <a:solidFill>
                   <a:srgbClr val="1B242B"/>
                 </a:solidFill>
@@ -20078,24 +19399,14 @@
               <a:t>PESQ</a:t>
             </a:r>
             <a:r>
-              <a:rPr sz="1400" b="0" lang="he-IL">
-                <a:solidFill>
-                  <a:srgbClr val="1B242B"/>
-                </a:solidFill>
-                <a:latin typeface="Arial"/>
-                <a:cs typeface="Arial"/>
-              </a:rPr>
-              <a:t>‎</a:t>
-            </a:r>
-            <a:r>
-              <a:rPr sz="1400" b="0" lang="he-IL">
-                <a:solidFill>
-                  <a:srgbClr val="1B242B"/>
-                </a:solidFill>
-                <a:latin typeface="Arial"/>
-                <a:cs typeface="Arial"/>
-              </a:rPr>
-              <a:t> דומה בכל רמות הרעש</a:t>
+              <a:rPr lang="he-IL" sz="1400" b="0">
+                <a:solidFill>
+                  <a:srgbClr val="1B242B"/>
+                </a:solidFill>
+                <a:latin typeface="Arial"/>
+                <a:cs typeface="Arial"/>
+              </a:rPr>
+              <a:t>‎ דומה בכל רמות הרעש</a:t>
             </a:r>
           </a:p>
         </p:txBody>
@@ -20143,7 +19454,9 @@
         <p:txBody>
           <a:bodyPr rtlCol="0" anchor="ctr"/>
           <a:lstStyle/>
-          <a:p/>
+          <a:p>
+            <a:endParaRPr/>
+          </a:p>
         </p:txBody>
       </p:sp>
       <p:sp>
@@ -20163,7 +19476,7 @@
           <a:noFill/>
         </p:spPr>
         <p:txBody>
-          <a:bodyPr wrap="square" lIns="45720" rIns="45720" tIns="27432" bIns="27432" anchor="ctr" rtlCol="0">
+          <a:bodyPr wrap="square" lIns="45720" tIns="27432" rIns="45720" bIns="27432" rtlCol="0" anchor="ctr">
             <a:spAutoFit/>
           </a:bodyPr>
           <a:lstStyle/>
@@ -20174,7 +19487,7 @@
               </a:spcAft>
             </a:pPr>
             <a:r>
-              <a:rPr sz="1500" b="1" lang="he-IL">
+              <a:rPr lang="he-IL" sz="1500" b="1">
                 <a:solidFill>
                   <a:srgbClr val="1F4E79"/>
                 </a:solidFill>
@@ -20184,7 +19497,7 @@
               <a:t>המסקנה: </a:t>
             </a:r>
             <a:r>
-              <a:rPr sz="1500" b="0" lang="he-IL">
+              <a:rPr lang="he-IL" sz="1500" b="0">
                 <a:solidFill>
                   <a:srgbClr val="1B242B"/>
                 </a:solidFill>
@@ -20976,7 +20289,7 @@
           <p:nvPr/>
         </p:nvPicPr>
         <p:blipFill>
-          <a:blip r:embed="rId13"/>
+          <a:blip r:embed="rId12"/>
           <a:stretch>
             <a:fillRect/>
           </a:stretch>
@@ -21000,7 +20313,7 @@
           <p:nvPr/>
         </p:nvPicPr>
         <p:blipFill>
-          <a:blip r:embed="rId14"/>
+          <a:blip r:embed="rId13"/>
           <a:stretch>
             <a:fillRect/>
           </a:stretch>
@@ -21024,7 +20337,7 @@
           <p:nvPr/>
         </p:nvPicPr>
         <p:blipFill>
-          <a:blip r:embed="rId15"/>
+          <a:blip r:embed="rId14"/>
           <a:stretch>
             <a:fillRect/>
           </a:stretch>
@@ -21048,7 +20361,7 @@
           <p:nvPr/>
         </p:nvPicPr>
         <p:blipFill>
-          <a:blip r:embed="rId16"/>
+          <a:blip r:embed="rId15"/>
           <a:stretch>
             <a:fillRect/>
           </a:stretch>
@@ -21291,908 +20604,6 @@
 </p:sld>
 </file>
 
-<file path=ppt/slides/slide19.xml><?xml version="1.0" encoding="utf-8"?>
-<p:sld xmlns:a="http://schemas.openxmlformats.org/drawingml/2006/main" xmlns:p="http://schemas.openxmlformats.org/presentationml/2006/main" xmlns:r="http://schemas.openxmlformats.org/officeDocument/2006/relationships">
-  <p:cSld>
-    <p:spTree>
-      <p:nvGrpSpPr>
-        <p:cNvPr id="1" name=""/>
-        <p:cNvGrpSpPr/>
-        <p:nvPr/>
-      </p:nvGrpSpPr>
-      <p:grpSpPr/>
-      <p:sp>
-        <p:nvSpPr>
-          <p:cNvPr id="100" name="Rectangle 1"/>
-          <p:cNvSpPr/>
-          <p:nvPr/>
-        </p:nvSpPr>
-        <p:spPr>
-          <a:xfrm>
-            <a:off x="0" y="0"/>
-            <a:ext cx="12191695" cy="109728"/>
-          </a:xfrm>
-          <a:prstGeom prst="rect">
-            <a:avLst/>
-          </a:prstGeom>
-          <a:solidFill>
-            <a:srgbClr val="1F4E79"/>
-          </a:solidFill>
-          <a:ln>
-            <a:noFill/>
-          </a:ln>
-          <a:effectLst/>
-        </p:spPr>
-        <p:style>
-          <a:lnRef idx="1">
-            <a:schemeClr val="accent1"/>
-          </a:lnRef>
-          <a:fillRef idx="3">
-            <a:schemeClr val="accent1"/>
-          </a:fillRef>
-          <a:effectRef idx="2">
-            <a:schemeClr val="accent1"/>
-          </a:effectRef>
-          <a:fontRef idx="minor">
-            <a:schemeClr val="lt1"/>
-          </a:fontRef>
-        </p:style>
-        <p:txBody>
-          <a:bodyPr rtlCol="0" anchor="ctr"/>
-          <a:lstStyle/>
-          <a:p>
-            <a:pPr algn="ctr"/>
-            <a:endParaRPr/>
-          </a:p>
-        </p:txBody>
-      </p:sp>
-      <p:sp>
-        <p:nvSpPr>
-          <p:cNvPr id="101" name="TextBox 2"/>
-          <p:cNvSpPr txBox="1"/>
-          <p:nvPr/>
-        </p:nvSpPr>
-        <p:spPr>
-          <a:xfrm>
-            <a:off x="457200" y="274320"/>
-            <a:ext cx="11277295" cy="777240"/>
-          </a:xfrm>
-          <a:prstGeom prst="rect">
-            <a:avLst/>
-          </a:prstGeom>
-          <a:noFill/>
-        </p:spPr>
-        <p:txBody>
-          <a:bodyPr wrap="square" lIns="45720" rIns="45720" anchor="ctr">
-            <a:spAutoFit/>
-          </a:bodyPr>
-          <a:lstStyle/>
-          <a:p>
-            <a:pPr algn="r" rtl="1">
-              <a:spcAft>
-                <a:spcPts val="800"/>
-              </a:spcAft>
-              <a:buNone/>
-            </a:pPr>
-            <a:r>
-              <a:rPr lang="he-IL" sz="3200" b="1" dirty="0">
-                <a:solidFill>
-                  <a:srgbClr val="1F4E79"/>
-                </a:solidFill>
-                <a:latin typeface="Arial"/>
-                <a:cs typeface="Arial"/>
-              </a:rPr>
-              <a:t>מה למדנו ומה הלאה</a:t>
-            </a:r>
-          </a:p>
-        </p:txBody>
-      </p:sp>
-      <p:sp>
-        <p:nvSpPr>
-          <p:cNvPr id="102" name="Rectangle 3"/>
-          <p:cNvSpPr/>
-          <p:nvPr/>
-        </p:nvSpPr>
-        <p:spPr>
-          <a:xfrm>
-            <a:off x="10271455" y="1051560"/>
-            <a:ext cx="1463040" cy="45720"/>
-          </a:xfrm>
-          <a:prstGeom prst="rect">
-            <a:avLst/>
-          </a:prstGeom>
-          <a:solidFill>
-            <a:srgbClr val="C55A11"/>
-          </a:solidFill>
-          <a:ln>
-            <a:noFill/>
-          </a:ln>
-          <a:effectLst/>
-        </p:spPr>
-        <p:style>
-          <a:lnRef idx="1">
-            <a:schemeClr val="accent1"/>
-          </a:lnRef>
-          <a:fillRef idx="3">
-            <a:schemeClr val="accent1"/>
-          </a:fillRef>
-          <a:effectRef idx="2">
-            <a:schemeClr val="accent1"/>
-          </a:effectRef>
-          <a:fontRef idx="minor">
-            <a:schemeClr val="lt1"/>
-          </a:fontRef>
-        </p:style>
-        <p:txBody>
-          <a:bodyPr rtlCol="0" anchor="ctr"/>
-          <a:lstStyle/>
-          <a:p>
-            <a:pPr algn="ctr"/>
-            <a:endParaRPr/>
-          </a:p>
-        </p:txBody>
-      </p:sp>
-      <p:sp>
-        <p:nvSpPr>
-          <p:cNvPr id="103" name="Rounded Rectangle 4"/>
-          <p:cNvSpPr/>
-          <p:nvPr/>
-        </p:nvSpPr>
-        <p:spPr>
-          <a:xfrm>
-            <a:off x="10774375" y="6400800"/>
-            <a:ext cx="1051560" cy="310896"/>
-          </a:xfrm>
-          <a:prstGeom prst="roundRect">
-            <a:avLst>
-              <a:gd name="adj" fmla="val 50000"/>
-            </a:avLst>
-          </a:prstGeom>
-          <a:solidFill>
-            <a:srgbClr val="C55A11"/>
-          </a:solidFill>
-          <a:ln>
-            <a:noFill/>
-          </a:ln>
-          <a:effectLst/>
-        </p:spPr>
-        <p:style>
-          <a:lnRef idx="1">
-            <a:schemeClr val="accent1"/>
-          </a:lnRef>
-          <a:fillRef idx="3">
-            <a:schemeClr val="accent1"/>
-          </a:fillRef>
-          <a:effectRef idx="2">
-            <a:schemeClr val="accent1"/>
-          </a:effectRef>
-          <a:fontRef idx="minor">
-            <a:schemeClr val="lt1"/>
-          </a:fontRef>
-        </p:style>
-        <p:txBody>
-          <a:bodyPr rtlCol="0" anchor="ctr"/>
-          <a:lstStyle/>
-          <a:p>
-            <a:pPr algn="ctr"/>
-            <a:endParaRPr/>
-          </a:p>
-        </p:txBody>
-      </p:sp>
-      <p:sp>
-        <p:nvSpPr>
-          <p:cNvPr id="104" name="TextBox 5"/>
-          <p:cNvSpPr txBox="1"/>
-          <p:nvPr/>
-        </p:nvSpPr>
-        <p:spPr>
-          <a:xfrm>
-            <a:off x="10774375" y="6400800"/>
-            <a:ext cx="1051560" cy="310896"/>
-          </a:xfrm>
-          <a:prstGeom prst="rect">
-            <a:avLst/>
-          </a:prstGeom>
-          <a:noFill/>
-        </p:spPr>
-        <p:txBody>
-          <a:bodyPr wrap="square" lIns="45720" rIns="45720" anchor="ctr">
-            <a:spAutoFit/>
-          </a:bodyPr>
-          <a:lstStyle/>
-          <a:p>
-            <a:pPr algn="ctr" rtl="1">
-              <a:spcAft>
-                <a:spcPts val="0"/>
-              </a:spcAft>
-              <a:buNone/>
-            </a:pPr>
-            <a:r>
-              <a:rPr lang="he-IL" sz="1300" b="1">
-                <a:solidFill>
-                  <a:srgbClr val="FFFFFF"/>
-                </a:solidFill>
-                <a:latin typeface="Arial"/>
-                <a:cs typeface="Arial"/>
-              </a:rPr>
-              <a:t>עידן</a:t>
-            </a:r>
-          </a:p>
-        </p:txBody>
-      </p:sp>
-      <p:sp>
-        <p:nvSpPr>
-          <p:cNvPr id="105" name="TextBox 6"/>
-          <p:cNvSpPr txBox="1"/>
-          <p:nvPr/>
-        </p:nvSpPr>
-        <p:spPr>
-          <a:xfrm>
-            <a:off x="365760" y="6400800"/>
-            <a:ext cx="914400" cy="310896"/>
-          </a:xfrm>
-          <a:prstGeom prst="rect">
-            <a:avLst/>
-          </a:prstGeom>
-          <a:noFill/>
-        </p:spPr>
-        <p:txBody>
-          <a:bodyPr wrap="square" lIns="45720" rIns="45720" anchor="ctr">
-            <a:spAutoFit/>
-          </a:bodyPr>
-          <a:lstStyle/>
-          <a:p>
-            <a:pPr algn="l" rtl="0">
-              <a:spcAft>
-                <a:spcPts val="0"/>
-              </a:spcAft>
-              <a:buNone/>
-            </a:pPr>
-            <a:r>
-              <a:rPr lang="he-IL" sz="1300" b="0">
-                <a:solidFill>
-                  <a:srgbClr val="5A636A"/>
-                </a:solidFill>
-                <a:latin typeface="Arial"/>
-                <a:cs typeface="Arial"/>
-              </a:rPr>
-              <a:t>19</a:t>
-            </a:r>
-          </a:p>
-        </p:txBody>
-      </p:sp>
-      <p:sp>
-        <p:nvSpPr>
-          <p:cNvPr id="106" name="Rounded Rectangle 9"/>
-          <p:cNvSpPr/>
-          <p:nvPr/>
-        </p:nvSpPr>
-        <p:spPr>
-          <a:xfrm>
-            <a:off x="8074152" y="1325880"/>
-            <a:ext cx="3657600" cy="3566160"/>
-          </a:xfrm>
-          <a:prstGeom prst="roundRect">
-            <a:avLst>
-              <a:gd name="adj" fmla="val 8000"/>
-            </a:avLst>
-          </a:prstGeom>
-          <a:solidFill>
-            <a:srgbClr val="DCEBF7"/>
-          </a:solidFill>
-          <a:ln w="22225">
-            <a:solidFill>
-              <a:srgbClr val="2E75B6"/>
-            </a:solidFill>
-          </a:ln>
-          <a:effectLst/>
-        </p:spPr>
-        <p:style>
-          <a:lnRef idx="1">
-            <a:schemeClr val="accent1"/>
-          </a:lnRef>
-          <a:fillRef idx="3">
-            <a:schemeClr val="accent1"/>
-          </a:fillRef>
-          <a:effectRef idx="2">
-            <a:schemeClr val="accent1"/>
-          </a:effectRef>
-          <a:fontRef idx="minor">
-            <a:schemeClr val="lt1"/>
-          </a:fontRef>
-        </p:style>
-        <p:txBody>
-          <a:bodyPr wrap="square" lIns="45720" tIns="27432" rIns="45720" bIns="27432" rtlCol="0" anchor="t">
-            <a:noAutofit/>
-          </a:bodyPr>
-          <a:lstStyle/>
-          <a:p>
-            <a:pPr algn="r" rtl="1">
-              <a:spcAft>
-                <a:spcPts val="0"/>
-              </a:spcAft>
-              <a:buNone/>
-            </a:pPr>
-            <a:endParaRPr/>
-          </a:p>
-        </p:txBody>
-      </p:sp>
-      <p:sp>
-        <p:nvSpPr>
-          <p:cNvPr id="107" name="TextBox 12"/>
-          <p:cNvSpPr txBox="1"/>
-          <p:nvPr/>
-        </p:nvSpPr>
-        <p:spPr>
-          <a:xfrm>
-            <a:off x="8211312" y="1463040"/>
-            <a:ext cx="3383280" cy="502920"/>
-          </a:xfrm>
-          <a:prstGeom prst="rect">
-            <a:avLst/>
-          </a:prstGeom>
-          <a:noFill/>
-        </p:spPr>
-        <p:txBody>
-          <a:bodyPr wrap="square" lIns="45720" tIns="27432" rIns="45720" bIns="27432" rtlCol="0" anchor="ctr">
-            <a:noAutofit/>
-          </a:bodyPr>
-          <a:lstStyle/>
-          <a:p>
-            <a:pPr algn="r" rtl="1">
-              <a:spcAft>
-                <a:spcPts val="0"/>
-              </a:spcAft>
-              <a:buNone/>
-            </a:pPr>
-            <a:r>
-              <a:rPr lang="he-IL" sz="2200" b="1" dirty="0">
-                <a:solidFill>
-                  <a:srgbClr val="2E75B6"/>
-                </a:solidFill>
-                <a:latin typeface="Arial"/>
-                <a:cs typeface="Arial"/>
-              </a:rPr>
-              <a:t>איפה נשארה השגיאה</a:t>
-            </a:r>
-          </a:p>
-        </p:txBody>
-      </p:sp>
-      <p:sp>
-        <p:nvSpPr>
-          <p:cNvPr id="108" name="TextBox 13"/>
-          <p:cNvSpPr txBox="1"/>
-          <p:nvPr/>
-        </p:nvSpPr>
-        <p:spPr>
-          <a:xfrm>
-            <a:off x="8211312" y="2148840"/>
-            <a:ext cx="3383280" cy="3017520"/>
-          </a:xfrm>
-          <a:prstGeom prst="rect">
-            <a:avLst/>
-          </a:prstGeom>
-          <a:noFill/>
-        </p:spPr>
-        <p:txBody>
-          <a:bodyPr wrap="square" lIns="45720" tIns="27432" rIns="45720" bIns="27432" rtlCol="0" anchor="t">
-            <a:noAutofit/>
-          </a:bodyPr>
-          <a:lstStyle/>
-          <a:p>
-            <a:pPr algn="r" rtl="1">
-              <a:spcAft>
-                <a:spcPts val="1600"/>
-              </a:spcAft>
-              <a:buNone/>
-            </a:pPr>
-            <a:r>
-              <a:rPr lang="he-IL" sz="1800" b="1" dirty="0">
-                <a:solidFill>
-                  <a:srgbClr val="2E75B6"/>
-                </a:solidFill>
-                <a:latin typeface="Arial"/>
-                <a:cs typeface="Arial"/>
-              </a:rPr>
-              <a:t>איפה: </a:t>
-            </a:r>
-            <a:r>
-              <a:rPr lang="he-IL" sz="1800" b="0" dirty="0">
-                <a:solidFill>
-                  <a:srgbClr val="1B242B"/>
-                </a:solidFill>
-                <a:latin typeface="Arial"/>
-                <a:cs typeface="Arial"/>
-              </a:rPr>
-              <a:t>בנקודות שבהן דיבור ורעש חזקים באותה מידה</a:t>
-            </a:r>
-          </a:p>
-          <a:p>
-            <a:pPr algn="r" rtl="1">
-              <a:spcAft>
-                <a:spcPts val="1600"/>
-              </a:spcAft>
-              <a:buNone/>
-            </a:pPr>
-            <a:r>
-              <a:rPr lang="he-IL" sz="1800" b="1" dirty="0">
-                <a:solidFill>
-                  <a:srgbClr val="2E75B6"/>
-                </a:solidFill>
-                <a:latin typeface="Arial"/>
-                <a:cs typeface="Arial"/>
-              </a:rPr>
-              <a:t>מה יש שם: </a:t>
-            </a:r>
-            <a:r>
-              <a:rPr lang="he-IL" sz="1800" b="0" dirty="0">
-                <a:solidFill>
-                  <a:srgbClr val="1B242B"/>
-                </a:solidFill>
-                <a:latin typeface="Arial"/>
-                <a:cs typeface="Arial"/>
-              </a:rPr>
-              <a:t>עיצורים חלשים, ושם הפאזה הרועשת הכי רחוקה מהנקייה</a:t>
-            </a:r>
-          </a:p>
-        </p:txBody>
-      </p:sp>
-      <p:sp>
-        <p:nvSpPr>
-          <p:cNvPr id="109" name="Rounded Rectangle 15"/>
-          <p:cNvSpPr/>
-          <p:nvPr/>
-        </p:nvSpPr>
-        <p:spPr>
-          <a:xfrm>
-            <a:off x="4242816" y="1325880"/>
-            <a:ext cx="3657600" cy="3566160"/>
-          </a:xfrm>
-          <a:prstGeom prst="roundRect">
-            <a:avLst>
-              <a:gd name="adj" fmla="val 8000"/>
-            </a:avLst>
-          </a:prstGeom>
-          <a:solidFill>
-            <a:srgbClr val="E2F0D9"/>
-          </a:solidFill>
-          <a:ln w="22225">
-            <a:solidFill>
-              <a:srgbClr val="548235"/>
-            </a:solidFill>
-          </a:ln>
-          <a:effectLst/>
-        </p:spPr>
-        <p:style>
-          <a:lnRef idx="1">
-            <a:schemeClr val="accent1"/>
-          </a:lnRef>
-          <a:fillRef idx="3">
-            <a:schemeClr val="accent1"/>
-          </a:fillRef>
-          <a:effectRef idx="2">
-            <a:schemeClr val="accent1"/>
-          </a:effectRef>
-          <a:fontRef idx="minor">
-            <a:schemeClr val="lt1"/>
-          </a:fontRef>
-        </p:style>
-        <p:txBody>
-          <a:bodyPr wrap="square" lIns="45720" tIns="27432" rIns="45720" bIns="27432" rtlCol="0" anchor="t">
-            <a:noAutofit/>
-          </a:bodyPr>
-          <a:lstStyle/>
-          <a:p>
-            <a:pPr algn="r" rtl="1">
-              <a:spcAft>
-                <a:spcPts val="0"/>
-              </a:spcAft>
-              <a:buNone/>
-            </a:pPr>
-            <a:endParaRPr/>
-          </a:p>
-        </p:txBody>
-      </p:sp>
-      <p:sp>
-        <p:nvSpPr>
-          <p:cNvPr id="110" name="TextBox 18"/>
-          <p:cNvSpPr txBox="1"/>
-          <p:nvPr/>
-        </p:nvSpPr>
-        <p:spPr>
-          <a:xfrm>
-            <a:off x="4379976" y="1463040"/>
-            <a:ext cx="3383280" cy="502920"/>
-          </a:xfrm>
-          <a:prstGeom prst="rect">
-            <a:avLst/>
-          </a:prstGeom>
-          <a:noFill/>
-        </p:spPr>
-        <p:txBody>
-          <a:bodyPr wrap="square" lIns="45720" tIns="27432" rIns="45720" bIns="27432" rtlCol="0" anchor="ctr">
-            <a:noAutofit/>
-          </a:bodyPr>
-          <a:lstStyle/>
-          <a:p>
-            <a:pPr algn="r" rtl="1">
-              <a:spcAft>
-                <a:spcPts val="0"/>
-              </a:spcAft>
-              <a:buNone/>
-            </a:pPr>
-            <a:r>
-              <a:rPr lang="he-IL" sz="2200" b="1" dirty="0">
-                <a:solidFill>
-                  <a:srgbClr val="548235"/>
-                </a:solidFill>
-                <a:latin typeface="Arial"/>
-                <a:cs typeface="Arial"/>
-              </a:rPr>
-              <a:t>איך משפרים עיצורים</a:t>
-            </a:r>
-          </a:p>
-        </p:txBody>
-      </p:sp>
-      <p:sp>
-        <p:nvSpPr>
-          <p:cNvPr id="111" name="TextBox 13"/>
-          <p:cNvSpPr txBox="1"/>
-          <p:nvPr/>
-        </p:nvSpPr>
-        <p:spPr>
-          <a:xfrm>
-            <a:off x="4379976" y="2148840"/>
-            <a:ext cx="3383280" cy="3017520"/>
-          </a:xfrm>
-          <a:prstGeom prst="rect">
-            <a:avLst/>
-          </a:prstGeom>
-          <a:noFill/>
-        </p:spPr>
-        <p:txBody>
-          <a:bodyPr wrap="square" lIns="45720" tIns="27432" rIns="45720" bIns="27432" rtlCol="0" anchor="t">
-            <a:noAutofit/>
-          </a:bodyPr>
-          <a:lstStyle/>
-          <a:p>
-            <a:pPr algn="r" rtl="1">
-              <a:spcAft>
-                <a:spcPts val="1600"/>
-              </a:spcAft>
-              <a:buNone/>
-            </a:pPr>
-            <a:r>
-              <a:rPr lang="he-IL" sz="1800" b="1" dirty="0">
-                <a:solidFill>
-                  <a:srgbClr val="548235"/>
-                </a:solidFill>
-                <a:latin typeface="Arial"/>
-                <a:cs typeface="Arial"/>
-              </a:rPr>
-              <a:t>לא עוד נתונים: </a:t>
-            </a:r>
-            <a:r>
-              <a:rPr lang="he-IL" sz="1800" b="0" dirty="0">
-                <a:solidFill>
-                  <a:srgbClr val="1B242B"/>
-                </a:solidFill>
-                <a:latin typeface="Arial"/>
-                <a:cs typeface="Arial"/>
-              </a:rPr>
-              <a:t>פי 3 גיוון כמעט לא עזר, bias ולא variance</a:t>
-            </a:r>
-          </a:p>
-          <a:p>
-            <a:pPr algn="r" rtl="1">
-              <a:spcAft>
-                <a:spcPts val="1600"/>
-              </a:spcAft>
-              <a:buNone/>
-            </a:pPr>
-            <a:r>
-              <a:rPr lang="he-IL" sz="1800" b="1" dirty="0">
-                <a:solidFill>
-                  <a:srgbClr val="548235"/>
-                </a:solidFill>
-                <a:latin typeface="Arial"/>
-                <a:cs typeface="Arial"/>
-              </a:rPr>
-              <a:t>כן: </a:t>
-            </a:r>
-            <a:r>
-              <a:rPr lang="he-IL" sz="1800" b="0" dirty="0">
-                <a:solidFill>
-                  <a:srgbClr val="1B242B"/>
-                </a:solidFill>
-                <a:latin typeface="Arial"/>
-                <a:cs typeface="Arial"/>
-              </a:rPr>
-              <a:t>הפסד שנותן להם משקל, ומסכה מרוכבת או אומדן פאזה</a:t>
-            </a:r>
-          </a:p>
-        </p:txBody>
-      </p:sp>
-      <p:sp>
-        <p:nvSpPr>
-          <p:cNvPr id="112" name="Rounded Rectangle 21"/>
-          <p:cNvSpPr/>
-          <p:nvPr/>
-        </p:nvSpPr>
-        <p:spPr>
-          <a:xfrm>
-            <a:off x="411480" y="1325880"/>
-            <a:ext cx="3657600" cy="3566160"/>
-          </a:xfrm>
-          <a:prstGeom prst="roundRect">
-            <a:avLst>
-              <a:gd name="adj" fmla="val 8000"/>
-            </a:avLst>
-          </a:prstGeom>
-          <a:solidFill>
-            <a:srgbClr val="FBE5D6"/>
-          </a:solidFill>
-          <a:ln w="22225">
-            <a:solidFill>
-              <a:srgbClr val="C55A11"/>
-            </a:solidFill>
-          </a:ln>
-          <a:effectLst/>
-        </p:spPr>
-        <p:style>
-          <a:lnRef idx="1">
-            <a:schemeClr val="accent1"/>
-          </a:lnRef>
-          <a:fillRef idx="3">
-            <a:schemeClr val="accent1"/>
-          </a:fillRef>
-          <a:effectRef idx="2">
-            <a:schemeClr val="accent1"/>
-          </a:effectRef>
-          <a:fontRef idx="minor">
-            <a:schemeClr val="lt1"/>
-          </a:fontRef>
-        </p:style>
-        <p:txBody>
-          <a:bodyPr wrap="square" lIns="45720" tIns="27432" rIns="45720" bIns="27432" rtlCol="0" anchor="t">
-            <a:noAutofit/>
-          </a:bodyPr>
-          <a:lstStyle/>
-          <a:p>
-            <a:pPr algn="r" rtl="1">
-              <a:spcAft>
-                <a:spcPts val="0"/>
-              </a:spcAft>
-              <a:buNone/>
-            </a:pPr>
-            <a:endParaRPr/>
-          </a:p>
-        </p:txBody>
-      </p:sp>
-      <p:sp>
-        <p:nvSpPr>
-          <p:cNvPr id="113" name="TextBox 24"/>
-          <p:cNvSpPr txBox="1"/>
-          <p:nvPr/>
-        </p:nvSpPr>
-        <p:spPr>
-          <a:xfrm>
-            <a:off x="548640" y="1463040"/>
-            <a:ext cx="3383280" cy="502920"/>
-          </a:xfrm>
-          <a:prstGeom prst="rect">
-            <a:avLst/>
-          </a:prstGeom>
-          <a:noFill/>
-        </p:spPr>
-        <p:txBody>
-          <a:bodyPr wrap="square" lIns="45720" tIns="27432" rIns="45720" bIns="27432" rtlCol="0" anchor="ctr">
-            <a:noAutofit/>
-          </a:bodyPr>
-          <a:lstStyle/>
-          <a:p>
-            <a:pPr algn="r" rtl="1">
-              <a:spcAft>
-                <a:spcPts val="0"/>
-              </a:spcAft>
-              <a:buNone/>
-            </a:pPr>
-            <a:r>
-              <a:rPr lang="he-IL" sz="2200" b="1" dirty="0">
-                <a:solidFill>
-                  <a:srgbClr val="C55A11"/>
-                </a:solidFill>
-                <a:latin typeface="Arial"/>
-                <a:cs typeface="Arial"/>
-              </a:rPr>
-              <a:t>יעילות ומה הלאה</a:t>
-            </a:r>
-          </a:p>
-        </p:txBody>
-      </p:sp>
-      <p:sp>
-        <p:nvSpPr>
-          <p:cNvPr id="114" name="TextBox 13"/>
-          <p:cNvSpPr txBox="1"/>
-          <p:nvPr/>
-        </p:nvSpPr>
-        <p:spPr>
-          <a:xfrm>
-            <a:off x="548640" y="2148840"/>
-            <a:ext cx="3383280" cy="3017520"/>
-          </a:xfrm>
-          <a:prstGeom prst="rect">
-            <a:avLst/>
-          </a:prstGeom>
-          <a:noFill/>
-        </p:spPr>
-        <p:txBody>
-          <a:bodyPr wrap="square" lIns="45720" tIns="27432" rIns="45720" bIns="27432" rtlCol="0" anchor="t">
-            <a:noAutofit/>
-          </a:bodyPr>
-          <a:lstStyle/>
-          <a:p>
-            <a:pPr algn="r" rtl="1">
-              <a:spcAft>
-                <a:spcPts val="1600"/>
-              </a:spcAft>
-              <a:buNone/>
-            </a:pPr>
-            <a:r>
-              <a:rPr lang="he-IL" sz="1800" b="1" dirty="0">
-                <a:solidFill>
-                  <a:srgbClr val="C55A11"/>
-                </a:solidFill>
-                <a:latin typeface="Arial"/>
-                <a:cs typeface="Arial"/>
-              </a:rPr>
-              <a:t>קטן ומהיר: </a:t>
-            </a:r>
-            <a:r>
-              <a:rPr lang="he-IL" sz="1800" b="0" dirty="0">
-                <a:solidFill>
-                  <a:srgbClr val="1B242B"/>
-                </a:solidFill>
-                <a:latin typeface="Arial"/>
-                <a:cs typeface="Arial"/>
-              </a:rPr>
-              <a:t>פי 22 מהר מזמן אמת על Mac, במיליון פרמטרים</a:t>
-            </a:r>
-          </a:p>
-          <a:p>
-            <a:pPr algn="r" rtl="1">
-              <a:spcAft>
-                <a:spcPts val="1600"/>
-              </a:spcAft>
-              <a:buNone/>
-            </a:pPr>
-            <a:r>
-              <a:rPr lang="he-IL" sz="1800" b="1" dirty="0">
-                <a:solidFill>
-                  <a:srgbClr val="C55A11"/>
-                </a:solidFill>
-                <a:latin typeface="Arial"/>
-                <a:cs typeface="Arial"/>
-              </a:rPr>
-              <a:t>ה-Global: </a:t>
-            </a:r>
-            <a:r>
-              <a:rPr lang="he-IL" sz="1800" b="0" dirty="0">
-                <a:solidFill>
-                  <a:srgbClr val="1B242B"/>
-                </a:solidFill>
-                <a:latin typeface="Arial"/>
-                <a:cs typeface="Arial"/>
-              </a:rPr>
-              <a:t>ה-Attention לאורך הזמן, יקר ולא סיבתי. בלעדיו, שיחה חיה?</a:t>
-            </a:r>
-          </a:p>
-        </p:txBody>
-      </p:sp>
-      <p:sp>
-        <p:nvSpPr>
-          <p:cNvPr id="115" name="Rounded Rectangle 23"/>
-          <p:cNvSpPr/>
-          <p:nvPr/>
-        </p:nvSpPr>
-        <p:spPr>
-          <a:xfrm>
-            <a:off x="411480" y="5833872"/>
-            <a:ext cx="11320272" cy="457200"/>
-          </a:xfrm>
-          <a:prstGeom prst="roundRect">
-            <a:avLst>
-              <a:gd name="adj" fmla="val 8000"/>
-            </a:avLst>
-          </a:prstGeom>
-          <a:solidFill>
-            <a:srgbClr val="DEEAF6"/>
-          </a:solidFill>
-          <a:ln w="15875">
-            <a:solidFill>
-              <a:srgbClr val="1F4E79"/>
-            </a:solidFill>
-          </a:ln>
-          <a:effectLst/>
-        </p:spPr>
-        <p:style>
-          <a:lnRef idx="1">
-            <a:schemeClr val="accent1"/>
-          </a:lnRef>
-          <a:fillRef idx="3">
-            <a:schemeClr val="accent1"/>
-          </a:fillRef>
-          <a:effectRef idx="2">
-            <a:schemeClr val="accent1"/>
-          </a:effectRef>
-          <a:fontRef idx="minor">
-            <a:schemeClr val="lt1"/>
-          </a:fontRef>
-        </p:style>
-        <p:txBody>
-          <a:bodyPr rtlCol="0" anchor="ctr"/>
-          <a:lstStyle/>
-          <a:p/>
-        </p:txBody>
-      </p:sp>
-      <p:sp>
-        <p:nvSpPr>
-          <p:cNvPr id="116" name="TextBox 24"/>
-          <p:cNvSpPr txBox="1"/>
-          <p:nvPr/>
-        </p:nvSpPr>
-        <p:spPr>
-          <a:xfrm>
-            <a:off x="502920" y="5833872"/>
-            <a:ext cx="11137392" cy="457200"/>
-          </a:xfrm>
-          <a:prstGeom prst="rect">
-            <a:avLst/>
-          </a:prstGeom>
-          <a:noFill/>
-        </p:spPr>
-        <p:txBody>
-          <a:bodyPr wrap="square" lIns="45720" rIns="45720" tIns="27432" bIns="27432" anchor="ctr" rtlCol="0">
-            <a:spAutoFit/>
-          </a:bodyPr>
-          <a:lstStyle/>
-          <a:p>
-            <a:pPr algn="ctr" rtl="1">
-              <a:spcAft>
-                <a:spcPts val="0"/>
-              </a:spcAft>
-            </a:pPr>
-            <a:r>
-              <a:rPr sz="1500" b="1" lang="he-IL">
-                <a:solidFill>
-                  <a:srgbClr val="1F4E79"/>
-                </a:solidFill>
-                <a:latin typeface="Arial"/>
-                <a:cs typeface="Arial"/>
-              </a:rPr>
-              <a:t>המסקנה: </a:t>
-            </a:r>
-            <a:r>
-              <a:rPr sz="1500" b="0" lang="he-IL">
-                <a:solidFill>
-                  <a:srgbClr val="1B242B"/>
-                </a:solidFill>
-                <a:latin typeface="Arial"/>
-                <a:cs typeface="Arial"/>
-              </a:rPr>
-              <a:t>ב-SI-SDR המודל קרוב לתקרה. מה שנשאר לאוזן הוא העיצורים והפאזה, ושם צריך לשפר, לא בכמות הנתונים</a:t>
-            </a:r>
-          </a:p>
-        </p:txBody>
-      </p:sp>
-    </p:spTree>
-  </p:cSld>
-  <p:clrMapOvr>
-    <a:masterClrMapping/>
-  </p:clrMapOvr>
-</p:sld>
-</file>
-
 <file path=ppt/slides/slide2.xml><?xml version="1.0" encoding="utf-8"?>
 <p:sld xmlns:a="http://schemas.openxmlformats.org/drawingml/2006/main" xmlns:r="http://schemas.openxmlformats.org/officeDocument/2006/relationships" xmlns:p="http://schemas.openxmlformats.org/presentationml/2006/main">
   <p:cSld>
@@ -22762,7 +21173,7 @@
                 <a:latin typeface="Arial"/>
                 <a:cs typeface="Arial"/>
               </a:rPr>
-              <a:t>הנתונים והמדדים</a:t>
+              <a:t>המודל במבט אחד</a:t>
             </a:r>
           </a:p>
         </p:txBody>
@@ -22936,60 +21347,35 @@
                 <a:latin typeface="Arial"/>
                 <a:cs typeface="Arial"/>
               </a:rPr>
-              <a:t>3</a:t>
-            </a:r>
-          </a:p>
-        </p:txBody>
-      </p:sp>
-      <p:sp>
-        <p:nvSpPr>
-          <p:cNvPr id="8" name="Rounded Rectangle 7"/>
-          <p:cNvSpPr/>
-          <p:nvPr/>
-        </p:nvSpPr>
-        <p:spPr>
-          <a:xfrm>
-            <a:off x="8031175" y="1417320"/>
-            <a:ext cx="3474720" cy="1600200"/>
-          </a:xfrm>
-          <a:prstGeom prst="roundRect">
-            <a:avLst>
-              <a:gd name="adj" fmla="val 12000"/>
-            </a:avLst>
-          </a:prstGeom>
-          <a:solidFill>
-            <a:srgbClr val="DCEBF7"/>
-          </a:solidFill>
-          <a:ln w="19050">
-            <a:solidFill>
-              <a:srgbClr val="2E75B6"/>
-            </a:solidFill>
-          </a:ln>
-          <a:effectLst/>
-        </p:spPr>
-        <p:style>
-          <a:lnRef idx="1">
-            <a:schemeClr val="accent1"/>
-          </a:lnRef>
-          <a:fillRef idx="3">
-            <a:schemeClr val="accent1"/>
-          </a:fillRef>
-          <a:effectRef idx="2">
-            <a:schemeClr val="accent1"/>
-          </a:effectRef>
-          <a:fontRef idx="minor">
-            <a:schemeClr val="lt1"/>
-          </a:fontRef>
-        </p:style>
-        <p:txBody>
-          <a:bodyPr rtlCol="0" anchor="ctr"/>
-          <a:lstStyle/>
-          <a:p>
-            <a:pPr algn="ctr"/>
-            <a:endParaRPr/>
-          </a:p>
-        </p:txBody>
-      </p:sp>
+              <a:t>4</a:t>
+            </a:r>
+          </a:p>
+        </p:txBody>
+      </p:sp>
+      <p:pic>
+        <p:nvPicPr>
+          <p:cNvPr id="8" name="Picture 7" descr="arch_he_overview.png"/>
+          <p:cNvPicPr>
+            <a:picLocks noChangeAspect="1"/>
+          </p:cNvPicPr>
+          <p:nvPr/>
+        </p:nvPicPr>
+        <p:blipFill>
+          <a:blip r:embed="rId3"/>
+          <a:stretch>
+            <a:fillRect/>
+          </a:stretch>
+        </p:blipFill>
+        <p:spPr>
+          <a:xfrm>
+            <a:off x="1151011" y="1280160"/>
+            <a:ext cx="9889671" cy="4572000"/>
+          </a:xfrm>
+          <a:prstGeom prst="rect">
+            <a:avLst/>
+          </a:prstGeom>
+        </p:spPr>
+      </p:pic>
       <p:sp>
         <p:nvSpPr>
           <p:cNvPr id="9" name="TextBox 8"/>
@@ -22998,49 +21384,8 @@
         </p:nvSpPr>
         <p:spPr>
           <a:xfrm>
-            <a:off x="8122615" y="1508760"/>
-            <a:ext cx="3291839" cy="800100"/>
-          </a:xfrm>
-          <a:prstGeom prst="rect">
-            <a:avLst/>
-          </a:prstGeom>
-          <a:noFill/>
-        </p:spPr>
-        <p:txBody>
-          <a:bodyPr wrap="square" lIns="45720" rIns="45720" anchor="b">
-            <a:spAutoFit/>
-          </a:bodyPr>
-          <a:lstStyle/>
-          <a:p>
-            <a:pPr algn="ctr" rtl="1">
-              <a:spcAft>
-                <a:spcPts val="800"/>
-              </a:spcAft>
-              <a:buNone/>
-            </a:pPr>
-            <a:r>
-              <a:rPr lang="he-IL" sz="4000" b="1">
-                <a:solidFill>
-                  <a:srgbClr val="2E75B6"/>
-                </a:solidFill>
-                <a:latin typeface="Arial"/>
-                <a:cs typeface="Arial"/>
-              </a:rPr>
-              <a:t>10,225</a:t>
-            </a:r>
-          </a:p>
-        </p:txBody>
-      </p:sp>
-      <p:sp>
-        <p:nvSpPr>
-          <p:cNvPr id="10" name="TextBox 9"/>
-          <p:cNvSpPr txBox="1"/>
-          <p:nvPr/>
-        </p:nvSpPr>
-        <p:spPr>
-          <a:xfrm>
-            <a:off x="8122615" y="2297430"/>
-            <a:ext cx="3291839" cy="672084"/>
+            <a:off x="457200" y="5897880"/>
+            <a:ext cx="11277295" cy="457200"/>
           </a:xfrm>
           <a:prstGeom prst="rect">
             <a:avLst/>
@@ -23055,769 +21400,19 @@
           <a:p>
             <a:pPr algn="ctr" rtl="1">
               <a:spcAft>
-                <a:spcPts val="0"/>
-              </a:spcAft>
-              <a:buNone/>
-            </a:pPr>
-            <a:r>
-              <a:rPr lang="he-IL" sz="1500" b="0">
-                <a:solidFill>
-                  <a:srgbClr val="1B242B"/>
-                </a:solidFill>
-                <a:latin typeface="Arial"/>
-                <a:cs typeface="Arial"/>
-              </a:rPr>
-              <a:t>משפטי אימון, 25 דוברים, 10 רעשים</a:t>
-            </a:r>
-          </a:p>
-          <a:p>
-            <a:pPr algn="ctr" rtl="1">
-              <a:spcAft>
-                <a:spcPts val="0"/>
-              </a:spcAft>
-              <a:buNone/>
-            </a:pPr>
-            <a:r>
-              <a:rPr lang="he-IL" sz="1500" b="1">
-                <a:solidFill>
-                  <a:srgbClr val="2E75B6"/>
-                </a:solidFill>
-                <a:latin typeface="Arial"/>
-                <a:cs typeface="Arial"/>
-              </a:rPr>
-              <a:t>Epoch</a:t>
-            </a:r>
-          </a:p>
-        </p:txBody>
-      </p:sp>
-      <p:sp>
-        <p:nvSpPr>
-          <p:cNvPr id="11" name="Rounded Rectangle 10"/>
-          <p:cNvSpPr/>
-          <p:nvPr/>
-        </p:nvSpPr>
-        <p:spPr>
-          <a:xfrm>
-            <a:off x="4282135" y="1417320"/>
-            <a:ext cx="3474720" cy="1600200"/>
-          </a:xfrm>
-          <a:prstGeom prst="roundRect">
-            <a:avLst>
-              <a:gd name="adj" fmla="val 12000"/>
-            </a:avLst>
-          </a:prstGeom>
-          <a:solidFill>
-            <a:srgbClr val="FFF2CC"/>
-          </a:solidFill>
-          <a:ln w="19050">
-            <a:solidFill>
-              <a:srgbClr val="BF9000"/>
-            </a:solidFill>
-          </a:ln>
-          <a:effectLst/>
-        </p:spPr>
-        <p:style>
-          <a:lnRef idx="1">
-            <a:schemeClr val="accent1"/>
-          </a:lnRef>
-          <a:fillRef idx="3">
-            <a:schemeClr val="accent1"/>
-          </a:fillRef>
-          <a:effectRef idx="2">
-            <a:schemeClr val="accent1"/>
-          </a:effectRef>
-          <a:fontRef idx="minor">
-            <a:schemeClr val="lt1"/>
-          </a:fontRef>
-        </p:style>
-        <p:txBody>
-          <a:bodyPr rtlCol="0" anchor="ctr"/>
-          <a:lstStyle/>
-          <a:p>
-            <a:pPr algn="ctr"/>
-            <a:endParaRPr/>
-          </a:p>
-        </p:txBody>
-      </p:sp>
-      <p:sp>
-        <p:nvSpPr>
-          <p:cNvPr id="12" name="TextBox 11"/>
-          <p:cNvSpPr txBox="1"/>
-          <p:nvPr/>
-        </p:nvSpPr>
-        <p:spPr>
-          <a:xfrm>
-            <a:off x="4373575" y="1508760"/>
-            <a:ext cx="3291839" cy="800100"/>
-          </a:xfrm>
-          <a:prstGeom prst="rect">
-            <a:avLst/>
-          </a:prstGeom>
-          <a:noFill/>
-        </p:spPr>
-        <p:txBody>
-          <a:bodyPr wrap="square" lIns="45720" rIns="45720" anchor="b">
-            <a:spAutoFit/>
-          </a:bodyPr>
-          <a:lstStyle/>
-          <a:p>
-            <a:pPr algn="ctr" rtl="1">
-              <a:spcAft>
                 <a:spcPts val="800"/>
               </a:spcAft>
               <a:buNone/>
             </a:pPr>
             <a:r>
-              <a:rPr lang="he-IL" sz="4000" b="1">
-                <a:solidFill>
-                  <a:srgbClr val="BF9000"/>
-                </a:solidFill>
-                <a:latin typeface="Arial"/>
-                <a:cs typeface="Arial"/>
-              </a:rPr>
-              <a:t>1,347</a:t>
-            </a:r>
-          </a:p>
-        </p:txBody>
-      </p:sp>
-      <p:sp>
-        <p:nvSpPr>
-          <p:cNvPr id="13" name="TextBox 12"/>
-          <p:cNvSpPr txBox="1"/>
-          <p:nvPr/>
-        </p:nvSpPr>
-        <p:spPr>
-          <a:xfrm>
-            <a:off x="4373575" y="2297430"/>
-            <a:ext cx="3291839" cy="672084"/>
-          </a:xfrm>
-          <a:prstGeom prst="rect">
-            <a:avLst/>
-          </a:prstGeom>
-          <a:noFill/>
-        </p:spPr>
-        <p:txBody>
-          <a:bodyPr wrap="square" lIns="45720" rIns="45720" anchor="t">
-            <a:spAutoFit/>
-          </a:bodyPr>
-          <a:lstStyle/>
-          <a:p>
-            <a:pPr algn="ctr" rtl="1">
-              <a:spcAft>
-                <a:spcPts val="0"/>
-              </a:spcAft>
-              <a:buNone/>
-            </a:pPr>
-            <a:r>
-              <a:rPr lang="he-IL" sz="1500" b="0">
-                <a:solidFill>
-                  <a:srgbClr val="1B242B"/>
-                </a:solidFill>
-                <a:latin typeface="Arial"/>
-                <a:cs typeface="Arial"/>
-              </a:rPr>
-              <a:t>משפטים של 3 דוברים אחרים</a:t>
-            </a:r>
-          </a:p>
-          <a:p>
-            <a:pPr algn="ctr" rtl="1">
-              <a:spcAft>
-                <a:spcPts val="0"/>
-              </a:spcAft>
-              <a:buNone/>
-            </a:pPr>
-            <a:r>
-              <a:rPr lang="he-IL" sz="1500" b="1">
-                <a:solidFill>
-                  <a:srgbClr val="BF9000"/>
-                </a:solidFill>
-                <a:latin typeface="Arial"/>
-                <a:cs typeface="Arial"/>
-              </a:rPr>
-              <a:t>Validation</a:t>
-            </a:r>
-          </a:p>
-        </p:txBody>
-      </p:sp>
-      <p:sp>
-        <p:nvSpPr>
-          <p:cNvPr id="14" name="Rounded Rectangle 13"/>
-          <p:cNvSpPr/>
-          <p:nvPr/>
-        </p:nvSpPr>
-        <p:spPr>
-          <a:xfrm>
-            <a:off x="533095" y="1417320"/>
-            <a:ext cx="3474720" cy="1600200"/>
-          </a:xfrm>
-          <a:prstGeom prst="roundRect">
-            <a:avLst>
-              <a:gd name="adj" fmla="val 12000"/>
-            </a:avLst>
-          </a:prstGeom>
-          <a:solidFill>
-            <a:srgbClr val="E2F0D9"/>
-          </a:solidFill>
-          <a:ln w="19050">
-            <a:solidFill>
-              <a:srgbClr val="548235"/>
-            </a:solidFill>
-          </a:ln>
-          <a:effectLst/>
-        </p:spPr>
-        <p:style>
-          <a:lnRef idx="1">
-            <a:schemeClr val="accent1"/>
-          </a:lnRef>
-          <a:fillRef idx="3">
-            <a:schemeClr val="accent1"/>
-          </a:fillRef>
-          <a:effectRef idx="2">
-            <a:schemeClr val="accent1"/>
-          </a:effectRef>
-          <a:fontRef idx="minor">
-            <a:schemeClr val="lt1"/>
-          </a:fontRef>
-        </p:style>
-        <p:txBody>
-          <a:bodyPr rtlCol="0" anchor="ctr"/>
-          <a:lstStyle/>
-          <a:p>
-            <a:pPr algn="ctr"/>
-            <a:endParaRPr/>
-          </a:p>
-        </p:txBody>
-      </p:sp>
-      <p:sp>
-        <p:nvSpPr>
-          <p:cNvPr id="15" name="TextBox 14"/>
-          <p:cNvSpPr txBox="1"/>
-          <p:nvPr/>
-        </p:nvSpPr>
-        <p:spPr>
-          <a:xfrm>
-            <a:off x="624535" y="1508760"/>
-            <a:ext cx="3291839" cy="800100"/>
-          </a:xfrm>
-          <a:prstGeom prst="rect">
-            <a:avLst/>
-          </a:prstGeom>
-          <a:noFill/>
-        </p:spPr>
-        <p:txBody>
-          <a:bodyPr wrap="square" lIns="45720" rIns="45720" anchor="b">
-            <a:spAutoFit/>
-          </a:bodyPr>
-          <a:lstStyle/>
-          <a:p>
-            <a:pPr algn="ctr" rtl="1">
-              <a:spcAft>
-                <a:spcPts val="800"/>
-              </a:spcAft>
-              <a:buNone/>
-            </a:pPr>
-            <a:r>
-              <a:rPr lang="he-IL" sz="4000" b="1">
-                <a:solidFill>
-                  <a:srgbClr val="548235"/>
-                </a:solidFill>
-                <a:latin typeface="Arial"/>
-                <a:cs typeface="Arial"/>
-              </a:rPr>
-              <a:t>824</a:t>
-            </a:r>
-          </a:p>
-        </p:txBody>
-      </p:sp>
-      <p:sp>
-        <p:nvSpPr>
-          <p:cNvPr id="16" name="TextBox 15"/>
-          <p:cNvSpPr txBox="1"/>
-          <p:nvPr/>
-        </p:nvSpPr>
-        <p:spPr>
-          <a:xfrm>
-            <a:off x="624535" y="2297430"/>
-            <a:ext cx="3291839" cy="672084"/>
-          </a:xfrm>
-          <a:prstGeom prst="rect">
-            <a:avLst/>
-          </a:prstGeom>
-          <a:noFill/>
-        </p:spPr>
-        <p:txBody>
-          <a:bodyPr wrap="square" lIns="45720" rIns="45720" anchor="t">
-            <a:spAutoFit/>
-          </a:bodyPr>
-          <a:lstStyle/>
-          <a:p>
-            <a:pPr algn="ctr" rtl="1">
-              <a:spcAft>
-                <a:spcPts val="0"/>
-              </a:spcAft>
-              <a:buNone/>
-            </a:pPr>
-            <a:r>
-              <a:rPr lang="he-IL" sz="1500" b="0">
-                <a:solidFill>
-                  <a:srgbClr val="1B242B"/>
-                </a:solidFill>
-                <a:latin typeface="Arial"/>
-                <a:cs typeface="Arial"/>
-              </a:rPr>
-              <a:t>משפטים, דוברים ורעשים חדשים</a:t>
-            </a:r>
-          </a:p>
-          <a:p>
-            <a:pPr algn="ctr" rtl="1">
-              <a:spcAft>
-                <a:spcPts val="0"/>
-              </a:spcAft>
-              <a:buNone/>
-            </a:pPr>
-            <a:r>
-              <a:rPr lang="he-IL" sz="1500" b="1">
-                <a:solidFill>
-                  <a:srgbClr val="548235"/>
-                </a:solidFill>
-                <a:latin typeface="Arial"/>
-                <a:cs typeface="Arial"/>
-              </a:rPr>
-              <a:t>Test</a:t>
-            </a:r>
-          </a:p>
-        </p:txBody>
-      </p:sp>
-      <p:sp>
-        <p:nvSpPr>
-          <p:cNvPr id="17" name="TextBox 16"/>
-          <p:cNvSpPr txBox="1"/>
-          <p:nvPr/>
-        </p:nvSpPr>
-        <p:spPr>
-          <a:xfrm>
-            <a:off x="548640" y="3291840"/>
-            <a:ext cx="11094415" cy="457200"/>
-          </a:xfrm>
-          <a:prstGeom prst="rect">
-            <a:avLst/>
-          </a:prstGeom>
-          <a:noFill/>
-        </p:spPr>
-        <p:txBody>
-          <a:bodyPr wrap="square" lIns="45720" rIns="45720" anchor="t">
-            <a:spAutoFit/>
-          </a:bodyPr>
-          <a:lstStyle/>
-          <a:p>
-            <a:pPr algn="ctr" rtl="1">
-              <a:spcAft>
-                <a:spcPts val="800"/>
-              </a:spcAft>
-              <a:buNone/>
-            </a:pPr>
-            <a:r>
-              <a:rPr lang="he-IL" sz="1700" b="0">
+              <a:rPr lang="he-IL" sz="1600" b="0">
                 <a:solidFill>
                   <a:srgbClr val="5A636A"/>
                 </a:solidFill>
                 <a:latin typeface="Arial"/>
                 <a:cs typeface="Arial"/>
               </a:rPr>
-              <a:t>SNR של 0 עד ‎15 [dB]‏ באימון, 2.5 עד ‎17.5 [dB]‏ בבדיקה, דגימה ב-‎16 [kHz]‏</a:t>
-            </a:r>
-          </a:p>
-        </p:txBody>
-      </p:sp>
-      <p:sp>
-        <p:nvSpPr>
-          <p:cNvPr id="18" name="Rounded Rectangle 17"/>
-          <p:cNvSpPr/>
-          <p:nvPr/>
-        </p:nvSpPr>
-        <p:spPr>
-          <a:xfrm>
-            <a:off x="8031175" y="3977639"/>
-            <a:ext cx="3474720" cy="1600200"/>
-          </a:xfrm>
-          <a:prstGeom prst="roundRect">
-            <a:avLst>
-              <a:gd name="adj" fmla="val 12000"/>
-            </a:avLst>
-          </a:prstGeom>
-          <a:solidFill>
-            <a:srgbClr val="EDE4F5"/>
-          </a:solidFill>
-          <a:ln w="19050">
-            <a:solidFill>
-              <a:srgbClr val="7030A0"/>
-            </a:solidFill>
-          </a:ln>
-          <a:effectLst/>
-        </p:spPr>
-        <p:style>
-          <a:lnRef idx="1">
-            <a:schemeClr val="accent1"/>
-          </a:lnRef>
-          <a:fillRef idx="3">
-            <a:schemeClr val="accent1"/>
-          </a:fillRef>
-          <a:effectRef idx="2">
-            <a:schemeClr val="accent1"/>
-          </a:effectRef>
-          <a:fontRef idx="minor">
-            <a:schemeClr val="lt1"/>
-          </a:fontRef>
-        </p:style>
-        <p:txBody>
-          <a:bodyPr rtlCol="0" anchor="ctr"/>
-          <a:lstStyle/>
-          <a:p>
-            <a:pPr algn="ctr"/>
-            <a:endParaRPr/>
-          </a:p>
-        </p:txBody>
-      </p:sp>
-      <p:sp>
-        <p:nvSpPr>
-          <p:cNvPr id="19" name="TextBox 18"/>
-          <p:cNvSpPr txBox="1"/>
-          <p:nvPr/>
-        </p:nvSpPr>
-        <p:spPr>
-          <a:xfrm>
-            <a:off x="8122615" y="4069079"/>
-            <a:ext cx="3291839" cy="800100"/>
-          </a:xfrm>
-          <a:prstGeom prst="rect">
-            <a:avLst/>
-          </a:prstGeom>
-          <a:noFill/>
-        </p:spPr>
-        <p:txBody>
-          <a:bodyPr wrap="square" lIns="45720" rIns="45720" anchor="b">
-            <a:spAutoFit/>
-          </a:bodyPr>
-          <a:lstStyle/>
-          <a:p>
-            <a:pPr algn="ctr" rtl="1">
-              <a:spcAft>
-                <a:spcPts val="800"/>
-              </a:spcAft>
-              <a:buNone/>
-            </a:pPr>
-            <a:r>
-              <a:rPr lang="he-IL" sz="2800" b="1">
-                <a:solidFill>
-                  <a:srgbClr val="7030A0"/>
-                </a:solidFill>
-                <a:latin typeface="Arial"/>
-                <a:cs typeface="Arial"/>
-              </a:rPr>
-              <a:t>PESQ</a:t>
-            </a:r>
-          </a:p>
-        </p:txBody>
-      </p:sp>
-      <p:sp>
-        <p:nvSpPr>
-          <p:cNvPr id="20" name="TextBox 19"/>
-          <p:cNvSpPr txBox="1"/>
-          <p:nvPr/>
-        </p:nvSpPr>
-        <p:spPr>
-          <a:xfrm>
-            <a:off x="8122615" y="4857750"/>
-            <a:ext cx="3291839" cy="672084"/>
-          </a:xfrm>
-          <a:prstGeom prst="rect">
-            <a:avLst/>
-          </a:prstGeom>
-          <a:noFill/>
-        </p:spPr>
-        <p:txBody>
-          <a:bodyPr wrap="square" lIns="45720" rIns="45720" anchor="t">
-            <a:spAutoFit/>
-          </a:bodyPr>
-          <a:lstStyle/>
-          <a:p>
-            <a:pPr algn="ctr" rtl="1">
-              <a:spcAft>
-                <a:spcPts val="0"/>
-              </a:spcAft>
-              <a:buNone/>
-            </a:pPr>
-            <a:r>
-              <a:rPr lang="he-IL" sz="1500" b="0">
-                <a:solidFill>
-                  <a:srgbClr val="1B242B"/>
-                </a:solidFill>
-                <a:latin typeface="Arial"/>
-                <a:cs typeface="Arial"/>
-              </a:rPr>
-              <a:t>איכות כפי שהאוזן שומעת, 1 עד 4.5</a:t>
-            </a:r>
-          </a:p>
-        </p:txBody>
-      </p:sp>
-      <p:sp>
-        <p:nvSpPr>
-          <p:cNvPr id="21" name="Rounded Rectangle 20"/>
-          <p:cNvSpPr/>
-          <p:nvPr/>
-        </p:nvSpPr>
-        <p:spPr>
-          <a:xfrm>
-            <a:off x="4282135" y="3977639"/>
-            <a:ext cx="3474720" cy="1600200"/>
-          </a:xfrm>
-          <a:prstGeom prst="roundRect">
-            <a:avLst>
-              <a:gd name="adj" fmla="val 12000"/>
-            </a:avLst>
-          </a:prstGeom>
-          <a:solidFill>
-            <a:srgbClr val="FBE5D6"/>
-          </a:solidFill>
-          <a:ln w="19050">
-            <a:solidFill>
-              <a:srgbClr val="C55A11"/>
-            </a:solidFill>
-          </a:ln>
-          <a:effectLst/>
-        </p:spPr>
-        <p:style>
-          <a:lnRef idx="1">
-            <a:schemeClr val="accent1"/>
-          </a:lnRef>
-          <a:fillRef idx="3">
-            <a:schemeClr val="accent1"/>
-          </a:fillRef>
-          <a:effectRef idx="2">
-            <a:schemeClr val="accent1"/>
-          </a:effectRef>
-          <a:fontRef idx="minor">
-            <a:schemeClr val="lt1"/>
-          </a:fontRef>
-        </p:style>
-        <p:txBody>
-          <a:bodyPr rtlCol="0" anchor="ctr"/>
-          <a:lstStyle/>
-          <a:p>
-            <a:pPr algn="ctr"/>
-            <a:endParaRPr/>
-          </a:p>
-        </p:txBody>
-      </p:sp>
-      <p:sp>
-        <p:nvSpPr>
-          <p:cNvPr id="22" name="TextBox 21"/>
-          <p:cNvSpPr txBox="1"/>
-          <p:nvPr/>
-        </p:nvSpPr>
-        <p:spPr>
-          <a:xfrm>
-            <a:off x="4373575" y="4069079"/>
-            <a:ext cx="3291839" cy="800100"/>
-          </a:xfrm>
-          <a:prstGeom prst="rect">
-            <a:avLst/>
-          </a:prstGeom>
-          <a:noFill/>
-        </p:spPr>
-        <p:txBody>
-          <a:bodyPr wrap="square" lIns="45720" rIns="45720" anchor="b">
-            <a:spAutoFit/>
-          </a:bodyPr>
-          <a:lstStyle/>
-          <a:p>
-            <a:pPr algn="ctr" rtl="1">
-              <a:spcAft>
-                <a:spcPts val="800"/>
-              </a:spcAft>
-              <a:buNone/>
-            </a:pPr>
-            <a:r>
-              <a:rPr lang="he-IL" sz="2800" b="1">
-                <a:solidFill>
-                  <a:srgbClr val="C55A11"/>
-                </a:solidFill>
-                <a:latin typeface="Arial"/>
-                <a:cs typeface="Arial"/>
-              </a:rPr>
-              <a:t>STOI, ESTOI</a:t>
-            </a:r>
-          </a:p>
-        </p:txBody>
-      </p:sp>
-      <p:sp>
-        <p:nvSpPr>
-          <p:cNvPr id="23" name="TextBox 22"/>
-          <p:cNvSpPr txBox="1"/>
-          <p:nvPr/>
-        </p:nvSpPr>
-        <p:spPr>
-          <a:xfrm>
-            <a:off x="4373575" y="4857750"/>
-            <a:ext cx="3291839" cy="672084"/>
-          </a:xfrm>
-          <a:prstGeom prst="rect">
-            <a:avLst/>
-          </a:prstGeom>
-          <a:noFill/>
-        </p:spPr>
-        <p:txBody>
-          <a:bodyPr wrap="square" lIns="45720" rIns="45720" anchor="t">
-            <a:spAutoFit/>
-          </a:bodyPr>
-          <a:lstStyle/>
-          <a:p>
-            <a:pPr algn="ctr" rtl="1">
-              <a:spcAft>
-                <a:spcPts val="0"/>
-              </a:spcAft>
-              <a:buNone/>
-            </a:pPr>
-            <a:r>
-              <a:rPr lang="he-IL" sz="1500" b="0">
-                <a:solidFill>
-                  <a:srgbClr val="1B242B"/>
-                </a:solidFill>
-                <a:latin typeface="Arial"/>
-                <a:cs typeface="Arial"/>
-              </a:rPr>
-              <a:t>מובנות, 0 עד 1</a:t>
-            </a:r>
-          </a:p>
-        </p:txBody>
-      </p:sp>
-      <p:sp>
-        <p:nvSpPr>
-          <p:cNvPr id="24" name="Rounded Rectangle 23"/>
-          <p:cNvSpPr/>
-          <p:nvPr/>
-        </p:nvSpPr>
-        <p:spPr>
-          <a:xfrm>
-            <a:off x="533095" y="3977639"/>
-            <a:ext cx="3474720" cy="1600200"/>
-          </a:xfrm>
-          <a:prstGeom prst="roundRect">
-            <a:avLst>
-              <a:gd name="adj" fmla="val 12000"/>
-            </a:avLst>
-          </a:prstGeom>
-          <a:solidFill>
-            <a:srgbClr val="DCEBF7"/>
-          </a:solidFill>
-          <a:ln w="19050">
-            <a:solidFill>
-              <a:srgbClr val="2E75B6"/>
-            </a:solidFill>
-          </a:ln>
-          <a:effectLst/>
-        </p:spPr>
-        <p:style>
-          <a:lnRef idx="1">
-            <a:schemeClr val="accent1"/>
-          </a:lnRef>
-          <a:fillRef idx="3">
-            <a:schemeClr val="accent1"/>
-          </a:fillRef>
-          <a:effectRef idx="2">
-            <a:schemeClr val="accent1"/>
-          </a:effectRef>
-          <a:fontRef idx="minor">
-            <a:schemeClr val="lt1"/>
-          </a:fontRef>
-        </p:style>
-        <p:txBody>
-          <a:bodyPr rtlCol="0" anchor="ctr"/>
-          <a:lstStyle/>
-          <a:p>
-            <a:pPr algn="ctr"/>
-            <a:endParaRPr/>
-          </a:p>
-        </p:txBody>
-      </p:sp>
-      <p:sp>
-        <p:nvSpPr>
-          <p:cNvPr id="25" name="TextBox 24"/>
-          <p:cNvSpPr txBox="1"/>
-          <p:nvPr/>
-        </p:nvSpPr>
-        <p:spPr>
-          <a:xfrm>
-            <a:off x="624535" y="4069079"/>
-            <a:ext cx="3291839" cy="800100"/>
-          </a:xfrm>
-          <a:prstGeom prst="rect">
-            <a:avLst/>
-          </a:prstGeom>
-          <a:noFill/>
-        </p:spPr>
-        <p:txBody>
-          <a:bodyPr wrap="square" lIns="45720" rIns="45720" anchor="b">
-            <a:spAutoFit/>
-          </a:bodyPr>
-          <a:lstStyle/>
-          <a:p>
-            <a:pPr algn="ctr" rtl="1">
-              <a:spcAft>
-                <a:spcPts val="800"/>
-              </a:spcAft>
-              <a:buNone/>
-            </a:pPr>
-            <a:r>
-              <a:rPr lang="he-IL" sz="2800" b="1">
-                <a:solidFill>
-                  <a:srgbClr val="2E75B6"/>
-                </a:solidFill>
-                <a:latin typeface="Arial"/>
-                <a:cs typeface="Arial"/>
-              </a:rPr>
-              <a:t>SI-SDR, SSNR</a:t>
-            </a:r>
-          </a:p>
-        </p:txBody>
-      </p:sp>
-      <p:sp>
-        <p:nvSpPr>
-          <p:cNvPr id="26" name="TextBox 25"/>
-          <p:cNvSpPr txBox="1"/>
-          <p:nvPr/>
-        </p:nvSpPr>
-        <p:spPr>
-          <a:xfrm>
-            <a:off x="624535" y="4857750"/>
-            <a:ext cx="3291839" cy="672084"/>
-          </a:xfrm>
-          <a:prstGeom prst="rect">
-            <a:avLst/>
-          </a:prstGeom>
-          <a:noFill/>
-        </p:spPr>
-        <p:txBody>
-          <a:bodyPr wrap="square" lIns="45720" rIns="45720" anchor="t">
-            <a:spAutoFit/>
-          </a:bodyPr>
-          <a:lstStyle/>
-          <a:p>
-            <a:pPr algn="ctr" rtl="1">
-              <a:spcAft>
-                <a:spcPts val="0"/>
-              </a:spcAft>
-              <a:buNone/>
-            </a:pPr>
-            <a:r>
-              <a:rPr lang="he-IL" sz="1500" b="0">
-                <a:solidFill>
-                  <a:srgbClr val="1B242B"/>
-                </a:solidFill>
-                <a:latin typeface="Arial"/>
-                <a:cs typeface="Arial"/>
-              </a:rPr>
-              <a:t>עיוות האות, ב-dB</a:t>
+              <a:t>בהשראת TSTNN [1] בתחום הזמן, ומסכה על magnitude כמו ב-[2]</a:t>
             </a:r>
           </a:p>
         </p:txBody>
@@ -23928,7 +21523,7 @@
                 <a:latin typeface="Arial"/>
                 <a:cs typeface="Arial"/>
               </a:rPr>
-              <a:t>המודל במבט אחד</a:t>
+              <a:t>עיבוד האות</a:t>
             </a:r>
           </a:p>
         </p:txBody>
@@ -24102,14 +21697,14 @@
                 <a:latin typeface="Arial"/>
                 <a:cs typeface="Arial"/>
               </a:rPr>
-              <a:t>4</a:t>
+              <a:t>5</a:t>
             </a:r>
           </a:p>
         </p:txBody>
       </p:sp>
       <p:pic>
         <p:nvPicPr>
-          <p:cNvPr id="8" name="Picture 7" descr="arch_he_overview.png"/>
+          <p:cNvPr id="8" name="Picture 7" descr="pres_dsp.png"/>
           <p:cNvPicPr>
             <a:picLocks noChangeAspect="1"/>
           </p:cNvPicPr>
@@ -24123,8 +21718,8 @@
         </p:blipFill>
         <p:spPr>
           <a:xfrm>
-            <a:off x="1151011" y="1280160"/>
-            <a:ext cx="9889671" cy="4572000"/>
+            <a:off x="365759" y="1468115"/>
+            <a:ext cx="11460175" cy="2929501"/>
           </a:xfrm>
           <a:prstGeom prst="rect">
             <a:avLst/>
@@ -24133,14 +21728,104 @@
       </p:pic>
       <p:sp>
         <p:nvSpPr>
-          <p:cNvPr id="9" name="TextBox 8"/>
+          <p:cNvPr id="9" name="Rounded Rectangle 8"/>
+          <p:cNvSpPr/>
+          <p:nvPr/>
+        </p:nvSpPr>
+        <p:spPr>
+          <a:xfrm>
+            <a:off x="8031175" y="4754880"/>
+            <a:ext cx="3474720" cy="1371600"/>
+          </a:xfrm>
+          <a:prstGeom prst="roundRect">
+            <a:avLst>
+              <a:gd name="adj" fmla="val 12000"/>
+            </a:avLst>
+          </a:prstGeom>
+          <a:solidFill>
+            <a:srgbClr val="DCEBF7"/>
+          </a:solidFill>
+          <a:ln w="19050">
+            <a:solidFill>
+              <a:srgbClr val="2E75B6"/>
+            </a:solidFill>
+          </a:ln>
+          <a:effectLst/>
+        </p:spPr>
+        <p:style>
+          <a:lnRef idx="1">
+            <a:schemeClr val="accent1"/>
+          </a:lnRef>
+          <a:fillRef idx="3">
+            <a:schemeClr val="accent1"/>
+          </a:fillRef>
+          <a:effectRef idx="2">
+            <a:schemeClr val="accent1"/>
+          </a:effectRef>
+          <a:fontRef idx="minor">
+            <a:schemeClr val="lt1"/>
+          </a:fontRef>
+        </p:style>
+        <p:txBody>
+          <a:bodyPr rtlCol="0" anchor="ctr"/>
+          <a:lstStyle/>
+          <a:p>
+            <a:pPr algn="ctr"/>
+            <a:endParaRPr/>
+          </a:p>
+        </p:txBody>
+      </p:sp>
+      <p:sp>
+        <p:nvSpPr>
+          <p:cNvPr id="10" name="TextBox 9"/>
           <p:cNvSpPr txBox="1"/>
           <p:nvPr/>
         </p:nvSpPr>
         <p:spPr>
           <a:xfrm>
-            <a:off x="457200" y="5897880"/>
-            <a:ext cx="11277295" cy="457200"/>
+            <a:off x="8122615" y="4846320"/>
+            <a:ext cx="3291839" cy="685800"/>
+          </a:xfrm>
+          <a:prstGeom prst="rect">
+            <a:avLst/>
+          </a:prstGeom>
+          <a:noFill/>
+        </p:spPr>
+        <p:txBody>
+          <a:bodyPr wrap="square" lIns="45720" rIns="45720" anchor="b">
+            <a:spAutoFit/>
+          </a:bodyPr>
+          <a:lstStyle/>
+          <a:p>
+            <a:pPr algn="ctr" rtl="0">
+              <a:spcAft>
+                <a:spcPts val="800"/>
+              </a:spcAft>
+              <a:buNone/>
+            </a:pPr>
+            <a:r>
+              <a:rPr lang="he-IL" sz="2400" b="1">
+                <a:solidFill>
+                  <a:srgbClr val="2E75B6"/>
+                </a:solidFill>
+                <a:latin typeface="Arial"/>
+                <a:cs typeface="Arial"/>
+              </a:rPr>
+              <a:t>STFT</a:t>
+            </a:r>
+          </a:p>
+        </p:txBody>
+      </p:sp>
+      <p:sp>
+        <p:nvSpPr>
+          <p:cNvPr id="11" name="TextBox 10"/>
+          <p:cNvSpPr txBox="1"/>
+          <p:nvPr/>
+        </p:nvSpPr>
+        <p:spPr>
+          <a:xfrm>
+            <a:off x="8122615" y="5509260"/>
+            <a:ext cx="3291839" cy="576072"/>
           </a:xfrm>
           <a:prstGeom prst="rect">
             <a:avLst/>
@@ -24155,19 +21840,281 @@
           <a:p>
             <a:pPr algn="ctr" rtl="1">
               <a:spcAft>
+                <a:spcPts val="0"/>
+              </a:spcAft>
+              <a:buNone/>
+            </a:pPr>
+            <a:r>
+              <a:rPr lang="he-IL" sz="1500" b="0">
+                <a:solidFill>
+                  <a:srgbClr val="1B242B"/>
+                </a:solidFill>
+                <a:latin typeface="Arial"/>
+                <a:cs typeface="Arial"/>
+              </a:rPr>
+              <a:t>‎Hann 512, hop 128 (32 [ms], 8 [ms])‎</a:t>
+            </a:r>
+          </a:p>
+        </p:txBody>
+      </p:sp>
+      <p:sp>
+        <p:nvSpPr>
+          <p:cNvPr id="12" name="Rounded Rectangle 11"/>
+          <p:cNvSpPr/>
+          <p:nvPr/>
+        </p:nvSpPr>
+        <p:spPr>
+          <a:xfrm>
+            <a:off x="4282135" y="4754880"/>
+            <a:ext cx="3474720" cy="1371600"/>
+          </a:xfrm>
+          <a:prstGeom prst="roundRect">
+            <a:avLst>
+              <a:gd name="adj" fmla="val 12000"/>
+            </a:avLst>
+          </a:prstGeom>
+          <a:solidFill>
+            <a:srgbClr val="DCEBF7"/>
+          </a:solidFill>
+          <a:ln w="19050">
+            <a:solidFill>
+              <a:srgbClr val="2E75B6"/>
+            </a:solidFill>
+          </a:ln>
+          <a:effectLst/>
+        </p:spPr>
+        <p:style>
+          <a:lnRef idx="1">
+            <a:schemeClr val="accent1"/>
+          </a:lnRef>
+          <a:fillRef idx="3">
+            <a:schemeClr val="accent1"/>
+          </a:fillRef>
+          <a:effectRef idx="2">
+            <a:schemeClr val="accent1"/>
+          </a:effectRef>
+          <a:fontRef idx="minor">
+            <a:schemeClr val="lt1"/>
+          </a:fontRef>
+        </p:style>
+        <p:txBody>
+          <a:bodyPr rtlCol="0" anchor="ctr"/>
+          <a:lstStyle/>
+          <a:p>
+            <a:pPr algn="ctr"/>
+            <a:endParaRPr/>
+          </a:p>
+        </p:txBody>
+      </p:sp>
+      <p:sp>
+        <p:nvSpPr>
+          <p:cNvPr id="13" name="TextBox 12"/>
+          <p:cNvSpPr txBox="1"/>
+          <p:nvPr/>
+        </p:nvSpPr>
+        <p:spPr>
+          <a:xfrm>
+            <a:off x="4373575" y="4846320"/>
+            <a:ext cx="3291839" cy="685800"/>
+          </a:xfrm>
+          <a:prstGeom prst="rect">
+            <a:avLst/>
+          </a:prstGeom>
+          <a:noFill/>
+        </p:spPr>
+        <p:txBody>
+          <a:bodyPr wrap="square" lIns="45720" rIns="45720" anchor="b">
+            <a:spAutoFit/>
+          </a:bodyPr>
+          <a:lstStyle/>
+          <a:p>
+            <a:pPr algn="ctr" rtl="0">
+              <a:spcAft>
                 <a:spcPts val="800"/>
               </a:spcAft>
               <a:buNone/>
             </a:pPr>
             <a:r>
-              <a:rPr lang="he-IL" sz="1600" b="0">
-                <a:solidFill>
-                  <a:srgbClr val="5A636A"/>
-                </a:solidFill>
-                <a:latin typeface="Arial"/>
-                <a:cs typeface="Arial"/>
-              </a:rPr>
-              <a:t>בהשראת TSTNN [1] בתחום הזמן, ומסכה על magnitude כמו ב-[2]</a:t>
+              <a:rPr lang="he-IL" sz="2400" b="1">
+                <a:solidFill>
+                  <a:srgbClr val="2E75B6"/>
+                </a:solidFill>
+                <a:latin typeface="Arial"/>
+                <a:cs typeface="Arial"/>
+              </a:rPr>
+              <a:t>|Y|^0.3</a:t>
+            </a:r>
+          </a:p>
+        </p:txBody>
+      </p:sp>
+      <p:sp>
+        <p:nvSpPr>
+          <p:cNvPr id="14" name="TextBox 13"/>
+          <p:cNvSpPr txBox="1"/>
+          <p:nvPr/>
+        </p:nvSpPr>
+        <p:spPr>
+          <a:xfrm>
+            <a:off x="4373575" y="5509260"/>
+            <a:ext cx="3291839" cy="576072"/>
+          </a:xfrm>
+          <a:prstGeom prst="rect">
+            <a:avLst/>
+          </a:prstGeom>
+          <a:noFill/>
+        </p:spPr>
+        <p:txBody>
+          <a:bodyPr wrap="square" lIns="45720" rIns="45720" anchor="t">
+            <a:spAutoFit/>
+          </a:bodyPr>
+          <a:lstStyle/>
+          <a:p>
+            <a:pPr algn="ctr" rtl="1">
+              <a:spcAft>
+                <a:spcPts val="0"/>
+              </a:spcAft>
+              <a:buNone/>
+            </a:pPr>
+            <a:r>
+              <a:rPr lang="he-IL" sz="1500" b="0">
+                <a:solidFill>
+                  <a:srgbClr val="1B242B"/>
+                </a:solidFill>
+                <a:latin typeface="Arial"/>
+                <a:cs typeface="Arial"/>
+              </a:rPr>
+              <a:t>דחיסה, החלשים נראים</a:t>
+            </a:r>
+          </a:p>
+        </p:txBody>
+      </p:sp>
+      <p:sp>
+        <p:nvSpPr>
+          <p:cNvPr id="15" name="Rounded Rectangle 14"/>
+          <p:cNvSpPr/>
+          <p:nvPr/>
+        </p:nvSpPr>
+        <p:spPr>
+          <a:xfrm>
+            <a:off x="533095" y="4754880"/>
+            <a:ext cx="3474720" cy="1371600"/>
+          </a:xfrm>
+          <a:prstGeom prst="roundRect">
+            <a:avLst>
+              <a:gd name="adj" fmla="val 12000"/>
+            </a:avLst>
+          </a:prstGeom>
+          <a:solidFill>
+            <a:srgbClr val="DCEBF7"/>
+          </a:solidFill>
+          <a:ln w="19050">
+            <a:solidFill>
+              <a:srgbClr val="2E75B6"/>
+            </a:solidFill>
+          </a:ln>
+          <a:effectLst/>
+        </p:spPr>
+        <p:style>
+          <a:lnRef idx="1">
+            <a:schemeClr val="accent1"/>
+          </a:lnRef>
+          <a:fillRef idx="3">
+            <a:schemeClr val="accent1"/>
+          </a:fillRef>
+          <a:effectRef idx="2">
+            <a:schemeClr val="accent1"/>
+          </a:effectRef>
+          <a:fontRef idx="minor">
+            <a:schemeClr val="lt1"/>
+          </a:fontRef>
+        </p:style>
+        <p:txBody>
+          <a:bodyPr rtlCol="0" anchor="ctr"/>
+          <a:lstStyle/>
+          <a:p>
+            <a:pPr algn="ctr"/>
+            <a:endParaRPr/>
+          </a:p>
+        </p:txBody>
+      </p:sp>
+      <p:sp>
+        <p:nvSpPr>
+          <p:cNvPr id="16" name="TextBox 15"/>
+          <p:cNvSpPr txBox="1"/>
+          <p:nvPr/>
+        </p:nvSpPr>
+        <p:spPr>
+          <a:xfrm>
+            <a:off x="624535" y="4846320"/>
+            <a:ext cx="3291839" cy="685800"/>
+          </a:xfrm>
+          <a:prstGeom prst="rect">
+            <a:avLst/>
+          </a:prstGeom>
+          <a:noFill/>
+        </p:spPr>
+        <p:txBody>
+          <a:bodyPr wrap="square" lIns="45720" rIns="45720" anchor="b">
+            <a:spAutoFit/>
+          </a:bodyPr>
+          <a:lstStyle/>
+          <a:p>
+            <a:pPr algn="ctr" rtl="0">
+              <a:spcAft>
+                <a:spcPts val="800"/>
+              </a:spcAft>
+              <a:buNone/>
+            </a:pPr>
+            <a:r>
+              <a:rPr lang="he-IL" sz="2400" b="1">
+                <a:solidFill>
+                  <a:srgbClr val="2E75B6"/>
+                </a:solidFill>
+                <a:latin typeface="Arial"/>
+                <a:cs typeface="Arial"/>
+              </a:rPr>
+              <a:t>(x - μ) / σ</a:t>
+            </a:r>
+          </a:p>
+        </p:txBody>
+      </p:sp>
+      <p:sp>
+        <p:nvSpPr>
+          <p:cNvPr id="17" name="TextBox 16"/>
+          <p:cNvSpPr txBox="1"/>
+          <p:nvPr/>
+        </p:nvSpPr>
+        <p:spPr>
+          <a:xfrm>
+            <a:off x="624535" y="5509260"/>
+            <a:ext cx="3291839" cy="576072"/>
+          </a:xfrm>
+          <a:prstGeom prst="rect">
+            <a:avLst/>
+          </a:prstGeom>
+          <a:noFill/>
+        </p:spPr>
+        <p:txBody>
+          <a:bodyPr wrap="square" lIns="45720" rIns="45720" anchor="t">
+            <a:spAutoFit/>
+          </a:bodyPr>
+          <a:lstStyle/>
+          <a:p>
+            <a:pPr algn="ctr" rtl="1">
+              <a:spcAft>
+                <a:spcPts val="0"/>
+              </a:spcAft>
+              <a:buNone/>
+            </a:pPr>
+            <a:r>
+              <a:rPr lang="he-IL" sz="1500" b="0">
+                <a:solidFill>
+                  <a:srgbClr val="1B242B"/>
+                </a:solidFill>
+                <a:latin typeface="Arial"/>
+                <a:cs typeface="Arial"/>
+              </a:rPr>
+              <a:t>תקנון לכל הקלטה</a:t>
             </a:r>
           </a:p>
         </p:txBody>
@@ -24278,7 +22225,7 @@
                 <a:latin typeface="Arial"/>
                 <a:cs typeface="Arial"/>
               </a:rPr>
-              <a:t>עיבוד האות</a:t>
+              <a:t>בלוק ה-Dual-Path, Attention לאורך התדר ולאורך הזמן</a:t>
             </a:r>
           </a:p>
         </p:txBody>
@@ -24452,14 +22399,14 @@
                 <a:latin typeface="Arial"/>
                 <a:cs typeface="Arial"/>
               </a:rPr>
-              <a:t>5</a:t>
+              <a:t>6</a:t>
             </a:r>
           </a:p>
         </p:txBody>
       </p:sp>
       <p:pic>
         <p:nvPicPr>
-          <p:cNvPr id="8" name="Picture 7" descr="pres_dsp.png"/>
+          <p:cNvPr id="8" name="Picture 7" descr="arch_he_dual_path.png"/>
           <p:cNvPicPr>
             <a:picLocks noChangeAspect="1"/>
           </p:cNvPicPr>
@@ -24473,63 +22420,38 @@
         </p:blipFill>
         <p:spPr>
           <a:xfrm>
-            <a:off x="365759" y="1468115"/>
-            <a:ext cx="11460175" cy="2929501"/>
+            <a:off x="1674626" y="1234440"/>
+            <a:ext cx="8842442" cy="2743200"/>
           </a:xfrm>
           <a:prstGeom prst="rect">
             <a:avLst/>
           </a:prstGeom>
         </p:spPr>
       </p:pic>
-      <p:sp>
-        <p:nvSpPr>
-          <p:cNvPr id="9" name="Rounded Rectangle 8"/>
-          <p:cNvSpPr/>
-          <p:nvPr/>
-        </p:nvSpPr>
-        <p:spPr>
-          <a:xfrm>
-            <a:off x="8031175" y="4754880"/>
-            <a:ext cx="3474720" cy="1371600"/>
-          </a:xfrm>
-          <a:prstGeom prst="roundRect">
-            <a:avLst>
-              <a:gd name="adj" fmla="val 12000"/>
-            </a:avLst>
-          </a:prstGeom>
-          <a:solidFill>
-            <a:srgbClr val="DCEBF7"/>
-          </a:solidFill>
-          <a:ln w="19050">
-            <a:solidFill>
-              <a:srgbClr val="2E75B6"/>
-            </a:solidFill>
-          </a:ln>
-          <a:effectLst/>
-        </p:spPr>
-        <p:style>
-          <a:lnRef idx="1">
-            <a:schemeClr val="accent1"/>
-          </a:lnRef>
-          <a:fillRef idx="3">
-            <a:schemeClr val="accent1"/>
-          </a:fillRef>
-          <a:effectRef idx="2">
-            <a:schemeClr val="accent1"/>
-          </a:effectRef>
-          <a:fontRef idx="minor">
-            <a:schemeClr val="lt1"/>
-          </a:fontRef>
-        </p:style>
-        <p:txBody>
-          <a:bodyPr rtlCol="0" anchor="ctr"/>
-          <a:lstStyle/>
-          <a:p>
-            <a:pPr algn="ctr"/>
-            <a:endParaRPr/>
-          </a:p>
-        </p:txBody>
-      </p:sp>
+      <p:pic>
+        <p:nvPicPr>
+          <p:cNvPr id="9" name="Picture 8" descr="pres_eq_attention.png"/>
+          <p:cNvPicPr>
+            <a:picLocks noChangeAspect="1"/>
+          </p:cNvPicPr>
+          <p:nvPr/>
+        </p:nvPicPr>
+        <p:blipFill>
+          <a:blip r:embed="rId4"/>
+          <a:stretch>
+            <a:fillRect/>
+          </a:stretch>
+        </p:blipFill>
+        <p:spPr>
+          <a:xfrm>
+            <a:off x="6583680" y="4399247"/>
+            <a:ext cx="5120639" cy="619824"/>
+          </a:xfrm>
+          <a:prstGeom prst="rect">
+            <a:avLst/>
+          </a:prstGeom>
+        </p:spPr>
+      </p:pic>
       <p:sp>
         <p:nvSpPr>
           <p:cNvPr id="10" name="TextBox 9"/>
@@ -24538,49 +22460,8 @@
         </p:nvSpPr>
         <p:spPr>
           <a:xfrm>
-            <a:off x="8122615" y="4846320"/>
-            <a:ext cx="3291839" cy="685800"/>
-          </a:xfrm>
-          <a:prstGeom prst="rect">
-            <a:avLst/>
-          </a:prstGeom>
-          <a:noFill/>
-        </p:spPr>
-        <p:txBody>
-          <a:bodyPr wrap="square" lIns="45720" rIns="45720" anchor="b">
-            <a:spAutoFit/>
-          </a:bodyPr>
-          <a:lstStyle/>
-          <a:p>
-            <a:pPr algn="ctr" rtl="0">
-              <a:spcAft>
-                <a:spcPts val="800"/>
-              </a:spcAft>
-              <a:buNone/>
-            </a:pPr>
-            <a:r>
-              <a:rPr lang="he-IL" sz="2400" b="1">
-                <a:solidFill>
-                  <a:srgbClr val="2E75B6"/>
-                </a:solidFill>
-                <a:latin typeface="Arial"/>
-                <a:cs typeface="Arial"/>
-              </a:rPr>
-              <a:t>STFT</a:t>
-            </a:r>
-          </a:p>
-        </p:txBody>
-      </p:sp>
-      <p:sp>
-        <p:nvSpPr>
-          <p:cNvPr id="11" name="TextBox 10"/>
-          <p:cNvSpPr txBox="1"/>
-          <p:nvPr/>
-        </p:nvSpPr>
-        <p:spPr>
-          <a:xfrm>
-            <a:off x="8122615" y="5509260"/>
-            <a:ext cx="3291839" cy="576072"/>
+            <a:off x="6583680" y="5166360"/>
+            <a:ext cx="5120640" cy="1005840"/>
           </a:xfrm>
           <a:prstGeom prst="rect">
             <a:avLst/>
@@ -24593,287 +22474,69 @@
           </a:bodyPr>
           <a:lstStyle/>
           <a:p>
-            <a:pPr algn="ctr" rtl="1">
-              <a:spcAft>
-                <a:spcPts val="0"/>
-              </a:spcAft>
-              <a:buNone/>
-            </a:pPr>
-            <a:r>
-              <a:rPr lang="he-IL" sz="1500" b="0">
-                <a:solidFill>
-                  <a:srgbClr val="1B242B"/>
-                </a:solidFill>
-                <a:latin typeface="Arial"/>
-                <a:cs typeface="Arial"/>
-              </a:rPr>
-              <a:t>‎Hann 512, hop 128 (32 [ms], 8 [ms])‎</a:t>
-            </a:r>
-          </a:p>
-        </p:txBody>
-      </p:sp>
-      <p:sp>
-        <p:nvSpPr>
-          <p:cNvPr id="12" name="Rounded Rectangle 11"/>
-          <p:cNvSpPr/>
-          <p:nvPr/>
-        </p:nvSpPr>
-        <p:spPr>
-          <a:xfrm>
-            <a:off x="4282135" y="4754880"/>
-            <a:ext cx="3474720" cy="1371600"/>
-          </a:xfrm>
-          <a:prstGeom prst="roundRect">
-            <a:avLst>
-              <a:gd name="adj" fmla="val 12000"/>
-            </a:avLst>
-          </a:prstGeom>
-          <a:solidFill>
-            <a:srgbClr val="DCEBF7"/>
-          </a:solidFill>
-          <a:ln w="19050">
-            <a:solidFill>
-              <a:srgbClr val="2E75B6"/>
-            </a:solidFill>
-          </a:ln>
-          <a:effectLst/>
-        </p:spPr>
-        <p:style>
-          <a:lnRef idx="1">
-            <a:schemeClr val="accent1"/>
-          </a:lnRef>
-          <a:fillRef idx="3">
-            <a:schemeClr val="accent1"/>
-          </a:fillRef>
-          <a:effectRef idx="2">
-            <a:schemeClr val="accent1"/>
-          </a:effectRef>
-          <a:fontRef idx="minor">
-            <a:schemeClr val="lt1"/>
-          </a:fontRef>
-        </p:style>
-        <p:txBody>
-          <a:bodyPr rtlCol="0" anchor="ctr"/>
-          <a:lstStyle/>
-          <a:p>
-            <a:pPr algn="ctr"/>
-            <a:endParaRPr/>
-          </a:p>
-        </p:txBody>
-      </p:sp>
-      <p:sp>
-        <p:nvSpPr>
-          <p:cNvPr id="13" name="TextBox 12"/>
-          <p:cNvSpPr txBox="1"/>
-          <p:nvPr/>
-        </p:nvSpPr>
-        <p:spPr>
-          <a:xfrm>
-            <a:off x="4373575" y="4846320"/>
-            <a:ext cx="3291839" cy="685800"/>
+            <a:pPr marL="292608" indent="-292608" algn="r" rtl="1">
+              <a:spcAft>
+                <a:spcPts val="400"/>
+              </a:spcAft>
+              <a:buFont typeface="Arial"/>
+              <a:buChar char="•"/>
+            </a:pPr>
+            <a:r>
+              <a:rPr lang="he-IL" sz="1700" b="0">
+                <a:solidFill>
+                  <a:srgbClr val="1B242B"/>
+                </a:solidFill>
+                <a:latin typeface="Arial"/>
+                <a:cs typeface="Arial"/>
+              </a:rPr>
+              <a:t>4 ראשים, 12 ממדים לכל ראש</a:t>
+            </a:r>
+          </a:p>
+          <a:p>
+            <a:pPr marL="292608" indent="-292608" algn="r" rtl="1">
+              <a:spcAft>
+                <a:spcPts val="400"/>
+              </a:spcAft>
+              <a:buFont typeface="Arial"/>
+              <a:buChar char="•"/>
+            </a:pPr>
+            <a:r>
+              <a:rPr lang="he-IL" sz="1700" b="0">
+                <a:solidFill>
+                  <a:srgbClr val="1B242B"/>
+                </a:solidFill>
+                <a:latin typeface="Arial"/>
+                <a:cs typeface="Arial"/>
+              </a:rPr>
+              <a:t>ה-BiGRU נותן את הסדר, בלי positional encoding</a:t>
+            </a:r>
+          </a:p>
+        </p:txBody>
+      </p:sp>
+      <p:pic>
+        <p:nvPicPr>
+          <p:cNvPr id="11" name="Picture 10" descr="pres_cost.png"/>
+          <p:cNvPicPr>
+            <a:picLocks noChangeAspect="1"/>
+          </p:cNvPicPr>
+          <p:nvPr/>
+        </p:nvPicPr>
+        <p:blipFill>
+          <a:blip r:embed="rId5"/>
+          <a:stretch>
+            <a:fillRect/>
+          </a:stretch>
+        </p:blipFill>
+        <p:spPr>
+          <a:xfrm>
+            <a:off x="578080" y="4069080"/>
+            <a:ext cx="5610399" cy="2286000"/>
           </a:xfrm>
           <a:prstGeom prst="rect">
             <a:avLst/>
           </a:prstGeom>
-          <a:noFill/>
-        </p:spPr>
-        <p:txBody>
-          <a:bodyPr wrap="square" lIns="45720" rIns="45720" anchor="b">
-            <a:spAutoFit/>
-          </a:bodyPr>
-          <a:lstStyle/>
-          <a:p>
-            <a:pPr algn="ctr" rtl="0">
-              <a:spcAft>
-                <a:spcPts val="800"/>
-              </a:spcAft>
-              <a:buNone/>
-            </a:pPr>
-            <a:r>
-              <a:rPr lang="he-IL" sz="2400" b="1">
-                <a:solidFill>
-                  <a:srgbClr val="2E75B6"/>
-                </a:solidFill>
-                <a:latin typeface="Arial"/>
-                <a:cs typeface="Arial"/>
-              </a:rPr>
-              <a:t>|Y|^0.3</a:t>
-            </a:r>
-          </a:p>
-        </p:txBody>
-      </p:sp>
-      <p:sp>
-        <p:nvSpPr>
-          <p:cNvPr id="14" name="TextBox 13"/>
-          <p:cNvSpPr txBox="1"/>
-          <p:nvPr/>
-        </p:nvSpPr>
-        <p:spPr>
-          <a:xfrm>
-            <a:off x="4373575" y="5509260"/>
-            <a:ext cx="3291839" cy="576072"/>
-          </a:xfrm>
-          <a:prstGeom prst="rect">
-            <a:avLst/>
-          </a:prstGeom>
-          <a:noFill/>
-        </p:spPr>
-        <p:txBody>
-          <a:bodyPr wrap="square" lIns="45720" rIns="45720" anchor="t">
-            <a:spAutoFit/>
-          </a:bodyPr>
-          <a:lstStyle/>
-          <a:p>
-            <a:pPr algn="ctr" rtl="1">
-              <a:spcAft>
-                <a:spcPts val="0"/>
-              </a:spcAft>
-              <a:buNone/>
-            </a:pPr>
-            <a:r>
-              <a:rPr lang="he-IL" sz="1500" b="0">
-                <a:solidFill>
-                  <a:srgbClr val="1B242B"/>
-                </a:solidFill>
-                <a:latin typeface="Arial"/>
-                <a:cs typeface="Arial"/>
-              </a:rPr>
-              <a:t>דחיסה, החלשים נראים</a:t>
-            </a:r>
-          </a:p>
-        </p:txBody>
-      </p:sp>
-      <p:sp>
-        <p:nvSpPr>
-          <p:cNvPr id="15" name="Rounded Rectangle 14"/>
-          <p:cNvSpPr/>
-          <p:nvPr/>
-        </p:nvSpPr>
-        <p:spPr>
-          <a:xfrm>
-            <a:off x="533095" y="4754880"/>
-            <a:ext cx="3474720" cy="1371600"/>
-          </a:xfrm>
-          <a:prstGeom prst="roundRect">
-            <a:avLst>
-              <a:gd name="adj" fmla="val 12000"/>
-            </a:avLst>
-          </a:prstGeom>
-          <a:solidFill>
-            <a:srgbClr val="DCEBF7"/>
-          </a:solidFill>
-          <a:ln w="19050">
-            <a:solidFill>
-              <a:srgbClr val="2E75B6"/>
-            </a:solidFill>
-          </a:ln>
-          <a:effectLst/>
-        </p:spPr>
-        <p:style>
-          <a:lnRef idx="1">
-            <a:schemeClr val="accent1"/>
-          </a:lnRef>
-          <a:fillRef idx="3">
-            <a:schemeClr val="accent1"/>
-          </a:fillRef>
-          <a:effectRef idx="2">
-            <a:schemeClr val="accent1"/>
-          </a:effectRef>
-          <a:fontRef idx="minor">
-            <a:schemeClr val="lt1"/>
-          </a:fontRef>
-        </p:style>
-        <p:txBody>
-          <a:bodyPr rtlCol="0" anchor="ctr"/>
-          <a:lstStyle/>
-          <a:p>
-            <a:pPr algn="ctr"/>
-            <a:endParaRPr/>
-          </a:p>
-        </p:txBody>
-      </p:sp>
-      <p:sp>
-        <p:nvSpPr>
-          <p:cNvPr id="16" name="TextBox 15"/>
-          <p:cNvSpPr txBox="1"/>
-          <p:nvPr/>
-        </p:nvSpPr>
-        <p:spPr>
-          <a:xfrm>
-            <a:off x="624535" y="4846320"/>
-            <a:ext cx="3291839" cy="685800"/>
-          </a:xfrm>
-          <a:prstGeom prst="rect">
-            <a:avLst/>
-          </a:prstGeom>
-          <a:noFill/>
-        </p:spPr>
-        <p:txBody>
-          <a:bodyPr wrap="square" lIns="45720" rIns="45720" anchor="b">
-            <a:spAutoFit/>
-          </a:bodyPr>
-          <a:lstStyle/>
-          <a:p>
-            <a:pPr algn="ctr" rtl="0">
-              <a:spcAft>
-                <a:spcPts val="800"/>
-              </a:spcAft>
-              <a:buNone/>
-            </a:pPr>
-            <a:r>
-              <a:rPr lang="he-IL" sz="2400" b="1">
-                <a:solidFill>
-                  <a:srgbClr val="2E75B6"/>
-                </a:solidFill>
-                <a:latin typeface="Arial"/>
-                <a:cs typeface="Arial"/>
-              </a:rPr>
-              <a:t>(x - μ) / σ</a:t>
-            </a:r>
-          </a:p>
-        </p:txBody>
-      </p:sp>
-      <p:sp>
-        <p:nvSpPr>
-          <p:cNvPr id="17" name="TextBox 16"/>
-          <p:cNvSpPr txBox="1"/>
-          <p:nvPr/>
-        </p:nvSpPr>
-        <p:spPr>
-          <a:xfrm>
-            <a:off x="624535" y="5509260"/>
-            <a:ext cx="3291839" cy="576072"/>
-          </a:xfrm>
-          <a:prstGeom prst="rect">
-            <a:avLst/>
-          </a:prstGeom>
-          <a:noFill/>
-        </p:spPr>
-        <p:txBody>
-          <a:bodyPr wrap="square" lIns="45720" rIns="45720" anchor="t">
-            <a:spAutoFit/>
-          </a:bodyPr>
-          <a:lstStyle/>
-          <a:p>
-            <a:pPr algn="ctr" rtl="1">
-              <a:spcAft>
-                <a:spcPts val="0"/>
-              </a:spcAft>
-              <a:buNone/>
-            </a:pPr>
-            <a:r>
-              <a:rPr lang="he-IL" sz="1500" b="0">
-                <a:solidFill>
-                  <a:srgbClr val="1B242B"/>
-                </a:solidFill>
-                <a:latin typeface="Arial"/>
-                <a:cs typeface="Arial"/>
-              </a:rPr>
-              <a:t>תקנון לכל הקלטה</a:t>
-            </a:r>
-          </a:p>
-        </p:txBody>
-      </p:sp>
+        </p:spPr>
+      </p:pic>
     </p:spTree>
   </p:cSld>
   <p:clrMapOvr>
@@ -24980,7 +22643,7 @@
                 <a:latin typeface="Arial"/>
                 <a:cs typeface="Arial"/>
               </a:rPr>
-              <a:t>בלוק ה-Dual-Path, Attention לאורך התדר ולאורך הזמן</a:t>
+              <a:t>המסכה, הפאזה וכמות הפרמטרים</a:t>
             </a:r>
           </a:p>
         </p:txBody>
@@ -25154,14 +22817,375 @@
                 <a:latin typeface="Arial"/>
                 <a:cs typeface="Arial"/>
               </a:rPr>
-              <a:t>6</a:t>
+              <a:t>7</a:t>
+            </a:r>
+          </a:p>
+        </p:txBody>
+      </p:sp>
+      <p:sp>
+        <p:nvSpPr>
+          <p:cNvPr id="8" name="TextBox 7"/>
+          <p:cNvSpPr txBox="1"/>
+          <p:nvPr/>
+        </p:nvSpPr>
+        <p:spPr>
+          <a:xfrm>
+            <a:off x="6309360" y="1463040"/>
+            <a:ext cx="5394960" cy="2743200"/>
+          </a:xfrm>
+          <a:prstGeom prst="rect">
+            <a:avLst/>
+          </a:prstGeom>
+          <a:noFill/>
+        </p:spPr>
+        <p:txBody>
+          <a:bodyPr wrap="square" lIns="45720" rIns="45720" anchor="t">
+            <a:spAutoFit/>
+          </a:bodyPr>
+          <a:lstStyle/>
+          <a:p>
+            <a:pPr marL="292608" indent="-292608" algn="r" rtl="1">
+              <a:spcAft>
+                <a:spcPts val="1400"/>
+              </a:spcAft>
+              <a:buFont typeface="Arial"/>
+              <a:buChar char="•"/>
+            </a:pPr>
+            <a:r>
+              <a:rPr lang="he-IL" sz="2100" b="0">
+                <a:solidFill>
+                  <a:srgbClr val="1B242B"/>
+                </a:solidFill>
+                <a:latin typeface="Arial"/>
+                <a:cs typeface="Arial"/>
+              </a:rPr>
+              <a:t>המסכה היא ReLU, לא שלילית, ואפשר גם להגביר</a:t>
+            </a:r>
+          </a:p>
+          <a:p>
+            <a:pPr marL="292608" indent="-292608" algn="r" rtl="1">
+              <a:spcAft>
+                <a:spcPts val="1400"/>
+              </a:spcAft>
+              <a:buFont typeface="Arial"/>
+              <a:buChar char="•"/>
+            </a:pPr>
+            <a:r>
+              <a:rPr lang="he-IL" sz="2100" b="0">
+                <a:solidFill>
+                  <a:srgbClr val="1B242B"/>
+                </a:solidFill>
+                <a:latin typeface="Arial"/>
+                <a:cs typeface="Arial"/>
+              </a:rPr>
+              <a:t>היא פועלת על ה-magnitude הדחוס</a:t>
+            </a:r>
+          </a:p>
+          <a:p>
+            <a:pPr marL="292608" indent="-292608" algn="r" rtl="1">
+              <a:spcAft>
+                <a:spcPts val="1400"/>
+              </a:spcAft>
+              <a:buFont typeface="Arial"/>
+              <a:buChar char="•"/>
+            </a:pPr>
+            <a:r>
+              <a:rPr lang="he-IL" sz="2100" b="0">
+                <a:solidFill>
+                  <a:srgbClr val="1B242B"/>
+                </a:solidFill>
+                <a:latin typeface="Arial"/>
+                <a:cs typeface="Arial"/>
+              </a:rPr>
+              <a:t>הפאזה הרועשת נשארת כמו שהיא</a:t>
+            </a:r>
+          </a:p>
+          <a:p>
+            <a:pPr marL="292608" indent="-292608" algn="r" rtl="1">
+              <a:spcAft>
+                <a:spcPts val="1400"/>
+              </a:spcAft>
+              <a:buFont typeface="Arial"/>
+              <a:buChar char="•"/>
+            </a:pPr>
+            <a:r>
+              <a:rPr lang="he-IL" sz="2100" b="0">
+                <a:solidFill>
+                  <a:srgbClr val="1B242B"/>
+                </a:solidFill>
+                <a:latin typeface="Arial"/>
+                <a:cs typeface="Arial"/>
+              </a:rPr>
+              <a:t>התקרה, גם עם magnitude מושלם רק 3.95 PESQ</a:t>
+            </a:r>
+          </a:p>
+        </p:txBody>
+      </p:sp>
+      <p:sp>
+        <p:nvSpPr>
+          <p:cNvPr id="9" name="Rounded Rectangle 8"/>
+          <p:cNvSpPr/>
+          <p:nvPr/>
+        </p:nvSpPr>
+        <p:spPr>
+          <a:xfrm>
+            <a:off x="9098280" y="4434840"/>
+            <a:ext cx="2606040" cy="1463040"/>
+          </a:xfrm>
+          <a:prstGeom prst="roundRect">
+            <a:avLst>
+              <a:gd name="adj" fmla="val 12000"/>
+            </a:avLst>
+          </a:prstGeom>
+          <a:solidFill>
+            <a:srgbClr val="DCEBF7"/>
+          </a:solidFill>
+          <a:ln w="19050">
+            <a:solidFill>
+              <a:srgbClr val="2E75B6"/>
+            </a:solidFill>
+          </a:ln>
+          <a:effectLst/>
+        </p:spPr>
+        <p:style>
+          <a:lnRef idx="1">
+            <a:schemeClr val="accent1"/>
+          </a:lnRef>
+          <a:fillRef idx="3">
+            <a:schemeClr val="accent1"/>
+          </a:fillRef>
+          <a:effectRef idx="2">
+            <a:schemeClr val="accent1"/>
+          </a:effectRef>
+          <a:fontRef idx="minor">
+            <a:schemeClr val="lt1"/>
+          </a:fontRef>
+        </p:style>
+        <p:txBody>
+          <a:bodyPr rtlCol="0" anchor="ctr"/>
+          <a:lstStyle/>
+          <a:p>
+            <a:pPr algn="ctr"/>
+            <a:endParaRPr/>
+          </a:p>
+        </p:txBody>
+      </p:sp>
+      <p:sp>
+        <p:nvSpPr>
+          <p:cNvPr id="10" name="TextBox 9"/>
+          <p:cNvSpPr txBox="1"/>
+          <p:nvPr/>
+        </p:nvSpPr>
+        <p:spPr>
+          <a:xfrm>
+            <a:off x="9189719" y="4526279"/>
+            <a:ext cx="2423160" cy="731520"/>
+          </a:xfrm>
+          <a:prstGeom prst="rect">
+            <a:avLst/>
+          </a:prstGeom>
+          <a:noFill/>
+        </p:spPr>
+        <p:txBody>
+          <a:bodyPr wrap="square" lIns="45720" rIns="45720" anchor="b">
+            <a:spAutoFit/>
+          </a:bodyPr>
+          <a:lstStyle/>
+          <a:p>
+            <a:pPr algn="ctr" rtl="0">
+              <a:spcAft>
+                <a:spcPts val="800"/>
+              </a:spcAft>
+              <a:buNone/>
+            </a:pPr>
+            <a:r>
+              <a:rPr lang="he-IL" sz="3000" b="1">
+                <a:solidFill>
+                  <a:srgbClr val="2E75B6"/>
+                </a:solidFill>
+                <a:latin typeface="Arial"/>
+                <a:cs typeface="Arial"/>
+              </a:rPr>
+              <a:t>0.88M</a:t>
+            </a:r>
+          </a:p>
+        </p:txBody>
+      </p:sp>
+      <p:sp>
+        <p:nvSpPr>
+          <p:cNvPr id="11" name="TextBox 10"/>
+          <p:cNvSpPr txBox="1"/>
+          <p:nvPr/>
+        </p:nvSpPr>
+        <p:spPr>
+          <a:xfrm>
+            <a:off x="9189719" y="5239512"/>
+            <a:ext cx="2423160" cy="614476"/>
+          </a:xfrm>
+          <a:prstGeom prst="rect">
+            <a:avLst/>
+          </a:prstGeom>
+          <a:noFill/>
+        </p:spPr>
+        <p:txBody>
+          <a:bodyPr wrap="square" lIns="45720" rIns="45720" anchor="t">
+            <a:spAutoFit/>
+          </a:bodyPr>
+          <a:lstStyle/>
+          <a:p>
+            <a:pPr algn="ctr" rtl="1">
+              <a:spcAft>
+                <a:spcPts val="0"/>
+              </a:spcAft>
+              <a:buNone/>
+            </a:pPr>
+            <a:r>
+              <a:rPr lang="he-IL" sz="1500" b="0">
+                <a:solidFill>
+                  <a:srgbClr val="1B242B"/>
+                </a:solidFill>
+                <a:latin typeface="Arial"/>
+                <a:cs typeface="Arial"/>
+              </a:rPr>
+              <a:t>הפרמטרים שלנו</a:t>
+            </a:r>
+          </a:p>
+        </p:txBody>
+      </p:sp>
+      <p:sp>
+        <p:nvSpPr>
+          <p:cNvPr id="12" name="Rounded Rectangle 11"/>
+          <p:cNvSpPr/>
+          <p:nvPr/>
+        </p:nvSpPr>
+        <p:spPr>
+          <a:xfrm>
+            <a:off x="6355080" y="4434840"/>
+            <a:ext cx="2606040" cy="1463040"/>
+          </a:xfrm>
+          <a:prstGeom prst="roundRect">
+            <a:avLst>
+              <a:gd name="adj" fmla="val 12000"/>
+            </a:avLst>
+          </a:prstGeom>
+          <a:solidFill>
+            <a:srgbClr val="EDE4F5"/>
+          </a:solidFill>
+          <a:ln w="19050">
+            <a:solidFill>
+              <a:srgbClr val="7030A0"/>
+            </a:solidFill>
+          </a:ln>
+          <a:effectLst/>
+        </p:spPr>
+        <p:style>
+          <a:lnRef idx="1">
+            <a:schemeClr val="accent1"/>
+          </a:lnRef>
+          <a:fillRef idx="3">
+            <a:schemeClr val="accent1"/>
+          </a:fillRef>
+          <a:effectRef idx="2">
+            <a:schemeClr val="accent1"/>
+          </a:effectRef>
+          <a:fontRef idx="minor">
+            <a:schemeClr val="lt1"/>
+          </a:fontRef>
+        </p:style>
+        <p:txBody>
+          <a:bodyPr rtlCol="0" anchor="ctr"/>
+          <a:lstStyle/>
+          <a:p>
+            <a:pPr algn="ctr"/>
+            <a:endParaRPr/>
+          </a:p>
+        </p:txBody>
+      </p:sp>
+      <p:sp>
+        <p:nvSpPr>
+          <p:cNvPr id="13" name="TextBox 12"/>
+          <p:cNvSpPr txBox="1"/>
+          <p:nvPr/>
+        </p:nvSpPr>
+        <p:spPr>
+          <a:xfrm>
+            <a:off x="6446520" y="4526279"/>
+            <a:ext cx="2423160" cy="731520"/>
+          </a:xfrm>
+          <a:prstGeom prst="rect">
+            <a:avLst/>
+          </a:prstGeom>
+          <a:noFill/>
+        </p:spPr>
+        <p:txBody>
+          <a:bodyPr wrap="square" lIns="45720" rIns="45720" anchor="b">
+            <a:spAutoFit/>
+          </a:bodyPr>
+          <a:lstStyle/>
+          <a:p>
+            <a:pPr algn="ctr" rtl="0">
+              <a:spcAft>
+                <a:spcPts val="800"/>
+              </a:spcAft>
+              <a:buNone/>
+            </a:pPr>
+            <a:r>
+              <a:rPr lang="he-IL" sz="3000" b="1">
+                <a:solidFill>
+                  <a:srgbClr val="7030A0"/>
+                </a:solidFill>
+                <a:latin typeface="Arial"/>
+                <a:cs typeface="Arial"/>
+              </a:rPr>
+              <a:t>0.92M</a:t>
+            </a:r>
+          </a:p>
+        </p:txBody>
+      </p:sp>
+      <p:sp>
+        <p:nvSpPr>
+          <p:cNvPr id="14" name="TextBox 13"/>
+          <p:cNvSpPr txBox="1"/>
+          <p:nvPr/>
+        </p:nvSpPr>
+        <p:spPr>
+          <a:xfrm>
+            <a:off x="6446520" y="5239512"/>
+            <a:ext cx="2423160" cy="614476"/>
+          </a:xfrm>
+          <a:prstGeom prst="rect">
+            <a:avLst/>
+          </a:prstGeom>
+          <a:noFill/>
+        </p:spPr>
+        <p:txBody>
+          <a:bodyPr wrap="square" lIns="45720" rIns="45720" anchor="t">
+            <a:spAutoFit/>
+          </a:bodyPr>
+          <a:lstStyle/>
+          <a:p>
+            <a:pPr algn="ctr" rtl="1">
+              <a:spcAft>
+                <a:spcPts val="0"/>
+              </a:spcAft>
+              <a:buNone/>
+            </a:pPr>
+            <a:r>
+              <a:rPr lang="he-IL" sz="1500" b="0">
+                <a:solidFill>
+                  <a:srgbClr val="1B242B"/>
+                </a:solidFill>
+                <a:latin typeface="Arial"/>
+                <a:cs typeface="Arial"/>
+              </a:rPr>
+              <a:t>TSTNN</a:t>
             </a:r>
           </a:p>
         </p:txBody>
       </p:sp>
       <p:pic>
         <p:nvPicPr>
-          <p:cNvPr id="8" name="Picture 7" descr="arch_he_dual_path.png"/>
+          <p:cNvPr id="15" name="Picture 14" descr="pres_params.png"/>
           <p:cNvPicPr>
             <a:picLocks noChangeAspect="1"/>
           </p:cNvPicPr>
@@ -25175,123 +23199,93 @@
         </p:blipFill>
         <p:spPr>
           <a:xfrm>
-            <a:off x="1674626" y="1234440"/>
-            <a:ext cx="8842442" cy="2743200"/>
+            <a:off x="457200" y="2129894"/>
+            <a:ext cx="5669280" cy="3329731"/>
           </a:xfrm>
           <a:prstGeom prst="rect">
             <a:avLst/>
           </a:prstGeom>
         </p:spPr>
       </p:pic>
-      <p:pic>
-        <p:nvPicPr>
-          <p:cNvPr id="9" name="Picture 8" descr="pres_eq_attention.png"/>
-          <p:cNvPicPr>
-            <a:picLocks noChangeAspect="1"/>
-          </p:cNvPicPr>
-          <p:nvPr/>
-        </p:nvPicPr>
-        <p:blipFill>
-          <a:blip r:embed="rId4"/>
-          <a:stretch>
-            <a:fillRect/>
-          </a:stretch>
-        </p:blipFill>
-        <p:spPr>
-          <a:xfrm>
-            <a:off x="6583680" y="4399247"/>
-            <a:ext cx="5120639" cy="619824"/>
-          </a:xfrm>
-          <a:prstGeom prst="rect">
-            <a:avLst/>
-          </a:prstGeom>
-        </p:spPr>
-      </p:pic>
-      <p:sp>
-        <p:nvSpPr>
-          <p:cNvPr id="10" name="TextBox 9"/>
-          <p:cNvSpPr txBox="1"/>
-          <p:nvPr/>
-        </p:nvSpPr>
-        <p:spPr>
-          <a:xfrm>
-            <a:off x="6583680" y="5166360"/>
-            <a:ext cx="5120640" cy="1005840"/>
-          </a:xfrm>
-          <a:prstGeom prst="rect">
-            <a:avLst/>
-          </a:prstGeom>
-          <a:noFill/>
-        </p:spPr>
-        <p:txBody>
-          <a:bodyPr wrap="square" lIns="45720" rIns="45720" anchor="t">
-            <a:spAutoFit/>
+      <p:sp>
+        <p:nvSpPr>
+          <p:cNvPr id="16" name="Oval 15"/>
+          <p:cNvSpPr/>
+          <p:nvPr/>
+        </p:nvSpPr>
+        <p:spPr>
+          <a:xfrm>
+            <a:off x="1490472" y="3273552"/>
+            <a:ext cx="1243584" cy="1133856"/>
+          </a:xfrm>
+          <a:prstGeom prst="ellipse">
+            <a:avLst/>
+          </a:prstGeom>
+          <a:solidFill>
+            <a:srgbClr val="FFFFFF"/>
+          </a:solidFill>
+          <a:ln>
+            <a:noFill/>
+          </a:ln>
+          <a:effectLst/>
+        </p:spPr>
+        <p:style>
+          <a:lnRef idx="1">
+            <a:schemeClr val="accent1"/>
+          </a:lnRef>
+          <a:fillRef idx="3">
+            <a:schemeClr val="accent1"/>
+          </a:fillRef>
+          <a:effectRef idx="2">
+            <a:schemeClr val="accent1"/>
+          </a:effectRef>
+          <a:fontRef idx="minor">
+            <a:schemeClr val="lt1"/>
+          </a:fontRef>
+        </p:style>
+        <p:txBody>
+          <a:bodyPr wrap="square" lIns="0" tIns="27432" rIns="0" bIns="27432" rtlCol="0" anchor="ctr">
+            <a:noAutofit/>
           </a:bodyPr>
           <a:lstStyle/>
           <a:p>
-            <a:pPr marL="292608" indent="-292608" algn="r" rtl="1">
-              <a:spcAft>
-                <a:spcPts val="400"/>
-              </a:spcAft>
-              <a:buFont typeface="Arial"/>
-              <a:buChar char="•"/>
-            </a:pPr>
-            <a:r>
-              <a:rPr lang="he-IL" sz="1700" b="0">
-                <a:solidFill>
-                  <a:srgbClr val="1B242B"/>
-                </a:solidFill>
-                <a:latin typeface="Arial"/>
-                <a:cs typeface="Arial"/>
-              </a:rPr>
-              <a:t>4 ראשים, 12 ממדים לכל ראש</a:t>
-            </a:r>
-          </a:p>
-          <a:p>
-            <a:pPr marL="292608" indent="-292608" algn="r" rtl="1">
-              <a:spcAft>
-                <a:spcPts val="400"/>
-              </a:spcAft>
-              <a:buFont typeface="Arial"/>
-              <a:buChar char="•"/>
-            </a:pPr>
-            <a:r>
-              <a:rPr lang="he-IL" sz="1700" b="0">
-                <a:solidFill>
-                  <a:srgbClr val="1B242B"/>
-                </a:solidFill>
-                <a:latin typeface="Arial"/>
-                <a:cs typeface="Arial"/>
-              </a:rPr>
-              <a:t>ה-BiGRU נותן את הסדר, בלי positional encoding</a:t>
-            </a:r>
-          </a:p>
-        </p:txBody>
-      </p:sp>
-      <p:pic>
-        <p:nvPicPr>
-          <p:cNvPr id="11" name="Picture 10" descr="pres_cost.png"/>
-          <p:cNvPicPr>
-            <a:picLocks noChangeAspect="1"/>
-          </p:cNvPicPr>
-          <p:nvPr/>
-        </p:nvPicPr>
-        <p:blipFill>
-          <a:blip r:embed="rId5"/>
-          <a:stretch>
-            <a:fillRect/>
-          </a:stretch>
-        </p:blipFill>
-        <p:spPr>
-          <a:xfrm>
-            <a:off x="578080" y="4069080"/>
-            <a:ext cx="5610399" cy="2286000"/>
-          </a:xfrm>
-          <a:prstGeom prst="rect">
-            <a:avLst/>
-          </a:prstGeom>
-        </p:spPr>
-      </p:pic>
+            <a:pPr algn="ctr" rtl="0">
+              <a:spcAft>
+                <a:spcPts val="0"/>
+              </a:spcAft>
+              <a:buNone/>
+            </a:pPr>
+            <a:r>
+              <a:rPr lang="he-IL" sz="2000" b="1" dirty="0">
+                <a:solidFill>
+                  <a:srgbClr val="1B242B"/>
+                </a:solidFill>
+                <a:latin typeface="Arial"/>
+                <a:cs typeface="Arial"/>
+              </a:rPr>
+              <a:t>0.88M</a:t>
+            </a:r>
+          </a:p>
+          <a:p>
+            <a:pPr algn="ctr" rtl="1">
+              <a:spcAft>
+                <a:spcPts val="0"/>
+              </a:spcAft>
+              <a:buNone/>
+            </a:pPr>
+            <a:r>
+              <a:rPr lang="he-IL" sz="1200" b="0" dirty="0">
+                <a:solidFill>
+                  <a:srgbClr val="5A636A"/>
+                </a:solidFill>
+                <a:latin typeface="Arial"/>
+                <a:cs typeface="Arial"/>
+              </a:rPr>
+              <a:t>פרמטרים</a:t>
+            </a:r>
+          </a:p>
+        </p:txBody>
+      </p:sp>
     </p:spTree>
   </p:cSld>
   <p:clrMapOvr>
@@ -25398,7 +23392,7 @@
                 <a:latin typeface="Arial"/>
                 <a:cs typeface="Arial"/>
               </a:rPr>
-              <a:t>המסכה, הפאזה וכמות הפרמטרים</a:t>
+              <a:t>הנתונים והמדדים</a:t>
             </a:r>
           </a:p>
         </p:txBody>
@@ -25572,120 +23566,21 @@
                 <a:latin typeface="Arial"/>
                 <a:cs typeface="Arial"/>
               </a:rPr>
-              <a:t>7</a:t>
-            </a:r>
-          </a:p>
-        </p:txBody>
-      </p:sp>
-      <p:sp>
-        <p:nvSpPr>
-          <p:cNvPr id="8" name="TextBox 7"/>
-          <p:cNvSpPr txBox="1"/>
-          <p:nvPr/>
-        </p:nvSpPr>
-        <p:spPr>
-          <a:xfrm>
-            <a:off x="6309360" y="1463040"/>
-            <a:ext cx="5394960" cy="2743200"/>
-          </a:xfrm>
-          <a:prstGeom prst="rect">
-            <a:avLst/>
-          </a:prstGeom>
-          <a:noFill/>
-        </p:spPr>
-        <p:txBody>
-          <a:bodyPr wrap="square" lIns="45720" rIns="45720" anchor="t">
-            <a:spAutoFit/>
-          </a:bodyPr>
-          <a:lstStyle/>
-          <a:p>
-            <a:pPr marL="292608" indent="-292608" algn="r" rtl="1">
-              <a:spcAft>
-                <a:spcPts val="1400"/>
-              </a:spcAft>
-              <a:buFont typeface="Arial"/>
-              <a:buChar char="•"/>
-            </a:pPr>
-            <a:r>
-              <a:rPr lang="he-IL" sz="2100" b="0">
-                <a:solidFill>
-                  <a:srgbClr val="1B242B"/>
-                </a:solidFill>
-                <a:latin typeface="Arial"/>
-                <a:cs typeface="Arial"/>
-              </a:rPr>
-              <a:t>המסכה היא ReLU, לא שלילית, ואפשר גם להגביר</a:t>
-            </a:r>
-          </a:p>
-          <a:p>
-            <a:pPr marL="292608" indent="-292608" algn="r" rtl="1">
-              <a:spcAft>
-                <a:spcPts val="1400"/>
-              </a:spcAft>
-              <a:buFont typeface="Arial"/>
-              <a:buChar char="•"/>
-            </a:pPr>
-            <a:r>
-              <a:rPr lang="he-IL" sz="2100" b="0">
-                <a:solidFill>
-                  <a:srgbClr val="1B242B"/>
-                </a:solidFill>
-                <a:latin typeface="Arial"/>
-                <a:cs typeface="Arial"/>
-              </a:rPr>
-              <a:t>היא פועלת על ה-magnitude הדחוס</a:t>
-            </a:r>
-          </a:p>
-          <a:p>
-            <a:pPr marL="292608" indent="-292608" algn="r" rtl="1">
-              <a:spcAft>
-                <a:spcPts val="1400"/>
-              </a:spcAft>
-              <a:buFont typeface="Arial"/>
-              <a:buChar char="•"/>
-            </a:pPr>
-            <a:r>
-              <a:rPr lang="he-IL" sz="2100" b="0">
-                <a:solidFill>
-                  <a:srgbClr val="1B242B"/>
-                </a:solidFill>
-                <a:latin typeface="Arial"/>
-                <a:cs typeface="Arial"/>
-              </a:rPr>
-              <a:t>הפאזה הרועשת נשארת כמו שהיא</a:t>
-            </a:r>
-          </a:p>
-          <a:p>
-            <a:pPr marL="292608" indent="-292608" algn="r" rtl="1">
-              <a:spcAft>
-                <a:spcPts val="1400"/>
-              </a:spcAft>
-              <a:buFont typeface="Arial"/>
-              <a:buChar char="•"/>
-            </a:pPr>
-            <a:r>
-              <a:rPr lang="he-IL" sz="2100" b="0">
-                <a:solidFill>
-                  <a:srgbClr val="1B242B"/>
-                </a:solidFill>
-                <a:latin typeface="Arial"/>
-                <a:cs typeface="Arial"/>
-              </a:rPr>
-              <a:t>התקרה, גם עם magnitude מושלם רק 3.95 PESQ</a:t>
-            </a:r>
-          </a:p>
-        </p:txBody>
-      </p:sp>
-      <p:sp>
-        <p:nvSpPr>
-          <p:cNvPr id="9" name="Rounded Rectangle 8"/>
+              <a:t>3</a:t>
+            </a:r>
+          </a:p>
+        </p:txBody>
+      </p:sp>
+      <p:sp>
+        <p:nvSpPr>
+          <p:cNvPr id="8" name="Rounded Rectangle 7"/>
           <p:cNvSpPr/>
           <p:nvPr/>
         </p:nvSpPr>
         <p:spPr>
           <a:xfrm>
-            <a:off x="9098280" y="4434840"/>
-            <a:ext cx="2606040" cy="1463040"/>
+            <a:off x="8031175" y="1417320"/>
+            <a:ext cx="3474720" cy="1600200"/>
           </a:xfrm>
           <a:prstGeom prst="roundRect">
             <a:avLst>
@@ -25727,14 +23622,14 @@
       </p:sp>
       <p:sp>
         <p:nvSpPr>
-          <p:cNvPr id="10" name="TextBox 9"/>
+          <p:cNvPr id="9" name="TextBox 8"/>
           <p:cNvSpPr txBox="1"/>
           <p:nvPr/>
         </p:nvSpPr>
         <p:spPr>
           <a:xfrm>
-            <a:off x="9189719" y="4526279"/>
-            <a:ext cx="2423160" cy="731520"/>
+            <a:off x="8122615" y="1508760"/>
+            <a:ext cx="3291839" cy="800100"/>
           </a:xfrm>
           <a:prstGeom prst="rect">
             <a:avLst/>
@@ -25747,35 +23642,35 @@
           </a:bodyPr>
           <a:lstStyle/>
           <a:p>
-            <a:pPr algn="ctr" rtl="0">
+            <a:pPr algn="ctr" rtl="1">
               <a:spcAft>
                 <a:spcPts val="800"/>
               </a:spcAft>
               <a:buNone/>
             </a:pPr>
             <a:r>
-              <a:rPr lang="he-IL" sz="3000" b="1">
+              <a:rPr lang="he-IL" sz="4000" b="1">
                 <a:solidFill>
                   <a:srgbClr val="2E75B6"/>
                 </a:solidFill>
                 <a:latin typeface="Arial"/>
                 <a:cs typeface="Arial"/>
               </a:rPr>
-              <a:t>0.88M</a:t>
-            </a:r>
-          </a:p>
-        </p:txBody>
-      </p:sp>
-      <p:sp>
-        <p:nvSpPr>
-          <p:cNvPr id="11" name="TextBox 10"/>
+              <a:t>10,225</a:t>
+            </a:r>
+          </a:p>
+        </p:txBody>
+      </p:sp>
+      <p:sp>
+        <p:nvSpPr>
+          <p:cNvPr id="10" name="TextBox 9"/>
           <p:cNvSpPr txBox="1"/>
           <p:nvPr/>
         </p:nvSpPr>
         <p:spPr>
           <a:xfrm>
-            <a:off x="9189719" y="5239512"/>
-            <a:ext cx="2423160" cy="614476"/>
+            <a:off x="8122615" y="2297430"/>
+            <a:ext cx="3291839" cy="672084"/>
           </a:xfrm>
           <a:prstGeom prst="rect">
             <a:avLst/>
@@ -25802,21 +23697,378 @@
                 <a:latin typeface="Arial"/>
                 <a:cs typeface="Arial"/>
               </a:rPr>
-              <a:t>הפרמטרים שלנו</a:t>
-            </a:r>
-          </a:p>
-        </p:txBody>
-      </p:sp>
-      <p:sp>
-        <p:nvSpPr>
-          <p:cNvPr id="12" name="Rounded Rectangle 11"/>
+              <a:t>משפטי אימון, 25 דוברים, 10 רעשים</a:t>
+            </a:r>
+          </a:p>
+          <a:p>
+            <a:pPr algn="ctr" rtl="1">
+              <a:spcAft>
+                <a:spcPts val="0"/>
+              </a:spcAft>
+              <a:buNone/>
+            </a:pPr>
+            <a:r>
+              <a:rPr lang="he-IL" sz="1500" b="1">
+                <a:solidFill>
+                  <a:srgbClr val="2E75B6"/>
+                </a:solidFill>
+                <a:latin typeface="Arial"/>
+                <a:cs typeface="Arial"/>
+              </a:rPr>
+              <a:t>Epoch</a:t>
+            </a:r>
+          </a:p>
+        </p:txBody>
+      </p:sp>
+      <p:sp>
+        <p:nvSpPr>
+          <p:cNvPr id="11" name="Rounded Rectangle 10"/>
           <p:cNvSpPr/>
           <p:nvPr/>
         </p:nvSpPr>
         <p:spPr>
           <a:xfrm>
-            <a:off x="6355080" y="4434840"/>
-            <a:ext cx="2606040" cy="1463040"/>
+            <a:off x="4282135" y="1417320"/>
+            <a:ext cx="3474720" cy="1600200"/>
+          </a:xfrm>
+          <a:prstGeom prst="roundRect">
+            <a:avLst>
+              <a:gd name="adj" fmla="val 12000"/>
+            </a:avLst>
+          </a:prstGeom>
+          <a:solidFill>
+            <a:srgbClr val="FFF2CC"/>
+          </a:solidFill>
+          <a:ln w="19050">
+            <a:solidFill>
+              <a:srgbClr val="BF9000"/>
+            </a:solidFill>
+          </a:ln>
+          <a:effectLst/>
+        </p:spPr>
+        <p:style>
+          <a:lnRef idx="1">
+            <a:schemeClr val="accent1"/>
+          </a:lnRef>
+          <a:fillRef idx="3">
+            <a:schemeClr val="accent1"/>
+          </a:fillRef>
+          <a:effectRef idx="2">
+            <a:schemeClr val="accent1"/>
+          </a:effectRef>
+          <a:fontRef idx="minor">
+            <a:schemeClr val="lt1"/>
+          </a:fontRef>
+        </p:style>
+        <p:txBody>
+          <a:bodyPr rtlCol="0" anchor="ctr"/>
+          <a:lstStyle/>
+          <a:p>
+            <a:pPr algn="ctr"/>
+            <a:endParaRPr/>
+          </a:p>
+        </p:txBody>
+      </p:sp>
+      <p:sp>
+        <p:nvSpPr>
+          <p:cNvPr id="12" name="TextBox 11"/>
+          <p:cNvSpPr txBox="1"/>
+          <p:nvPr/>
+        </p:nvSpPr>
+        <p:spPr>
+          <a:xfrm>
+            <a:off x="4373575" y="1508760"/>
+            <a:ext cx="3291839" cy="800100"/>
+          </a:xfrm>
+          <a:prstGeom prst="rect">
+            <a:avLst/>
+          </a:prstGeom>
+          <a:noFill/>
+        </p:spPr>
+        <p:txBody>
+          <a:bodyPr wrap="square" lIns="45720" rIns="45720" anchor="b">
+            <a:spAutoFit/>
+          </a:bodyPr>
+          <a:lstStyle/>
+          <a:p>
+            <a:pPr algn="ctr" rtl="1">
+              <a:spcAft>
+                <a:spcPts val="800"/>
+              </a:spcAft>
+              <a:buNone/>
+            </a:pPr>
+            <a:r>
+              <a:rPr lang="he-IL" sz="4000" b="1">
+                <a:solidFill>
+                  <a:srgbClr val="BF9000"/>
+                </a:solidFill>
+                <a:latin typeface="Arial"/>
+                <a:cs typeface="Arial"/>
+              </a:rPr>
+              <a:t>1,347</a:t>
+            </a:r>
+          </a:p>
+        </p:txBody>
+      </p:sp>
+      <p:sp>
+        <p:nvSpPr>
+          <p:cNvPr id="13" name="TextBox 12"/>
+          <p:cNvSpPr txBox="1"/>
+          <p:nvPr/>
+        </p:nvSpPr>
+        <p:spPr>
+          <a:xfrm>
+            <a:off x="4373575" y="2297430"/>
+            <a:ext cx="3291839" cy="672084"/>
+          </a:xfrm>
+          <a:prstGeom prst="rect">
+            <a:avLst/>
+          </a:prstGeom>
+          <a:noFill/>
+        </p:spPr>
+        <p:txBody>
+          <a:bodyPr wrap="square" lIns="45720" rIns="45720" anchor="t">
+            <a:spAutoFit/>
+          </a:bodyPr>
+          <a:lstStyle/>
+          <a:p>
+            <a:pPr algn="ctr" rtl="1">
+              <a:spcAft>
+                <a:spcPts val="0"/>
+              </a:spcAft>
+              <a:buNone/>
+            </a:pPr>
+            <a:r>
+              <a:rPr lang="he-IL" sz="1500" b="0">
+                <a:solidFill>
+                  <a:srgbClr val="1B242B"/>
+                </a:solidFill>
+                <a:latin typeface="Arial"/>
+                <a:cs typeface="Arial"/>
+              </a:rPr>
+              <a:t>משפטים של 3 דוברים אחרים</a:t>
+            </a:r>
+          </a:p>
+          <a:p>
+            <a:pPr algn="ctr" rtl="1">
+              <a:spcAft>
+                <a:spcPts val="0"/>
+              </a:spcAft>
+              <a:buNone/>
+            </a:pPr>
+            <a:r>
+              <a:rPr lang="he-IL" sz="1500" b="1">
+                <a:solidFill>
+                  <a:srgbClr val="BF9000"/>
+                </a:solidFill>
+                <a:latin typeface="Arial"/>
+                <a:cs typeface="Arial"/>
+              </a:rPr>
+              <a:t>Validation</a:t>
+            </a:r>
+          </a:p>
+        </p:txBody>
+      </p:sp>
+      <p:sp>
+        <p:nvSpPr>
+          <p:cNvPr id="14" name="Rounded Rectangle 13"/>
+          <p:cNvSpPr/>
+          <p:nvPr/>
+        </p:nvSpPr>
+        <p:spPr>
+          <a:xfrm>
+            <a:off x="533095" y="1417320"/>
+            <a:ext cx="3474720" cy="1600200"/>
+          </a:xfrm>
+          <a:prstGeom prst="roundRect">
+            <a:avLst>
+              <a:gd name="adj" fmla="val 12000"/>
+            </a:avLst>
+          </a:prstGeom>
+          <a:solidFill>
+            <a:srgbClr val="E2F0D9"/>
+          </a:solidFill>
+          <a:ln w="19050">
+            <a:solidFill>
+              <a:srgbClr val="548235"/>
+            </a:solidFill>
+          </a:ln>
+          <a:effectLst/>
+        </p:spPr>
+        <p:style>
+          <a:lnRef idx="1">
+            <a:schemeClr val="accent1"/>
+          </a:lnRef>
+          <a:fillRef idx="3">
+            <a:schemeClr val="accent1"/>
+          </a:fillRef>
+          <a:effectRef idx="2">
+            <a:schemeClr val="accent1"/>
+          </a:effectRef>
+          <a:fontRef idx="minor">
+            <a:schemeClr val="lt1"/>
+          </a:fontRef>
+        </p:style>
+        <p:txBody>
+          <a:bodyPr rtlCol="0" anchor="ctr"/>
+          <a:lstStyle/>
+          <a:p>
+            <a:pPr algn="ctr"/>
+            <a:endParaRPr/>
+          </a:p>
+        </p:txBody>
+      </p:sp>
+      <p:sp>
+        <p:nvSpPr>
+          <p:cNvPr id="15" name="TextBox 14"/>
+          <p:cNvSpPr txBox="1"/>
+          <p:nvPr/>
+        </p:nvSpPr>
+        <p:spPr>
+          <a:xfrm>
+            <a:off x="624535" y="1508760"/>
+            <a:ext cx="3291839" cy="800100"/>
+          </a:xfrm>
+          <a:prstGeom prst="rect">
+            <a:avLst/>
+          </a:prstGeom>
+          <a:noFill/>
+        </p:spPr>
+        <p:txBody>
+          <a:bodyPr wrap="square" lIns="45720" rIns="45720" anchor="b">
+            <a:spAutoFit/>
+          </a:bodyPr>
+          <a:lstStyle/>
+          <a:p>
+            <a:pPr algn="ctr" rtl="1">
+              <a:spcAft>
+                <a:spcPts val="800"/>
+              </a:spcAft>
+              <a:buNone/>
+            </a:pPr>
+            <a:r>
+              <a:rPr lang="he-IL" sz="4000" b="1">
+                <a:solidFill>
+                  <a:srgbClr val="548235"/>
+                </a:solidFill>
+                <a:latin typeface="Arial"/>
+                <a:cs typeface="Arial"/>
+              </a:rPr>
+              <a:t>824</a:t>
+            </a:r>
+          </a:p>
+        </p:txBody>
+      </p:sp>
+      <p:sp>
+        <p:nvSpPr>
+          <p:cNvPr id="16" name="TextBox 15"/>
+          <p:cNvSpPr txBox="1"/>
+          <p:nvPr/>
+        </p:nvSpPr>
+        <p:spPr>
+          <a:xfrm>
+            <a:off x="624535" y="2297430"/>
+            <a:ext cx="3291839" cy="672084"/>
+          </a:xfrm>
+          <a:prstGeom prst="rect">
+            <a:avLst/>
+          </a:prstGeom>
+          <a:noFill/>
+        </p:spPr>
+        <p:txBody>
+          <a:bodyPr wrap="square" lIns="45720" rIns="45720" anchor="t">
+            <a:spAutoFit/>
+          </a:bodyPr>
+          <a:lstStyle/>
+          <a:p>
+            <a:pPr algn="ctr" rtl="1">
+              <a:spcAft>
+                <a:spcPts val="0"/>
+              </a:spcAft>
+              <a:buNone/>
+            </a:pPr>
+            <a:r>
+              <a:rPr lang="he-IL" sz="1500" b="0">
+                <a:solidFill>
+                  <a:srgbClr val="1B242B"/>
+                </a:solidFill>
+                <a:latin typeface="Arial"/>
+                <a:cs typeface="Arial"/>
+              </a:rPr>
+              <a:t>משפטים, דוברים ורעשים חדשים</a:t>
+            </a:r>
+          </a:p>
+          <a:p>
+            <a:pPr algn="ctr" rtl="1">
+              <a:spcAft>
+                <a:spcPts val="0"/>
+              </a:spcAft>
+              <a:buNone/>
+            </a:pPr>
+            <a:r>
+              <a:rPr lang="he-IL" sz="1500" b="1">
+                <a:solidFill>
+                  <a:srgbClr val="548235"/>
+                </a:solidFill>
+                <a:latin typeface="Arial"/>
+                <a:cs typeface="Arial"/>
+              </a:rPr>
+              <a:t>Test</a:t>
+            </a:r>
+          </a:p>
+        </p:txBody>
+      </p:sp>
+      <p:sp>
+        <p:nvSpPr>
+          <p:cNvPr id="17" name="TextBox 16"/>
+          <p:cNvSpPr txBox="1"/>
+          <p:nvPr/>
+        </p:nvSpPr>
+        <p:spPr>
+          <a:xfrm>
+            <a:off x="548640" y="3291840"/>
+            <a:ext cx="11094415" cy="457200"/>
+          </a:xfrm>
+          <a:prstGeom prst="rect">
+            <a:avLst/>
+          </a:prstGeom>
+          <a:noFill/>
+        </p:spPr>
+        <p:txBody>
+          <a:bodyPr wrap="square" lIns="45720" rIns="45720" anchor="t">
+            <a:spAutoFit/>
+          </a:bodyPr>
+          <a:lstStyle/>
+          <a:p>
+            <a:pPr algn="ctr" rtl="1">
+              <a:spcAft>
+                <a:spcPts val="800"/>
+              </a:spcAft>
+              <a:buNone/>
+            </a:pPr>
+            <a:r>
+              <a:rPr lang="he-IL" sz="1700" b="0">
+                <a:solidFill>
+                  <a:srgbClr val="5A636A"/>
+                </a:solidFill>
+                <a:latin typeface="Arial"/>
+                <a:cs typeface="Arial"/>
+              </a:rPr>
+              <a:t>SNR של 0 עד ‎15 [dB]‏ באימון, 2.5 עד ‎17.5 [dB]‏ בבדיקה, דגימה ב-‎16 [kHz]‏</a:t>
+            </a:r>
+          </a:p>
+        </p:txBody>
+      </p:sp>
+      <p:sp>
+        <p:nvSpPr>
+          <p:cNvPr id="18" name="Rounded Rectangle 17"/>
+          <p:cNvSpPr/>
+          <p:nvPr/>
+        </p:nvSpPr>
+        <p:spPr>
+          <a:xfrm>
+            <a:off x="8031175" y="3977639"/>
+            <a:ext cx="3474720" cy="1600200"/>
           </a:xfrm>
           <a:prstGeom prst="roundRect">
             <a:avLst>
@@ -25858,14 +24110,14 @@
       </p:sp>
       <p:sp>
         <p:nvSpPr>
-          <p:cNvPr id="13" name="TextBox 12"/>
+          <p:cNvPr id="19" name="TextBox 18"/>
           <p:cNvSpPr txBox="1"/>
           <p:nvPr/>
         </p:nvSpPr>
         <p:spPr>
           <a:xfrm>
-            <a:off x="6446520" y="4526279"/>
-            <a:ext cx="2423160" cy="731520"/>
+            <a:off x="8122615" y="4069079"/>
+            <a:ext cx="3291839" cy="800100"/>
           </a:xfrm>
           <a:prstGeom prst="rect">
             <a:avLst/>
@@ -25878,35 +24130,35 @@
           </a:bodyPr>
           <a:lstStyle/>
           <a:p>
-            <a:pPr algn="ctr" rtl="0">
+            <a:pPr algn="ctr" rtl="1">
               <a:spcAft>
                 <a:spcPts val="800"/>
               </a:spcAft>
               <a:buNone/>
             </a:pPr>
             <a:r>
-              <a:rPr lang="he-IL" sz="3000" b="1">
+              <a:rPr lang="he-IL" sz="2800" b="1">
                 <a:solidFill>
                   <a:srgbClr val="7030A0"/>
                 </a:solidFill>
                 <a:latin typeface="Arial"/>
                 <a:cs typeface="Arial"/>
               </a:rPr>
-              <a:t>0.92M</a:t>
-            </a:r>
-          </a:p>
-        </p:txBody>
-      </p:sp>
-      <p:sp>
-        <p:nvSpPr>
-          <p:cNvPr id="14" name="TextBox 13"/>
+              <a:t>PESQ</a:t>
+            </a:r>
+          </a:p>
+        </p:txBody>
+      </p:sp>
+      <p:sp>
+        <p:nvSpPr>
+          <p:cNvPr id="20" name="TextBox 19"/>
           <p:cNvSpPr txBox="1"/>
           <p:nvPr/>
         </p:nvSpPr>
         <p:spPr>
           <a:xfrm>
-            <a:off x="6446520" y="5239512"/>
-            <a:ext cx="2423160" cy="614476"/>
+            <a:off x="8122615" y="4857750"/>
+            <a:ext cx="3291839" cy="672084"/>
           </a:xfrm>
           <a:prstGeom prst="rect">
             <a:avLst/>
@@ -25933,54 +24185,34 @@
                 <a:latin typeface="Arial"/>
                 <a:cs typeface="Arial"/>
               </a:rPr>
-              <a:t>TSTNN</a:t>
-            </a:r>
-          </a:p>
-        </p:txBody>
-      </p:sp>
-      <p:pic>
-        <p:nvPicPr>
-          <p:cNvPr id="15" name="Picture 14" descr="pres_params.png"/>
-          <p:cNvPicPr>
-            <a:picLocks noChangeAspect="1"/>
-          </p:cNvPicPr>
-          <p:nvPr/>
-        </p:nvPicPr>
-        <p:blipFill>
-          <a:blip r:embed="rId3"/>
-          <a:stretch>
-            <a:fillRect/>
-          </a:stretch>
-        </p:blipFill>
-        <p:spPr>
-          <a:xfrm>
-            <a:off x="457200" y="2129894"/>
-            <a:ext cx="5669280" cy="3329731"/>
-          </a:xfrm>
-          <a:prstGeom prst="rect">
-            <a:avLst/>
-          </a:prstGeom>
-        </p:spPr>
-      </p:pic>
-      <p:sp>
-        <p:nvSpPr>
-          <p:cNvPr id="16" name="Oval 15"/>
+              <a:t>איכות כפי שהאוזן שומעת, 1 עד 4.5</a:t>
+            </a:r>
+          </a:p>
+        </p:txBody>
+      </p:sp>
+      <p:sp>
+        <p:nvSpPr>
+          <p:cNvPr id="21" name="Rounded Rectangle 20"/>
           <p:cNvSpPr/>
           <p:nvPr/>
         </p:nvSpPr>
         <p:spPr>
           <a:xfrm>
-            <a:off x="1490472" y="3273552"/>
-            <a:ext cx="1243584" cy="1133856"/>
-          </a:xfrm>
-          <a:prstGeom prst="ellipse">
-            <a:avLst/>
+            <a:off x="4282135" y="3977639"/>
+            <a:ext cx="3474720" cy="1600200"/>
+          </a:xfrm>
+          <a:prstGeom prst="roundRect">
+            <a:avLst>
+              <a:gd name="adj" fmla="val 12000"/>
+            </a:avLst>
           </a:prstGeom>
           <a:solidFill>
-            <a:srgbClr val="FFFFFF"/>
+            <a:srgbClr val="FBE5D6"/>
           </a:solidFill>
-          <a:ln>
-            <a:noFill/>
+          <a:ln w="19050">
+            <a:solidFill>
+              <a:srgbClr val="C55A11"/>
+            </a:solidFill>
           </a:ln>
           <a:effectLst/>
         </p:spPr>
@@ -25999,44 +24231,223 @@
           </a:fontRef>
         </p:style>
         <p:txBody>
-          <a:bodyPr wrap="square" lIns="0" tIns="27432" rIns="0" bIns="27432" rtlCol="0" anchor="ctr">
-            <a:noAutofit/>
+          <a:bodyPr rtlCol="0" anchor="ctr"/>
+          <a:lstStyle/>
+          <a:p>
+            <a:pPr algn="ctr"/>
+            <a:endParaRPr/>
+          </a:p>
+        </p:txBody>
+      </p:sp>
+      <p:sp>
+        <p:nvSpPr>
+          <p:cNvPr id="22" name="TextBox 21"/>
+          <p:cNvSpPr txBox="1"/>
+          <p:nvPr/>
+        </p:nvSpPr>
+        <p:spPr>
+          <a:xfrm>
+            <a:off x="4373575" y="4069079"/>
+            <a:ext cx="3291839" cy="800100"/>
+          </a:xfrm>
+          <a:prstGeom prst="rect">
+            <a:avLst/>
+          </a:prstGeom>
+          <a:noFill/>
+        </p:spPr>
+        <p:txBody>
+          <a:bodyPr wrap="square" lIns="45720" rIns="45720" anchor="b">
+            <a:spAutoFit/>
           </a:bodyPr>
           <a:lstStyle/>
           <a:p>
-            <a:pPr algn="ctr" rtl="0">
+            <a:pPr algn="ctr" rtl="1">
+              <a:spcAft>
+                <a:spcPts val="800"/>
+              </a:spcAft>
+              <a:buNone/>
+            </a:pPr>
+            <a:r>
+              <a:rPr lang="he-IL" sz="2800" b="1">
+                <a:solidFill>
+                  <a:srgbClr val="C55A11"/>
+                </a:solidFill>
+                <a:latin typeface="Arial"/>
+                <a:cs typeface="Arial"/>
+              </a:rPr>
+              <a:t>STOI, ESTOI</a:t>
+            </a:r>
+          </a:p>
+        </p:txBody>
+      </p:sp>
+      <p:sp>
+        <p:nvSpPr>
+          <p:cNvPr id="23" name="TextBox 22"/>
+          <p:cNvSpPr txBox="1"/>
+          <p:nvPr/>
+        </p:nvSpPr>
+        <p:spPr>
+          <a:xfrm>
+            <a:off x="4373575" y="4857750"/>
+            <a:ext cx="3291839" cy="672084"/>
+          </a:xfrm>
+          <a:prstGeom prst="rect">
+            <a:avLst/>
+          </a:prstGeom>
+          <a:noFill/>
+        </p:spPr>
+        <p:txBody>
+          <a:bodyPr wrap="square" lIns="45720" rIns="45720" anchor="t">
+            <a:spAutoFit/>
+          </a:bodyPr>
+          <a:lstStyle/>
+          <a:p>
+            <a:pPr algn="ctr" rtl="1">
               <a:spcAft>
                 <a:spcPts val="0"/>
               </a:spcAft>
               <a:buNone/>
             </a:pPr>
             <a:r>
-              <a:rPr lang="he-IL" sz="2000" b="1" dirty="0">
-                <a:solidFill>
-                  <a:srgbClr val="1B242B"/>
-                </a:solidFill>
-                <a:latin typeface="Arial"/>
-                <a:cs typeface="Arial"/>
-              </a:rPr>
-              <a:t>0.88M</a:t>
-            </a:r>
-          </a:p>
+              <a:rPr lang="he-IL" sz="1500" b="0">
+                <a:solidFill>
+                  <a:srgbClr val="1B242B"/>
+                </a:solidFill>
+                <a:latin typeface="Arial"/>
+                <a:cs typeface="Arial"/>
+              </a:rPr>
+              <a:t>מובנות, 0 עד 1</a:t>
+            </a:r>
+          </a:p>
+        </p:txBody>
+      </p:sp>
+      <p:sp>
+        <p:nvSpPr>
+          <p:cNvPr id="24" name="Rounded Rectangle 23"/>
+          <p:cNvSpPr/>
+          <p:nvPr/>
+        </p:nvSpPr>
+        <p:spPr>
+          <a:xfrm>
+            <a:off x="533095" y="3977639"/>
+            <a:ext cx="3474720" cy="1600200"/>
+          </a:xfrm>
+          <a:prstGeom prst="roundRect">
+            <a:avLst>
+              <a:gd name="adj" fmla="val 12000"/>
+            </a:avLst>
+          </a:prstGeom>
+          <a:solidFill>
+            <a:srgbClr val="DCEBF7"/>
+          </a:solidFill>
+          <a:ln w="19050">
+            <a:solidFill>
+              <a:srgbClr val="2E75B6"/>
+            </a:solidFill>
+          </a:ln>
+          <a:effectLst/>
+        </p:spPr>
+        <p:style>
+          <a:lnRef idx="1">
+            <a:schemeClr val="accent1"/>
+          </a:lnRef>
+          <a:fillRef idx="3">
+            <a:schemeClr val="accent1"/>
+          </a:fillRef>
+          <a:effectRef idx="2">
+            <a:schemeClr val="accent1"/>
+          </a:effectRef>
+          <a:fontRef idx="minor">
+            <a:schemeClr val="lt1"/>
+          </a:fontRef>
+        </p:style>
+        <p:txBody>
+          <a:bodyPr rtlCol="0" anchor="ctr"/>
+          <a:lstStyle/>
+          <a:p>
+            <a:pPr algn="ctr"/>
+            <a:endParaRPr/>
+          </a:p>
+        </p:txBody>
+      </p:sp>
+      <p:sp>
+        <p:nvSpPr>
+          <p:cNvPr id="25" name="TextBox 24"/>
+          <p:cNvSpPr txBox="1"/>
+          <p:nvPr/>
+        </p:nvSpPr>
+        <p:spPr>
+          <a:xfrm>
+            <a:off x="624535" y="4069079"/>
+            <a:ext cx="3291839" cy="800100"/>
+          </a:xfrm>
+          <a:prstGeom prst="rect">
+            <a:avLst/>
+          </a:prstGeom>
+          <a:noFill/>
+        </p:spPr>
+        <p:txBody>
+          <a:bodyPr wrap="square" lIns="45720" rIns="45720" anchor="b">
+            <a:spAutoFit/>
+          </a:bodyPr>
+          <a:lstStyle/>
           <a:p>
             <a:pPr algn="ctr" rtl="1">
               <a:spcAft>
+                <a:spcPts val="800"/>
+              </a:spcAft>
+              <a:buNone/>
+            </a:pPr>
+            <a:r>
+              <a:rPr lang="he-IL" sz="2800" b="1">
+                <a:solidFill>
+                  <a:srgbClr val="2E75B6"/>
+                </a:solidFill>
+                <a:latin typeface="Arial"/>
+                <a:cs typeface="Arial"/>
+              </a:rPr>
+              <a:t>SI-SDR, SSNR</a:t>
+            </a:r>
+          </a:p>
+        </p:txBody>
+      </p:sp>
+      <p:sp>
+        <p:nvSpPr>
+          <p:cNvPr id="26" name="TextBox 25"/>
+          <p:cNvSpPr txBox="1"/>
+          <p:nvPr/>
+        </p:nvSpPr>
+        <p:spPr>
+          <a:xfrm>
+            <a:off x="624535" y="4857750"/>
+            <a:ext cx="3291839" cy="672084"/>
+          </a:xfrm>
+          <a:prstGeom prst="rect">
+            <a:avLst/>
+          </a:prstGeom>
+          <a:noFill/>
+        </p:spPr>
+        <p:txBody>
+          <a:bodyPr wrap="square" lIns="45720" rIns="45720" anchor="t">
+            <a:spAutoFit/>
+          </a:bodyPr>
+          <a:lstStyle/>
+          <a:p>
+            <a:pPr algn="ctr" rtl="1">
+              <a:spcAft>
                 <a:spcPts val="0"/>
               </a:spcAft>
               <a:buNone/>
             </a:pPr>
             <a:r>
-              <a:rPr lang="he-IL" sz="1200" b="0" dirty="0">
-                <a:solidFill>
-                  <a:srgbClr val="5A636A"/>
-                </a:solidFill>
-                <a:latin typeface="Arial"/>
-                <a:cs typeface="Arial"/>
-              </a:rPr>
-              <a:t>פרמטרים</a:t>
+              <a:rPr lang="he-IL" sz="1500" b="0">
+                <a:solidFill>
+                  <a:srgbClr val="1B242B"/>
+                </a:solidFill>
+                <a:latin typeface="Arial"/>
+                <a:cs typeface="Arial"/>
+              </a:rPr>
+              <a:t>עיוות האות, ב-dB</a:t>
             </a:r>
           </a:p>
         </p:txBody>
@@ -26794,17 +25205,7 @@
                 <a:latin typeface="Arial"/>
                 <a:cs typeface="Arial"/>
               </a:rPr>
-              <a:t>‏</a:t>
-            </a:r>
-            <a:r>
-              <a:rPr lang="he-IL" sz="2000" b="1" dirty="0">
-                <a:solidFill>
-                  <a:srgbClr val="7030A0"/>
-                </a:solidFill>
-                <a:latin typeface="Arial"/>
-                <a:cs typeface="Arial"/>
-              </a:rPr>
-              <a:t>0.88 מיליון</a:t>
+              <a:t>‏0.88 מיליון</a:t>
             </a:r>
             <a:r>
               <a:rPr lang="he-IL" sz="1600" b="0" dirty="0">
@@ -26931,17 +25332,7 @@
                 <a:latin typeface="Arial"/>
                 <a:cs typeface="Arial"/>
               </a:rPr>
-              <a:t>‎</a:t>
-            </a:r>
-            <a:r>
-              <a:rPr lang="he-IL" sz="1600" b="1" dirty="0">
-                <a:solidFill>
-                  <a:srgbClr val="1F4E79"/>
-                </a:solidFill>
-                <a:latin typeface="Arial"/>
-                <a:cs typeface="Arial"/>
-              </a:rPr>
-              <a:t> (קונבולוציות)</a:t>
+              <a:t>‎ (קונבולוציות)</a:t>
             </a:r>
           </a:p>
         </p:txBody>
@@ -27830,17 +26221,7 @@
                 <a:latin typeface="Arial"/>
                 <a:cs typeface="Arial"/>
               </a:rPr>
-              <a:t>‎</a:t>
-            </a:r>
-            <a:r>
-              <a:rPr lang="he-IL" sz="1600" b="1" dirty="0">
-                <a:solidFill>
-                  <a:srgbClr val="1F4E79"/>
-                </a:solidFill>
-                <a:latin typeface="Arial"/>
-                <a:cs typeface="Arial"/>
-              </a:rPr>
-              <a:t> (קונבולוציות)</a:t>
+              <a:t>‎ (קונבולוציות)</a:t>
             </a:r>
           </a:p>
         </p:txBody>
@@ -28123,47 +26504,27 @@
                 <a:latin typeface="Arial"/>
                 <a:cs typeface="Arial"/>
               </a:rPr>
-              <a:t>‏</a:t>
-            </a:r>
-            <a:r>
-              <a:rPr lang="he-IL" sz="1400" b="1" dirty="0">
+              <a:t>‏0 פרמטרים: </a:t>
+            </a:r>
+            <a:r>
+              <a:rPr lang="en-US" sz="1400" b="0" dirty="0">
                 <a:solidFill>
                   <a:srgbClr val="5A636A"/>
                 </a:solidFill>
                 <a:latin typeface="Arial"/>
                 <a:cs typeface="Arial"/>
               </a:rPr>
-              <a:t>0 פרמטרים: </a:t>
-            </a:r>
-            <a:r>
-              <a:rPr lang="en-US" sz="1400" b="0" dirty="0">
+              <a:t>STFT</a:t>
+            </a:r>
+            <a:r>
+              <a:rPr lang="he-IL" sz="1400" b="0" dirty="0">
                 <a:solidFill>
                   <a:srgbClr val="5A636A"/>
                 </a:solidFill>
                 <a:latin typeface="Arial"/>
                 <a:cs typeface="Arial"/>
               </a:rPr>
-              <a:t>STFT</a:t>
-            </a:r>
-            <a:r>
-              <a:rPr lang="he-IL" sz="1400" b="0" dirty="0">
-                <a:solidFill>
-                  <a:srgbClr val="5A636A"/>
-                </a:solidFill>
-                <a:latin typeface="Arial"/>
-                <a:cs typeface="Arial"/>
-              </a:rPr>
-              <a:t>‎</a:t>
-            </a:r>
-            <a:r>
-              <a:rPr lang="he-IL" sz="1400" b="0" dirty="0">
-                <a:solidFill>
-                  <a:srgbClr val="5A636A"/>
-                </a:solidFill>
-                <a:latin typeface="Arial"/>
-                <a:cs typeface="Arial"/>
-              </a:rPr>
-              <a:t>, דחיסה, תקנון והמסכה עצמה</a:t>
+              <a:t>‎, דחיסה, תקנון והמסכה עצמה</a:t>
             </a:r>
           </a:p>
         </p:txBody>
@@ -28346,17 +26707,7 @@
                 <a:latin typeface="Arial"/>
                 <a:cs typeface="Arial"/>
               </a:rPr>
-              <a:t>‎</a:t>
-            </a:r>
-            <a:r>
-              <a:rPr lang="he-IL" sz="1500" b="0" dirty="0">
-                <a:solidFill>
-                  <a:srgbClr val="1B242B"/>
-                </a:solidFill>
-                <a:latin typeface="Arial"/>
-                <a:cs typeface="Arial"/>
-              </a:rPr>
-              <a:t> של הקלטות שלמות (12 שניות אודיו) עובר את כל השרשרת, ויוצא אות משופר</a:t>
+              <a:t>‎ של הקלטות שלמות (12 שניות אודיו) עובר את כל השרשרת, ויוצא אות משופר</a:t>
             </a:r>
           </a:p>
         </p:txBody>
@@ -28488,17 +26839,7 @@
                 <a:latin typeface="Arial"/>
                 <a:cs typeface="Arial"/>
               </a:rPr>
-              <a:t>‎</a:t>
-            </a:r>
-            <a:r>
-              <a:rPr lang="he-IL" sz="1500" b="0" dirty="0">
-                <a:solidFill>
-                  <a:srgbClr val="1B242B"/>
-                </a:solidFill>
-                <a:latin typeface="Arial"/>
-                <a:cs typeface="Arial"/>
-              </a:rPr>
-              <a:t> הדחוס</a:t>
+              <a:t>‎ הדחוס</a:t>
             </a:r>
           </a:p>
         </p:txBody>
@@ -28620,17 +26961,7 @@
                 <a:latin typeface="Arial"/>
                 <a:cs typeface="Arial"/>
               </a:rPr>
-              <a:t>‎</a:t>
-            </a:r>
-            <a:r>
-              <a:rPr lang="he-IL" sz="1500" b="0" dirty="0">
-                <a:solidFill>
-                  <a:srgbClr val="1B242B"/>
-                </a:solidFill>
-                <a:latin typeface="Arial"/>
-                <a:cs typeface="Arial"/>
-              </a:rPr>
-              <a:t>: לכל אחת מ-0.88 מיליון המשקולות מחשבים כמה היא תרמה לשגיאה, הגרדיאנט</a:t>
+              <a:t>‎: לכל אחת מ-0.88 מיליון המשקולות מחשבים כמה היא תרמה לשגיאה, הגרדיאנט</a:t>
             </a:r>
           </a:p>
         </p:txBody>
@@ -28752,17 +27083,7 @@
                 <a:latin typeface="Arial"/>
                 <a:cs typeface="Arial"/>
               </a:rPr>
-              <a:t>‎</a:t>
-            </a:r>
-            <a:r>
-              <a:rPr lang="he-IL" sz="1500" b="0" dirty="0">
-                <a:solidFill>
-                  <a:srgbClr val="1B242B"/>
-                </a:solidFill>
-                <a:latin typeface="Arial"/>
-                <a:cs typeface="Arial"/>
-              </a:rPr>
-              <a:t> מזיז כל משקולת צעד קטן בכיוון שמקטין את השגיאה (פירוט בשקופית הבאה)</a:t>
+              <a:t>‎ מזיז כל משקולת צעד קטן בכיוון שמקטין את השגיאה (פירוט בשקופית הבאה)</a:t>
             </a:r>
           </a:p>
         </p:txBody>
